--- a/Presentation Slides.pptx
+++ b/Presentation Slides.pptx
@@ -8,16 +8,18 @@
     <p:sldId id="256" r:id="rId2"/>
     <p:sldId id="257" r:id="rId3"/>
     <p:sldId id="259" r:id="rId4"/>
-    <p:sldId id="260" r:id="rId5"/>
-    <p:sldId id="261" r:id="rId6"/>
-    <p:sldId id="262" r:id="rId7"/>
-    <p:sldId id="263" r:id="rId8"/>
-    <p:sldId id="264" r:id="rId9"/>
-    <p:sldId id="265" r:id="rId10"/>
-    <p:sldId id="266" r:id="rId11"/>
-    <p:sldId id="267" r:id="rId12"/>
-    <p:sldId id="268" r:id="rId13"/>
-    <p:sldId id="269" r:id="rId14"/>
+    <p:sldId id="270" r:id="rId5"/>
+    <p:sldId id="260" r:id="rId6"/>
+    <p:sldId id="261" r:id="rId7"/>
+    <p:sldId id="262" r:id="rId8"/>
+    <p:sldId id="271" r:id="rId9"/>
+    <p:sldId id="263" r:id="rId10"/>
+    <p:sldId id="264" r:id="rId11"/>
+    <p:sldId id="265" r:id="rId12"/>
+    <p:sldId id="266" r:id="rId13"/>
+    <p:sldId id="267" r:id="rId14"/>
+    <p:sldId id="268" r:id="rId15"/>
+    <p:sldId id="269" r:id="rId16"/>
   </p:sldIdLst>
   <p:sldSz cx="12192000" cy="6858000"/>
   <p:notesSz cx="6858000" cy="9144000"/>
@@ -310,7 +312,7 @@
           <a:p>
             <a:fld id="{D7738FB9-22AD-4E01-AF00-6F9E1163FDCA}" type="datetimeFigureOut">
               <a:rPr lang="en-NZ" smtClean="0"/>
-              <a:t>7/10/2025</a:t>
+              <a:t>12/10/2025</a:t>
             </a:fld>
             <a:endParaRPr lang="en-NZ"/>
           </a:p>
@@ -510,7 +512,7 @@
           <a:p>
             <a:fld id="{D7738FB9-22AD-4E01-AF00-6F9E1163FDCA}" type="datetimeFigureOut">
               <a:rPr lang="en-NZ" smtClean="0"/>
-              <a:t>7/10/2025</a:t>
+              <a:t>12/10/2025</a:t>
             </a:fld>
             <a:endParaRPr lang="en-NZ"/>
           </a:p>
@@ -720,7 +722,7 @@
           <a:p>
             <a:fld id="{D7738FB9-22AD-4E01-AF00-6F9E1163FDCA}" type="datetimeFigureOut">
               <a:rPr lang="en-NZ" smtClean="0"/>
-              <a:t>7/10/2025</a:t>
+              <a:t>12/10/2025</a:t>
             </a:fld>
             <a:endParaRPr lang="en-NZ"/>
           </a:p>
@@ -920,7 +922,7 @@
           <a:p>
             <a:fld id="{D7738FB9-22AD-4E01-AF00-6F9E1163FDCA}" type="datetimeFigureOut">
               <a:rPr lang="en-NZ" smtClean="0"/>
-              <a:t>7/10/2025</a:t>
+              <a:t>12/10/2025</a:t>
             </a:fld>
             <a:endParaRPr lang="en-NZ"/>
           </a:p>
@@ -1196,7 +1198,7 @@
           <a:p>
             <a:fld id="{D7738FB9-22AD-4E01-AF00-6F9E1163FDCA}" type="datetimeFigureOut">
               <a:rPr lang="en-NZ" smtClean="0"/>
-              <a:t>7/10/2025</a:t>
+              <a:t>12/10/2025</a:t>
             </a:fld>
             <a:endParaRPr lang="en-NZ"/>
           </a:p>
@@ -1464,7 +1466,7 @@
           <a:p>
             <a:fld id="{D7738FB9-22AD-4E01-AF00-6F9E1163FDCA}" type="datetimeFigureOut">
               <a:rPr lang="en-NZ" smtClean="0"/>
-              <a:t>7/10/2025</a:t>
+              <a:t>12/10/2025</a:t>
             </a:fld>
             <a:endParaRPr lang="en-NZ"/>
           </a:p>
@@ -1879,7 +1881,7 @@
           <a:p>
             <a:fld id="{D7738FB9-22AD-4E01-AF00-6F9E1163FDCA}" type="datetimeFigureOut">
               <a:rPr lang="en-NZ" smtClean="0"/>
-              <a:t>7/10/2025</a:t>
+              <a:t>12/10/2025</a:t>
             </a:fld>
             <a:endParaRPr lang="en-NZ"/>
           </a:p>
@@ -2021,7 +2023,7 @@
           <a:p>
             <a:fld id="{D7738FB9-22AD-4E01-AF00-6F9E1163FDCA}" type="datetimeFigureOut">
               <a:rPr lang="en-NZ" smtClean="0"/>
-              <a:t>7/10/2025</a:t>
+              <a:t>12/10/2025</a:t>
             </a:fld>
             <a:endParaRPr lang="en-NZ"/>
           </a:p>
@@ -2134,7 +2136,7 @@
           <a:p>
             <a:fld id="{D7738FB9-22AD-4E01-AF00-6F9E1163FDCA}" type="datetimeFigureOut">
               <a:rPr lang="en-NZ" smtClean="0"/>
-              <a:t>7/10/2025</a:t>
+              <a:t>12/10/2025</a:t>
             </a:fld>
             <a:endParaRPr lang="en-NZ"/>
           </a:p>
@@ -2447,7 +2449,7 @@
           <a:p>
             <a:fld id="{D7738FB9-22AD-4E01-AF00-6F9E1163FDCA}" type="datetimeFigureOut">
               <a:rPr lang="en-NZ" smtClean="0"/>
-              <a:t>7/10/2025</a:t>
+              <a:t>12/10/2025</a:t>
             </a:fld>
             <a:endParaRPr lang="en-NZ"/>
           </a:p>
@@ -2736,7 +2738,7 @@
           <a:p>
             <a:fld id="{D7738FB9-22AD-4E01-AF00-6F9E1163FDCA}" type="datetimeFigureOut">
               <a:rPr lang="en-NZ" smtClean="0"/>
-              <a:t>7/10/2025</a:t>
+              <a:t>12/10/2025</a:t>
             </a:fld>
             <a:endParaRPr lang="en-NZ"/>
           </a:p>
@@ -2979,7 +2981,7 @@
           <a:p>
             <a:fld id="{D7738FB9-22AD-4E01-AF00-6F9E1163FDCA}" type="datetimeFigureOut">
               <a:rPr lang="en-NZ" smtClean="0"/>
-              <a:t>7/10/2025</a:t>
+              <a:t>12/10/2025</a:t>
             </a:fld>
             <a:endParaRPr lang="en-NZ"/>
           </a:p>
@@ -3470,6 +3472,184 @@
         <p:cNvPr id="1" name="">
           <a:extLst>
             <a:ext uri="{FF2B5EF4-FFF2-40B4-BE49-F238E27FC236}">
+              <a16:creationId xmlns:a16="http://schemas.microsoft.com/office/drawing/2014/main" id="{D42E9B6F-69F2-D404-C88B-3A1708D97E13}"/>
+            </a:ext>
+          </a:extLst>
+        </p:cNvPr>
+        <p:cNvGrpSpPr/>
+        <p:nvPr/>
+      </p:nvGrpSpPr>
+      <p:grpSpPr>
+        <a:xfrm>
+          <a:off x="0" y="0"/>
+          <a:ext cx="0" cy="0"/>
+          <a:chOff x="0" y="0"/>
+          <a:chExt cx="0" cy="0"/>
+        </a:xfrm>
+      </p:grpSpPr>
+      <p:sp>
+        <p:nvSpPr>
+          <p:cNvPr id="2" name="Title 1">
+            <a:extLst>
+              <a:ext uri="{FF2B5EF4-FFF2-40B4-BE49-F238E27FC236}">
+                <a16:creationId xmlns:a16="http://schemas.microsoft.com/office/drawing/2014/main" id="{011A136F-5311-7E41-587D-793B5A825835}"/>
+              </a:ext>
+            </a:extLst>
+          </p:cNvPr>
+          <p:cNvSpPr>
+            <a:spLocks noGrp="1"/>
+          </p:cNvSpPr>
+          <p:nvPr>
+            <p:ph type="title"/>
+          </p:nvPr>
+        </p:nvSpPr>
+        <p:spPr/>
+        <p:txBody>
+          <a:bodyPr/>
+          <a:lstStyle/>
+          <a:p>
+            <a:r>
+              <a:rPr lang="en-NZ" dirty="0"/>
+              <a:t>Selenium</a:t>
+            </a:r>
+          </a:p>
+        </p:txBody>
+      </p:sp>
+      <p:sp>
+        <p:nvSpPr>
+          <p:cNvPr id="3" name="Content Placeholder 2">
+            <a:extLst>
+              <a:ext uri="{FF2B5EF4-FFF2-40B4-BE49-F238E27FC236}">
+                <a16:creationId xmlns:a16="http://schemas.microsoft.com/office/drawing/2014/main" id="{1D792F9E-8EC8-41E6-FA3F-0C0D45503683}"/>
+              </a:ext>
+            </a:extLst>
+          </p:cNvPr>
+          <p:cNvSpPr>
+            <a:spLocks noGrp="1"/>
+          </p:cNvSpPr>
+          <p:nvPr>
+            <p:ph idx="1"/>
+          </p:nvPr>
+        </p:nvSpPr>
+        <p:spPr/>
+        <p:txBody>
+          <a:bodyPr/>
+          <a:lstStyle/>
+          <a:p>
+            <a:endParaRPr lang="en-NZ"/>
+          </a:p>
+        </p:txBody>
+      </p:sp>
+    </p:spTree>
+    <p:extLst>
+      <p:ext uri="{BB962C8B-B14F-4D97-AF65-F5344CB8AC3E}">
+        <p14:creationId xmlns:p14="http://schemas.microsoft.com/office/powerpoint/2010/main" val="4113579959"/>
+      </p:ext>
+    </p:extLst>
+  </p:cSld>
+  <p:clrMapOvr>
+    <a:masterClrMapping/>
+  </p:clrMapOvr>
+</p:sld>
+</file>
+
+<file path=ppt/slides/slide11.xml><?xml version="1.0" encoding="utf-8"?>
+<p:sld xmlns:a="http://schemas.openxmlformats.org/drawingml/2006/main" xmlns:r="http://schemas.openxmlformats.org/officeDocument/2006/relationships" xmlns:p="http://schemas.openxmlformats.org/presentationml/2006/main">
+  <p:cSld>
+    <p:spTree>
+      <p:nvGrpSpPr>
+        <p:cNvPr id="1" name="">
+          <a:extLst>
+            <a:ext uri="{FF2B5EF4-FFF2-40B4-BE49-F238E27FC236}">
+              <a16:creationId xmlns:a16="http://schemas.microsoft.com/office/drawing/2014/main" id="{4420F141-39C8-F5C0-0C26-7B051A8E6694}"/>
+            </a:ext>
+          </a:extLst>
+        </p:cNvPr>
+        <p:cNvGrpSpPr/>
+        <p:nvPr/>
+      </p:nvGrpSpPr>
+      <p:grpSpPr>
+        <a:xfrm>
+          <a:off x="0" y="0"/>
+          <a:ext cx="0" cy="0"/>
+          <a:chOff x="0" y="0"/>
+          <a:chExt cx="0" cy="0"/>
+        </a:xfrm>
+      </p:grpSpPr>
+      <p:sp>
+        <p:nvSpPr>
+          <p:cNvPr id="2" name="Title 1">
+            <a:extLst>
+              <a:ext uri="{FF2B5EF4-FFF2-40B4-BE49-F238E27FC236}">
+                <a16:creationId xmlns:a16="http://schemas.microsoft.com/office/drawing/2014/main" id="{24155ACB-0F50-1570-C225-6A1F5B1483CC}"/>
+              </a:ext>
+            </a:extLst>
+          </p:cNvPr>
+          <p:cNvSpPr>
+            <a:spLocks noGrp="1"/>
+          </p:cNvSpPr>
+          <p:nvPr>
+            <p:ph type="title"/>
+          </p:nvPr>
+        </p:nvSpPr>
+        <p:spPr/>
+        <p:txBody>
+          <a:bodyPr/>
+          <a:lstStyle/>
+          <a:p>
+            <a:r>
+              <a:rPr lang="en-NZ" dirty="0"/>
+              <a:t>JMeter</a:t>
+            </a:r>
+          </a:p>
+        </p:txBody>
+      </p:sp>
+      <p:sp>
+        <p:nvSpPr>
+          <p:cNvPr id="3" name="Content Placeholder 2">
+            <a:extLst>
+              <a:ext uri="{FF2B5EF4-FFF2-40B4-BE49-F238E27FC236}">
+                <a16:creationId xmlns:a16="http://schemas.microsoft.com/office/drawing/2014/main" id="{87E6B5A8-FD74-EEC8-7E6B-B5A9D35A52FF}"/>
+              </a:ext>
+            </a:extLst>
+          </p:cNvPr>
+          <p:cNvSpPr>
+            <a:spLocks noGrp="1"/>
+          </p:cNvSpPr>
+          <p:nvPr>
+            <p:ph idx="1"/>
+          </p:nvPr>
+        </p:nvSpPr>
+        <p:spPr/>
+        <p:txBody>
+          <a:bodyPr/>
+          <a:lstStyle/>
+          <a:p>
+            <a:endParaRPr lang="en-NZ"/>
+          </a:p>
+        </p:txBody>
+      </p:sp>
+    </p:spTree>
+    <p:extLst>
+      <p:ext uri="{BB962C8B-B14F-4D97-AF65-F5344CB8AC3E}">
+        <p14:creationId xmlns:p14="http://schemas.microsoft.com/office/powerpoint/2010/main" val="1155972948"/>
+      </p:ext>
+    </p:extLst>
+  </p:cSld>
+  <p:clrMapOvr>
+    <a:masterClrMapping/>
+  </p:clrMapOvr>
+</p:sld>
+</file>
+
+<file path=ppt/slides/slide12.xml><?xml version="1.0" encoding="utf-8"?>
+<p:sld xmlns:a="http://schemas.openxmlformats.org/drawingml/2006/main" xmlns:r="http://schemas.openxmlformats.org/officeDocument/2006/relationships" xmlns:p="http://schemas.openxmlformats.org/presentationml/2006/main">
+  <p:cSld>
+    <p:spTree>
+      <p:nvGrpSpPr>
+        <p:cNvPr id="1" name="">
+          <a:extLst>
+            <a:ext uri="{FF2B5EF4-FFF2-40B4-BE49-F238E27FC236}">
               <a16:creationId xmlns:a16="http://schemas.microsoft.com/office/drawing/2014/main" id="{75DAB85E-1E6E-E131-1D07-4DBCB0D75D42}"/>
             </a:ext>
           </a:extLst>
@@ -3551,7 +3731,7 @@
 </p:sld>
 </file>
 
-<file path=ppt/slides/slide11.xml><?xml version="1.0" encoding="utf-8"?>
+<file path=ppt/slides/slide13.xml><?xml version="1.0" encoding="utf-8"?>
 <p:sld xmlns:a="http://schemas.openxmlformats.org/drawingml/2006/main" xmlns:r="http://schemas.openxmlformats.org/officeDocument/2006/relationships" xmlns:p="http://schemas.openxmlformats.org/presentationml/2006/main">
   <p:cSld>
     <p:spTree>
@@ -3623,7 +3803,27 @@
           <a:bodyPr/>
           <a:lstStyle/>
           <a:p>
-            <a:endParaRPr lang="en-NZ"/>
+            <a:r>
+              <a:rPr lang="en-NZ" dirty="0"/>
+              <a:t>Faced challenges while completing Unit and Automation testing.</a:t>
+            </a:r>
+          </a:p>
+          <a:p>
+            <a:r>
+              <a:rPr lang="en-NZ" dirty="0"/>
+              <a:t>Challenges faced with  </a:t>
+            </a:r>
+            <a:r>
+              <a:rPr lang="en-NZ" dirty="0" err="1"/>
+              <a:t>GitBash</a:t>
+            </a:r>
+            <a:r>
+              <a:rPr lang="en-NZ" dirty="0"/>
+              <a:t> while uploading files and merging them with our repository. </a:t>
+            </a:r>
+          </a:p>
+          <a:p>
+            <a:endParaRPr lang="en-NZ" dirty="0"/>
           </a:p>
         </p:txBody>
       </p:sp>
@@ -3640,7 +3840,7 @@
 </p:sld>
 </file>
 
-<file path=ppt/slides/slide12.xml><?xml version="1.0" encoding="utf-8"?>
+<file path=ppt/slides/slide14.xml><?xml version="1.0" encoding="utf-8"?>
 <p:sld xmlns:a="http://schemas.openxmlformats.org/drawingml/2006/main" xmlns:r="http://schemas.openxmlformats.org/officeDocument/2006/relationships" xmlns:p="http://schemas.openxmlformats.org/presentationml/2006/main">
   <p:cSld>
     <p:spTree>
@@ -3712,7 +3912,10 @@
           <a:bodyPr/>
           <a:lstStyle/>
           <a:p>
-            <a:endParaRPr lang="en-NZ"/>
+            <a:r>
+              <a:rPr lang="en-NZ" dirty="0"/>
+              <a:t>App works 👍</a:t>
+            </a:r>
           </a:p>
         </p:txBody>
       </p:sp>
@@ -3729,7 +3932,7 @@
 </p:sld>
 </file>
 
-<file path=ppt/slides/slide13.xml><?xml version="1.0" encoding="utf-8"?>
+<file path=ppt/slides/slide15.xml><?xml version="1.0" encoding="utf-8"?>
 <p:sld xmlns:a="http://schemas.openxmlformats.org/drawingml/2006/main" xmlns:r="http://schemas.openxmlformats.org/officeDocument/2006/relationships" xmlns:p="http://schemas.openxmlformats.org/presentationml/2006/main">
   <p:cSld>
     <p:spTree>
@@ -3884,7 +4087,11 @@
           <a:bodyPr/>
           <a:lstStyle/>
           <a:p>
-            <a:endParaRPr lang="en-NZ"/>
+            <a:pPr algn="just"/>
+            <a:r>
+              <a:rPr lang="en-NZ" dirty="0"/>
+              <a:t>A secure and strong like metal, web based library management system for managing books, authors, and administrator accounts with full CRUD features and authentications</a:t>
+            </a:r>
           </a:p>
         </p:txBody>
       </p:sp>
@@ -3973,7 +4180,31 @@
           <a:bodyPr/>
           <a:lstStyle/>
           <a:p>
-            <a:endParaRPr lang="en-NZ"/>
+            <a:r>
+              <a:rPr lang="en-NZ" dirty="0"/>
+              <a:t>Full CRUD operations for all the pages </a:t>
+            </a:r>
+          </a:p>
+          <a:p>
+            <a:r>
+              <a:rPr lang="en-NZ" dirty="0"/>
+              <a:t>Search Books, Authors, Admins.</a:t>
+            </a:r>
+          </a:p>
+          <a:p>
+            <a:r>
+              <a:rPr lang="en-NZ" dirty="0"/>
+              <a:t>Sorting by Name or Title (AZ to ZA). </a:t>
+            </a:r>
+          </a:p>
+          <a:p>
+            <a:endParaRPr lang="en-NZ" dirty="0"/>
+          </a:p>
+          <a:p>
+            <a:endParaRPr lang="en-NZ" dirty="0"/>
+          </a:p>
+          <a:p>
+            <a:endParaRPr lang="en-NZ" dirty="0"/>
           </a:p>
         </p:txBody>
       </p:sp>
@@ -3991,6 +4222,119 @@
 </file>
 
 <file path=ppt/slides/slide4.xml><?xml version="1.0" encoding="utf-8"?>
+<p:sld xmlns:a="http://schemas.openxmlformats.org/drawingml/2006/main" xmlns:r="http://schemas.openxmlformats.org/officeDocument/2006/relationships" xmlns:p="http://schemas.openxmlformats.org/presentationml/2006/main">
+  <p:cSld>
+    <p:spTree>
+      <p:nvGrpSpPr>
+        <p:cNvPr id="1" name=""/>
+        <p:cNvGrpSpPr/>
+        <p:nvPr/>
+      </p:nvGrpSpPr>
+      <p:grpSpPr>
+        <a:xfrm>
+          <a:off x="0" y="0"/>
+          <a:ext cx="0" cy="0"/>
+          <a:chOff x="0" y="0"/>
+          <a:chExt cx="0" cy="0"/>
+        </a:xfrm>
+      </p:grpSpPr>
+      <p:sp>
+        <p:nvSpPr>
+          <p:cNvPr id="2" name="Title 1">
+            <a:extLst>
+              <a:ext uri="{FF2B5EF4-FFF2-40B4-BE49-F238E27FC236}">
+                <a16:creationId xmlns:a16="http://schemas.microsoft.com/office/drawing/2014/main" id="{F698CF08-B7B3-E7F1-C3E7-30061EF0B2FE}"/>
+              </a:ext>
+            </a:extLst>
+          </p:cNvPr>
+          <p:cNvSpPr>
+            <a:spLocks noGrp="1"/>
+          </p:cNvSpPr>
+          <p:nvPr>
+            <p:ph type="title"/>
+          </p:nvPr>
+        </p:nvSpPr>
+        <p:spPr/>
+        <p:txBody>
+          <a:bodyPr/>
+          <a:lstStyle/>
+          <a:p>
+            <a:r>
+              <a:rPr lang="en-NZ" dirty="0"/>
+              <a:t>Advance Features </a:t>
+            </a:r>
+          </a:p>
+        </p:txBody>
+      </p:sp>
+      <p:sp>
+        <p:nvSpPr>
+          <p:cNvPr id="3" name="Content Placeholder 2">
+            <a:extLst>
+              <a:ext uri="{FF2B5EF4-FFF2-40B4-BE49-F238E27FC236}">
+                <a16:creationId xmlns:a16="http://schemas.microsoft.com/office/drawing/2014/main" id="{62E09994-70AB-E4D7-37D7-F773DA2CC6E8}"/>
+              </a:ext>
+            </a:extLst>
+          </p:cNvPr>
+          <p:cNvSpPr>
+            <a:spLocks noGrp="1"/>
+          </p:cNvSpPr>
+          <p:nvPr>
+            <p:ph idx="1"/>
+          </p:nvPr>
+        </p:nvSpPr>
+        <p:spPr/>
+        <p:txBody>
+          <a:bodyPr/>
+          <a:lstStyle/>
+          <a:p>
+            <a:r>
+              <a:rPr lang="en-NZ" dirty="0"/>
+              <a:t>Implemented Validations for all the pages.</a:t>
+            </a:r>
+          </a:p>
+          <a:p>
+            <a:r>
+              <a:rPr lang="en-NZ" dirty="0"/>
+              <a:t>Session based authentication for Login/Logout.</a:t>
+            </a:r>
+          </a:p>
+          <a:p>
+            <a:r>
+              <a:rPr lang="en-NZ" dirty="0"/>
+              <a:t>Password Hashing </a:t>
+            </a:r>
+          </a:p>
+          <a:p>
+            <a:r>
+              <a:rPr lang="en-NZ" dirty="0"/>
+              <a:t>Account Activation and Deactivation </a:t>
+            </a:r>
+          </a:p>
+          <a:p>
+            <a:r>
+              <a:rPr lang="en-NZ" dirty="0"/>
+              <a:t>Strong password requirements </a:t>
+            </a:r>
+          </a:p>
+          <a:p>
+            <a:endParaRPr lang="en-NZ" dirty="0"/>
+          </a:p>
+        </p:txBody>
+      </p:sp>
+    </p:spTree>
+    <p:extLst>
+      <p:ext uri="{BB962C8B-B14F-4D97-AF65-F5344CB8AC3E}">
+        <p14:creationId xmlns:p14="http://schemas.microsoft.com/office/powerpoint/2010/main" val="499917506"/>
+      </p:ext>
+    </p:extLst>
+  </p:cSld>
+  <p:clrMapOvr>
+    <a:masterClrMapping/>
+  </p:clrMapOvr>
+</p:sld>
+</file>
+
+<file path=ppt/slides/slide5.xml><?xml version="1.0" encoding="utf-8"?>
 <p:sld xmlns:a="http://schemas.openxmlformats.org/drawingml/2006/main" xmlns:r="http://schemas.openxmlformats.org/officeDocument/2006/relationships" xmlns:p="http://schemas.openxmlformats.org/presentationml/2006/main">
   <p:cSld>
     <p:spTree>
@@ -4079,7 +4423,7 @@
 </p:sld>
 </file>
 
-<file path=ppt/slides/slide5.xml><?xml version="1.0" encoding="utf-8"?>
+<file path=ppt/slides/slide6.xml><?xml version="1.0" encoding="utf-8"?>
 <p:sld xmlns:a="http://schemas.openxmlformats.org/drawingml/2006/main" xmlns:r="http://schemas.openxmlformats.org/officeDocument/2006/relationships" xmlns:p="http://schemas.openxmlformats.org/presentationml/2006/main">
   <p:cSld>
     <p:spTree>
@@ -4151,7 +4495,7 @@
           <a:bodyPr/>
           <a:lstStyle/>
           <a:p>
-            <a:endParaRPr lang="en-NZ"/>
+            <a:endParaRPr lang="en-NZ" dirty="0"/>
           </a:p>
         </p:txBody>
       </p:sp>
@@ -4168,7 +4512,7 @@
 </p:sld>
 </file>
 
-<file path=ppt/slides/slide6.xml><?xml version="1.0" encoding="utf-8"?>
+<file path=ppt/slides/slide7.xml><?xml version="1.0" encoding="utf-8"?>
 <p:sld xmlns:a="http://schemas.openxmlformats.org/drawingml/2006/main" xmlns:r="http://schemas.openxmlformats.org/officeDocument/2006/relationships" xmlns:p="http://schemas.openxmlformats.org/presentationml/2006/main">
   <p:cSld>
     <p:spTree>
@@ -4240,7 +4584,7 @@
           <a:bodyPr/>
           <a:lstStyle/>
           <a:p>
-            <a:endParaRPr lang="en-NZ"/>
+            <a:endParaRPr lang="en-NZ" dirty="0"/>
           </a:p>
         </p:txBody>
       </p:sp>
@@ -4257,7 +4601,90 @@
 </p:sld>
 </file>
 
-<file path=ppt/slides/slide7.xml><?xml version="1.0" encoding="utf-8"?>
+<file path=ppt/slides/slide8.xml><?xml version="1.0" encoding="utf-8"?>
+<p:sld xmlns:a="http://schemas.openxmlformats.org/drawingml/2006/main" xmlns:r="http://schemas.openxmlformats.org/officeDocument/2006/relationships" xmlns:p="http://schemas.openxmlformats.org/presentationml/2006/main">
+  <p:cSld>
+    <p:spTree>
+      <p:nvGrpSpPr>
+        <p:cNvPr id="1" name=""/>
+        <p:cNvGrpSpPr/>
+        <p:nvPr/>
+      </p:nvGrpSpPr>
+      <p:grpSpPr>
+        <a:xfrm>
+          <a:off x="0" y="0"/>
+          <a:ext cx="0" cy="0"/>
+          <a:chOff x="0" y="0"/>
+          <a:chExt cx="0" cy="0"/>
+        </a:xfrm>
+      </p:grpSpPr>
+      <p:sp>
+        <p:nvSpPr>
+          <p:cNvPr id="2" name="Title 1">
+            <a:extLst>
+              <a:ext uri="{FF2B5EF4-FFF2-40B4-BE49-F238E27FC236}">
+                <a16:creationId xmlns:a16="http://schemas.microsoft.com/office/drawing/2014/main" id="{B881FA52-B779-FD9D-307E-308C558060AC}"/>
+              </a:ext>
+            </a:extLst>
+          </p:cNvPr>
+          <p:cNvSpPr>
+            <a:spLocks noGrp="1"/>
+          </p:cNvSpPr>
+          <p:nvPr>
+            <p:ph type="title"/>
+          </p:nvPr>
+        </p:nvSpPr>
+        <p:spPr/>
+        <p:txBody>
+          <a:bodyPr/>
+          <a:lstStyle/>
+          <a:p>
+            <a:r>
+              <a:rPr lang="en-NZ" dirty="0"/>
+              <a:t>Testing WBT</a:t>
+            </a:r>
+          </a:p>
+        </p:txBody>
+      </p:sp>
+      <p:sp>
+        <p:nvSpPr>
+          <p:cNvPr id="3" name="Content Placeholder 2">
+            <a:extLst>
+              <a:ext uri="{FF2B5EF4-FFF2-40B4-BE49-F238E27FC236}">
+                <a16:creationId xmlns:a16="http://schemas.microsoft.com/office/drawing/2014/main" id="{F5A3E1BD-C8B9-8816-4BFA-740580581E17}"/>
+              </a:ext>
+            </a:extLst>
+          </p:cNvPr>
+          <p:cNvSpPr>
+            <a:spLocks noGrp="1"/>
+          </p:cNvSpPr>
+          <p:nvPr>
+            <p:ph idx="1"/>
+          </p:nvPr>
+        </p:nvSpPr>
+        <p:spPr/>
+        <p:txBody>
+          <a:bodyPr/>
+          <a:lstStyle/>
+          <a:p>
+            <a:endParaRPr lang="en-NZ" dirty="0"/>
+          </a:p>
+        </p:txBody>
+      </p:sp>
+    </p:spTree>
+    <p:extLst>
+      <p:ext uri="{BB962C8B-B14F-4D97-AF65-F5344CB8AC3E}">
+        <p14:creationId xmlns:p14="http://schemas.microsoft.com/office/powerpoint/2010/main" val="2373449628"/>
+      </p:ext>
+    </p:extLst>
+  </p:cSld>
+  <p:clrMapOvr>
+    <a:masterClrMapping/>
+  </p:clrMapOvr>
+</p:sld>
+</file>
+
+<file path=ppt/slides/slide9.xml><?xml version="1.0" encoding="utf-8"?>
 <p:sld xmlns:a="http://schemas.openxmlformats.org/drawingml/2006/main" xmlns:r="http://schemas.openxmlformats.org/officeDocument/2006/relationships" xmlns:p="http://schemas.openxmlformats.org/presentationml/2006/main">
   <p:cSld>
     <p:spTree>
@@ -4308,213 +4735,360 @@
           </a:p>
         </p:txBody>
       </p:sp>
-      <p:sp>
-        <p:nvSpPr>
-          <p:cNvPr id="3" name="Content Placeholder 2">
-            <a:extLst>
-              <a:ext uri="{FF2B5EF4-FFF2-40B4-BE49-F238E27FC236}">
-                <a16:creationId xmlns:a16="http://schemas.microsoft.com/office/drawing/2014/main" id="{DC09E865-75CD-A073-CC4B-5040651A8C76}"/>
-              </a:ext>
-            </a:extLst>
-          </p:cNvPr>
-          <p:cNvSpPr>
-            <a:spLocks noGrp="1"/>
-          </p:cNvSpPr>
+      <p:graphicFrame>
+        <p:nvGraphicFramePr>
+          <p:cNvPr id="5" name="Content Placeholder 4">
+            <a:extLst>
+              <a:ext uri="{FF2B5EF4-FFF2-40B4-BE49-F238E27FC236}">
+                <a16:creationId xmlns:a16="http://schemas.microsoft.com/office/drawing/2014/main" id="{614738AC-5827-DAA3-7669-907C85472248}"/>
+              </a:ext>
+            </a:extLst>
+          </p:cNvPr>
+          <p:cNvGraphicFramePr>
+            <a:graphicFrameLocks noGrp="1"/>
+          </p:cNvGraphicFramePr>
           <p:nvPr>
             <p:ph idx="1"/>
-          </p:nvPr>
-        </p:nvSpPr>
-        <p:spPr/>
-        <p:txBody>
-          <a:bodyPr/>
-          <a:lstStyle/>
-          <a:p>
-            <a:endParaRPr lang="en-NZ"/>
-          </a:p>
-        </p:txBody>
-      </p:sp>
+            <p:extLst>
+              <p:ext uri="{D42A27DB-BD31-4B8C-83A1-F6EECF244321}">
+                <p14:modId xmlns:p14="http://schemas.microsoft.com/office/powerpoint/2010/main" val="720130833"/>
+              </p:ext>
+            </p:extLst>
+          </p:nvPr>
+        </p:nvGraphicFramePr>
+        <p:xfrm>
+          <a:off x="838200" y="1276985"/>
+          <a:ext cx="10515600" cy="5301552"/>
+        </p:xfrm>
+        <a:graphic>
+          <a:graphicData uri="http://schemas.openxmlformats.org/drawingml/2006/table">
+            <a:tbl>
+              <a:tblPr firstRow="1" bandRow="1">
+                <a:tableStyleId>{073A0DAA-6AF3-43AB-8588-CEC1D06C72B9}</a:tableStyleId>
+              </a:tblPr>
+              <a:tblGrid>
+                <a:gridCol w="5257800">
+                  <a:extLst>
+                    <a:ext uri="{9D8B030D-6E8A-4147-A177-3AD203B41FA5}">
+                      <a16:colId xmlns:a16="http://schemas.microsoft.com/office/drawing/2014/main" val="326035675"/>
+                    </a:ext>
+                  </a:extLst>
+                </a:gridCol>
+                <a:gridCol w="5257800">
+                  <a:extLst>
+                    <a:ext uri="{9D8B030D-6E8A-4147-A177-3AD203B41FA5}">
+                      <a16:colId xmlns:a16="http://schemas.microsoft.com/office/drawing/2014/main" val="1316273911"/>
+                    </a:ext>
+                  </a:extLst>
+                </a:gridCol>
+              </a:tblGrid>
+              <a:tr h="446693">
+                <a:tc>
+                  <a:txBody>
+                    <a:bodyPr/>
+                    <a:lstStyle/>
+                    <a:p>
+                      <a:pPr algn="ctr"/>
+                      <a:r>
+                        <a:rPr lang="en-NZ" sz="2400" dirty="0"/>
+                        <a:t>FMLCOntrollerUnitTest.cs</a:t>
+                      </a:r>
+                    </a:p>
+                  </a:txBody>
+                  <a:tcPr/>
+                </a:tc>
+                <a:tc>
+                  <a:txBody>
+                    <a:bodyPr/>
+                    <a:lstStyle/>
+                    <a:p>
+                      <a:pPr algn="ctr"/>
+                      <a:r>
+                        <a:rPr lang="en-NZ" sz="2400" dirty="0" err="1"/>
+                        <a:t>FMLModelUnitTesting.cs</a:t>
+                      </a:r>
+                      <a:endParaRPr lang="en-NZ" sz="2400" dirty="0"/>
+                    </a:p>
+                  </a:txBody>
+                  <a:tcPr/>
+                </a:tc>
+                <a:extLst>
+                  <a:ext uri="{0D108BD9-81ED-4DB2-BD59-A6C34878D82A}">
+                    <a16:rowId xmlns:a16="http://schemas.microsoft.com/office/drawing/2014/main" val="1989318864"/>
+                  </a:ext>
+                </a:extLst>
+              </a:tr>
+              <a:tr h="541940">
+                <a:tc>
+                  <a:txBody>
+                    <a:bodyPr/>
+                    <a:lstStyle/>
+                    <a:p>
+                      <a:r>
+                        <a:rPr lang="en-NZ" dirty="0"/>
+                        <a:t>HomeController =  Page rendering and error handling.</a:t>
+                      </a:r>
+                    </a:p>
+                  </a:txBody>
+                  <a:tcPr/>
+                </a:tc>
+                <a:tc>
+                  <a:txBody>
+                    <a:bodyPr/>
+                    <a:lstStyle/>
+                    <a:p>
+                      <a:r>
+                        <a:rPr lang="en-NZ" dirty="0"/>
+                        <a:t>RegisterViewModel = Admin registration validation.</a:t>
+                      </a:r>
+                    </a:p>
+                  </a:txBody>
+                  <a:tcPr/>
+                </a:tc>
+                <a:extLst>
+                  <a:ext uri="{0D108BD9-81ED-4DB2-BD59-A6C34878D82A}">
+                    <a16:rowId xmlns:a16="http://schemas.microsoft.com/office/drawing/2014/main" val="2688362453"/>
+                  </a:ext>
+                </a:extLst>
+              </a:tr>
+              <a:tr h="541940">
+                <a:tc>
+                  <a:txBody>
+                    <a:bodyPr/>
+                    <a:lstStyle/>
+                    <a:p>
+                      <a:r>
+                        <a:rPr lang="en-NZ" dirty="0"/>
+                        <a:t>BooksController =  Full CRUD operations , search, sorting  and validation.</a:t>
+                      </a:r>
+                    </a:p>
+                  </a:txBody>
+                  <a:tcPr/>
+                </a:tc>
+                <a:tc>
+                  <a:txBody>
+                    <a:bodyPr/>
+                    <a:lstStyle/>
+                    <a:p>
+                      <a:r>
+                        <a:rPr lang="en-NZ" dirty="0"/>
+                        <a:t>LoginViewModel = Login  Validation </a:t>
+                      </a:r>
+                    </a:p>
+                  </a:txBody>
+                  <a:tcPr/>
+                </a:tc>
+                <a:extLst>
+                  <a:ext uri="{0D108BD9-81ED-4DB2-BD59-A6C34878D82A}">
+                    <a16:rowId xmlns:a16="http://schemas.microsoft.com/office/drawing/2014/main" val="2586540094"/>
+                  </a:ext>
+                </a:extLst>
+              </a:tr>
+              <a:tr h="541940">
+                <a:tc>
+                  <a:txBody>
+                    <a:bodyPr/>
+                    <a:lstStyle/>
+                    <a:p>
+                      <a:r>
+                        <a:rPr lang="en-NZ" dirty="0"/>
+                        <a:t>AuthorController = Author management ad data validation.</a:t>
+                      </a:r>
+                    </a:p>
+                  </a:txBody>
+                  <a:tcPr/>
+                </a:tc>
+                <a:tc>
+                  <a:txBody>
+                    <a:bodyPr/>
+                    <a:lstStyle/>
+                    <a:p>
+                      <a:r>
+                        <a:rPr lang="en-NZ" dirty="0"/>
+                        <a:t>BookModel = Book data validation and constraints.</a:t>
+                      </a:r>
+                    </a:p>
+                  </a:txBody>
+                  <a:tcPr/>
+                </a:tc>
+                <a:extLst>
+                  <a:ext uri="{0D108BD9-81ED-4DB2-BD59-A6C34878D82A}">
+                    <a16:rowId xmlns:a16="http://schemas.microsoft.com/office/drawing/2014/main" val="4234818270"/>
+                  </a:ext>
+                </a:extLst>
+              </a:tr>
+              <a:tr h="541940">
+                <a:tc>
+                  <a:txBody>
+                    <a:bodyPr/>
+                    <a:lstStyle/>
+                    <a:p>
+                      <a:r>
+                        <a:rPr lang="en-NZ" dirty="0"/>
+                        <a:t>AdminController = Authentication, registration, login, password validation. </a:t>
+                      </a:r>
+                    </a:p>
+                  </a:txBody>
+                  <a:tcPr/>
+                </a:tc>
+                <a:tc>
+                  <a:txBody>
+                    <a:bodyPr/>
+                    <a:lstStyle/>
+                    <a:p>
+                      <a:r>
+                        <a:rPr lang="en-NZ" dirty="0"/>
+                        <a:t>AuthorModel = Authors name validation and formatting.</a:t>
+                      </a:r>
+                    </a:p>
+                  </a:txBody>
+                  <a:tcPr/>
+                </a:tc>
+                <a:extLst>
+                  <a:ext uri="{0D108BD9-81ED-4DB2-BD59-A6C34878D82A}">
+                    <a16:rowId xmlns:a16="http://schemas.microsoft.com/office/drawing/2014/main" val="778013425"/>
+                  </a:ext>
+                </a:extLst>
+              </a:tr>
+              <a:tr h="541940">
+                <a:tc>
+                  <a:txBody>
+                    <a:bodyPr/>
+                    <a:lstStyle/>
+                    <a:p>
+                      <a:r>
+                        <a:rPr lang="en-NZ" dirty="0"/>
+                        <a:t>TestPageController = Data retrieval and view  model integration. </a:t>
+                      </a:r>
+                    </a:p>
+                  </a:txBody>
+                  <a:tcPr/>
+                </a:tc>
+                <a:tc>
+                  <a:txBody>
+                    <a:bodyPr/>
+                    <a:lstStyle/>
+                    <a:p>
+                      <a:r>
+                        <a:rPr lang="en-NZ" dirty="0"/>
+                        <a:t>AdminsModel = Addmin account validation</a:t>
+                      </a:r>
+                    </a:p>
+                  </a:txBody>
+                  <a:tcPr/>
+                </a:tc>
+                <a:extLst>
+                  <a:ext uri="{0D108BD9-81ED-4DB2-BD59-A6C34878D82A}">
+                    <a16:rowId xmlns:a16="http://schemas.microsoft.com/office/drawing/2014/main" val="2505747910"/>
+                  </a:ext>
+                </a:extLst>
+              </a:tr>
+              <a:tr h="541940">
+                <a:tc>
+                  <a:txBody>
+                    <a:bodyPr/>
+                    <a:lstStyle/>
+                    <a:p>
+                      <a:endParaRPr lang="en-NZ" dirty="0"/>
+                    </a:p>
+                  </a:txBody>
+                  <a:tcPr/>
+                </a:tc>
+                <a:tc>
+                  <a:txBody>
+                    <a:bodyPr/>
+                    <a:lstStyle/>
+                    <a:p>
+                      <a:r>
+                        <a:rPr lang="en-NZ" dirty="0"/>
+                        <a:t>SeedData = Database initialization and du[;</a:t>
+                      </a:r>
+                      <a:r>
+                        <a:rPr lang="en-NZ" dirty="0" err="1"/>
+                        <a:t>ication</a:t>
+                      </a:r>
+                      <a:r>
+                        <a:rPr lang="en-NZ" dirty="0"/>
+                        <a:t> prevention.</a:t>
+                      </a:r>
+                    </a:p>
+                  </a:txBody>
+                  <a:tcPr/>
+                </a:tc>
+                <a:extLst>
+                  <a:ext uri="{0D108BD9-81ED-4DB2-BD59-A6C34878D82A}">
+                    <a16:rowId xmlns:a16="http://schemas.microsoft.com/office/drawing/2014/main" val="3805039368"/>
+                  </a:ext>
+                </a:extLst>
+              </a:tr>
+              <a:tr h="501936">
+                <a:tc>
+                  <a:txBody>
+                    <a:bodyPr/>
+                    <a:lstStyle/>
+                    <a:p>
+                      <a:endParaRPr lang="en-NZ" dirty="0"/>
+                    </a:p>
+                  </a:txBody>
+                  <a:tcPr/>
+                </a:tc>
+                <a:tc>
+                  <a:txBody>
+                    <a:bodyPr/>
+                    <a:lstStyle/>
+                    <a:p>
+                      <a:r>
+                        <a:rPr lang="en-NZ" dirty="0"/>
+                        <a:t>PasswordHelper = Hashing and verification .</a:t>
+                      </a:r>
+                    </a:p>
+                  </a:txBody>
+                  <a:tcPr/>
+                </a:tc>
+                <a:extLst>
+                  <a:ext uri="{0D108BD9-81ED-4DB2-BD59-A6C34878D82A}">
+                    <a16:rowId xmlns:a16="http://schemas.microsoft.com/office/drawing/2014/main" val="3200171968"/>
+                  </a:ext>
+                </a:extLst>
+              </a:tr>
+              <a:tr h="501936">
+                <a:tc>
+                  <a:txBody>
+                    <a:bodyPr/>
+                    <a:lstStyle/>
+                    <a:p>
+                      <a:endParaRPr lang="en-NZ" dirty="0"/>
+                    </a:p>
+                  </a:txBody>
+                  <a:tcPr/>
+                </a:tc>
+                <a:tc>
+                  <a:txBody>
+                    <a:bodyPr/>
+                    <a:lstStyle/>
+                    <a:p>
+                      <a:r>
+                        <a:rPr lang="en-NZ" dirty="0"/>
+                        <a:t>ErrorViewModel = Error page data handling.</a:t>
+                      </a:r>
+                    </a:p>
+                  </a:txBody>
+                  <a:tcPr/>
+                </a:tc>
+                <a:extLst>
+                  <a:ext uri="{0D108BD9-81ED-4DB2-BD59-A6C34878D82A}">
+                    <a16:rowId xmlns:a16="http://schemas.microsoft.com/office/drawing/2014/main" val="1948775439"/>
+                  </a:ext>
+                </a:extLst>
+              </a:tr>
+            </a:tbl>
+          </a:graphicData>
+        </a:graphic>
+      </p:graphicFrame>
     </p:spTree>
     <p:extLst>
       <p:ext uri="{BB962C8B-B14F-4D97-AF65-F5344CB8AC3E}">
         <p14:creationId xmlns:p14="http://schemas.microsoft.com/office/powerpoint/2010/main" val="2352553251"/>
-      </p:ext>
-    </p:extLst>
-  </p:cSld>
-  <p:clrMapOvr>
-    <a:masterClrMapping/>
-  </p:clrMapOvr>
-</p:sld>
-</file>
-
-<file path=ppt/slides/slide8.xml><?xml version="1.0" encoding="utf-8"?>
-<p:sld xmlns:a="http://schemas.openxmlformats.org/drawingml/2006/main" xmlns:r="http://schemas.openxmlformats.org/officeDocument/2006/relationships" xmlns:p="http://schemas.openxmlformats.org/presentationml/2006/main">
-  <p:cSld>
-    <p:spTree>
-      <p:nvGrpSpPr>
-        <p:cNvPr id="1" name="">
-          <a:extLst>
-            <a:ext uri="{FF2B5EF4-FFF2-40B4-BE49-F238E27FC236}">
-              <a16:creationId xmlns:a16="http://schemas.microsoft.com/office/drawing/2014/main" id="{D42E9B6F-69F2-D404-C88B-3A1708D97E13}"/>
-            </a:ext>
-          </a:extLst>
-        </p:cNvPr>
-        <p:cNvGrpSpPr/>
-        <p:nvPr/>
-      </p:nvGrpSpPr>
-      <p:grpSpPr>
-        <a:xfrm>
-          <a:off x="0" y="0"/>
-          <a:ext cx="0" cy="0"/>
-          <a:chOff x="0" y="0"/>
-          <a:chExt cx="0" cy="0"/>
-        </a:xfrm>
-      </p:grpSpPr>
-      <p:sp>
-        <p:nvSpPr>
-          <p:cNvPr id="2" name="Title 1">
-            <a:extLst>
-              <a:ext uri="{FF2B5EF4-FFF2-40B4-BE49-F238E27FC236}">
-                <a16:creationId xmlns:a16="http://schemas.microsoft.com/office/drawing/2014/main" id="{011A136F-5311-7E41-587D-793B5A825835}"/>
-              </a:ext>
-            </a:extLst>
-          </p:cNvPr>
-          <p:cNvSpPr>
-            <a:spLocks noGrp="1"/>
-          </p:cNvSpPr>
-          <p:nvPr>
-            <p:ph type="title"/>
-          </p:nvPr>
-        </p:nvSpPr>
-        <p:spPr/>
-        <p:txBody>
-          <a:bodyPr/>
-          <a:lstStyle/>
-          <a:p>
-            <a:r>
-              <a:rPr lang="en-NZ" dirty="0"/>
-              <a:t>Selenium</a:t>
-            </a:r>
-          </a:p>
-        </p:txBody>
-      </p:sp>
-      <p:sp>
-        <p:nvSpPr>
-          <p:cNvPr id="3" name="Content Placeholder 2">
-            <a:extLst>
-              <a:ext uri="{FF2B5EF4-FFF2-40B4-BE49-F238E27FC236}">
-                <a16:creationId xmlns:a16="http://schemas.microsoft.com/office/drawing/2014/main" id="{1D792F9E-8EC8-41E6-FA3F-0C0D45503683}"/>
-              </a:ext>
-            </a:extLst>
-          </p:cNvPr>
-          <p:cNvSpPr>
-            <a:spLocks noGrp="1"/>
-          </p:cNvSpPr>
-          <p:nvPr>
-            <p:ph idx="1"/>
-          </p:nvPr>
-        </p:nvSpPr>
-        <p:spPr/>
-        <p:txBody>
-          <a:bodyPr/>
-          <a:lstStyle/>
-          <a:p>
-            <a:endParaRPr lang="en-NZ"/>
-          </a:p>
-        </p:txBody>
-      </p:sp>
-    </p:spTree>
-    <p:extLst>
-      <p:ext uri="{BB962C8B-B14F-4D97-AF65-F5344CB8AC3E}">
-        <p14:creationId xmlns:p14="http://schemas.microsoft.com/office/powerpoint/2010/main" val="4113579959"/>
-      </p:ext>
-    </p:extLst>
-  </p:cSld>
-  <p:clrMapOvr>
-    <a:masterClrMapping/>
-  </p:clrMapOvr>
-</p:sld>
-</file>
-
-<file path=ppt/slides/slide9.xml><?xml version="1.0" encoding="utf-8"?>
-<p:sld xmlns:a="http://schemas.openxmlformats.org/drawingml/2006/main" xmlns:r="http://schemas.openxmlformats.org/officeDocument/2006/relationships" xmlns:p="http://schemas.openxmlformats.org/presentationml/2006/main">
-  <p:cSld>
-    <p:spTree>
-      <p:nvGrpSpPr>
-        <p:cNvPr id="1" name="">
-          <a:extLst>
-            <a:ext uri="{FF2B5EF4-FFF2-40B4-BE49-F238E27FC236}">
-              <a16:creationId xmlns:a16="http://schemas.microsoft.com/office/drawing/2014/main" id="{4420F141-39C8-F5C0-0C26-7B051A8E6694}"/>
-            </a:ext>
-          </a:extLst>
-        </p:cNvPr>
-        <p:cNvGrpSpPr/>
-        <p:nvPr/>
-      </p:nvGrpSpPr>
-      <p:grpSpPr>
-        <a:xfrm>
-          <a:off x="0" y="0"/>
-          <a:ext cx="0" cy="0"/>
-          <a:chOff x="0" y="0"/>
-          <a:chExt cx="0" cy="0"/>
-        </a:xfrm>
-      </p:grpSpPr>
-      <p:sp>
-        <p:nvSpPr>
-          <p:cNvPr id="2" name="Title 1">
-            <a:extLst>
-              <a:ext uri="{FF2B5EF4-FFF2-40B4-BE49-F238E27FC236}">
-                <a16:creationId xmlns:a16="http://schemas.microsoft.com/office/drawing/2014/main" id="{24155ACB-0F50-1570-C225-6A1F5B1483CC}"/>
-              </a:ext>
-            </a:extLst>
-          </p:cNvPr>
-          <p:cNvSpPr>
-            <a:spLocks noGrp="1"/>
-          </p:cNvSpPr>
-          <p:nvPr>
-            <p:ph type="title"/>
-          </p:nvPr>
-        </p:nvSpPr>
-        <p:spPr/>
-        <p:txBody>
-          <a:bodyPr/>
-          <a:lstStyle/>
-          <a:p>
-            <a:r>
-              <a:rPr lang="en-NZ" dirty="0"/>
-              <a:t>JMeter</a:t>
-            </a:r>
-          </a:p>
-        </p:txBody>
-      </p:sp>
-      <p:sp>
-        <p:nvSpPr>
-          <p:cNvPr id="3" name="Content Placeholder 2">
-            <a:extLst>
-              <a:ext uri="{FF2B5EF4-FFF2-40B4-BE49-F238E27FC236}">
-                <a16:creationId xmlns:a16="http://schemas.microsoft.com/office/drawing/2014/main" id="{87E6B5A8-FD74-EEC8-7E6B-B5A9D35A52FF}"/>
-              </a:ext>
-            </a:extLst>
-          </p:cNvPr>
-          <p:cNvSpPr>
-            <a:spLocks noGrp="1"/>
-          </p:cNvSpPr>
-          <p:nvPr>
-            <p:ph idx="1"/>
-          </p:nvPr>
-        </p:nvSpPr>
-        <p:spPr/>
-        <p:txBody>
-          <a:bodyPr/>
-          <a:lstStyle/>
-          <a:p>
-            <a:endParaRPr lang="en-NZ"/>
-          </a:p>
-        </p:txBody>
-      </p:sp>
-    </p:spTree>
-    <p:extLst>
-      <p:ext uri="{BB962C8B-B14F-4D97-AF65-F5344CB8AC3E}">
-        <p14:creationId xmlns:p14="http://schemas.microsoft.com/office/powerpoint/2010/main" val="1155972948"/>
       </p:ext>
     </p:extLst>
   </p:cSld>

--- a/Presentation Slides.pptx
+++ b/Presentation Slides.pptx
@@ -11,15 +11,20 @@
     <p:sldId id="270" r:id="rId5"/>
     <p:sldId id="260" r:id="rId6"/>
     <p:sldId id="261" r:id="rId7"/>
-    <p:sldId id="262" r:id="rId8"/>
-    <p:sldId id="271" r:id="rId9"/>
-    <p:sldId id="263" r:id="rId10"/>
-    <p:sldId id="264" r:id="rId11"/>
-    <p:sldId id="265" r:id="rId12"/>
-    <p:sldId id="266" r:id="rId13"/>
-    <p:sldId id="267" r:id="rId14"/>
-    <p:sldId id="268" r:id="rId15"/>
-    <p:sldId id="269" r:id="rId16"/>
+    <p:sldId id="272" r:id="rId8"/>
+    <p:sldId id="273" r:id="rId9"/>
+    <p:sldId id="274" r:id="rId10"/>
+    <p:sldId id="275" r:id="rId11"/>
+    <p:sldId id="276" r:id="rId12"/>
+    <p:sldId id="262" r:id="rId13"/>
+    <p:sldId id="271" r:id="rId14"/>
+    <p:sldId id="263" r:id="rId15"/>
+    <p:sldId id="264" r:id="rId16"/>
+    <p:sldId id="265" r:id="rId17"/>
+    <p:sldId id="266" r:id="rId18"/>
+    <p:sldId id="267" r:id="rId19"/>
+    <p:sldId id="268" r:id="rId20"/>
+    <p:sldId id="269" r:id="rId21"/>
   </p:sldIdLst>
   <p:sldSz cx="12192000" cy="6858000"/>
   <p:notesSz cx="6858000" cy="9144000"/>
@@ -126,8 +131,638 @@
 </p:presentation>
 </file>
 
+<file path=ppt/revisionInfo.xml><?xml version="1.0" encoding="utf-8"?>
+<p1510:revInfo xmlns:a="http://schemas.openxmlformats.org/drawingml/2006/main" xmlns:r="http://schemas.openxmlformats.org/officeDocument/2006/relationships" xmlns:p1510="http://schemas.microsoft.com/office/powerpoint/2015/10/main">
+  <p1510:revLst>
+    <p1510:client id="{AA265004-1880-460D-B614-F8B6FF7D3354}" v="12" dt="2025-10-12T07:39:02.494"/>
+  </p1510:revLst>
+</p1510:revInfo>
+</file>
+
 <file path=ppt/changesInfos/changesInfo1.xml><?xml version="1.0" encoding="utf-8"?>
 <pc:chgInfo xmlns:a="http://schemas.openxmlformats.org/drawingml/2006/main" xmlns:r="http://schemas.openxmlformats.org/officeDocument/2006/relationships" xmlns:ac="http://schemas.microsoft.com/office/drawing/2013/main/command" xmlns:pc="http://schemas.microsoft.com/office/powerpoint/2013/main/command">
+  <pc:docChgLst>
+    <pc:chgData name="Dave Sushames" userId="ce71797e-895c-47df-af8e-c160254d5cef" providerId="ADAL" clId="{067FCE3D-3D41-4548-936F-F0A348C85C95}"/>
+    <pc:docChg chg="undo custSel addSld modSld">
+      <pc:chgData name="Dave Sushames" userId="ce71797e-895c-47df-af8e-c160254d5cef" providerId="ADAL" clId="{067FCE3D-3D41-4548-936F-F0A348C85C95}" dt="2025-10-12T08:21:33.692" v="1236" actId="20577"/>
+      <pc:docMkLst>
+        <pc:docMk/>
+      </pc:docMkLst>
+      <pc:sldChg chg="modSp mod">
+        <pc:chgData name="Dave Sushames" userId="ce71797e-895c-47df-af8e-c160254d5cef" providerId="ADAL" clId="{067FCE3D-3D41-4548-936F-F0A348C85C95}" dt="2025-10-12T07:56:01.423" v="1069" actId="20577"/>
+        <pc:sldMkLst>
+          <pc:docMk/>
+          <pc:sldMk cId="1416944500" sldId="256"/>
+        </pc:sldMkLst>
+        <pc:spChg chg="mod">
+          <ac:chgData name="Dave Sushames" userId="ce71797e-895c-47df-af8e-c160254d5cef" providerId="ADAL" clId="{067FCE3D-3D41-4548-936F-F0A348C85C95}" dt="2025-10-12T07:55:26.027" v="995" actId="255"/>
+          <ac:spMkLst>
+            <pc:docMk/>
+            <pc:sldMk cId="1416944500" sldId="256"/>
+            <ac:spMk id="2" creationId="{2978549C-EBBF-A5F2-C78B-B4D6483AF838}"/>
+          </ac:spMkLst>
+        </pc:spChg>
+        <pc:spChg chg="mod">
+          <ac:chgData name="Dave Sushames" userId="ce71797e-895c-47df-af8e-c160254d5cef" providerId="ADAL" clId="{067FCE3D-3D41-4548-936F-F0A348C85C95}" dt="2025-10-12T07:56:01.423" v="1069" actId="20577"/>
+          <ac:spMkLst>
+            <pc:docMk/>
+            <pc:sldMk cId="1416944500" sldId="256"/>
+            <ac:spMk id="3" creationId="{00800B5C-AD72-28C1-6BE2-C32B0AB04A33}"/>
+          </ac:spMkLst>
+        </pc:spChg>
+      </pc:sldChg>
+      <pc:sldChg chg="modSp mod">
+        <pc:chgData name="Dave Sushames" userId="ce71797e-895c-47df-af8e-c160254d5cef" providerId="ADAL" clId="{067FCE3D-3D41-4548-936F-F0A348C85C95}" dt="2025-10-12T07:56:56.002" v="1126" actId="20577"/>
+        <pc:sldMkLst>
+          <pc:docMk/>
+          <pc:sldMk cId="670477893" sldId="257"/>
+        </pc:sldMkLst>
+        <pc:spChg chg="mod">
+          <ac:chgData name="Dave Sushames" userId="ce71797e-895c-47df-af8e-c160254d5cef" providerId="ADAL" clId="{067FCE3D-3D41-4548-936F-F0A348C85C95}" dt="2025-10-12T07:56:56.002" v="1126" actId="20577"/>
+          <ac:spMkLst>
+            <pc:docMk/>
+            <pc:sldMk cId="670477893" sldId="257"/>
+            <ac:spMk id="3" creationId="{4E771DCA-505F-5CBB-FA90-2B8053CAEEDE}"/>
+          </ac:spMkLst>
+        </pc:spChg>
+      </pc:sldChg>
+      <pc:sldChg chg="modSp mod">
+        <pc:chgData name="Dave Sushames" userId="ce71797e-895c-47df-af8e-c160254d5cef" providerId="ADAL" clId="{067FCE3D-3D41-4548-936F-F0A348C85C95}" dt="2025-10-12T07:57:19.340" v="1131" actId="20577"/>
+        <pc:sldMkLst>
+          <pc:docMk/>
+          <pc:sldMk cId="1493032887" sldId="259"/>
+        </pc:sldMkLst>
+        <pc:spChg chg="mod">
+          <ac:chgData name="Dave Sushames" userId="ce71797e-895c-47df-af8e-c160254d5cef" providerId="ADAL" clId="{067FCE3D-3D41-4548-936F-F0A348C85C95}" dt="2025-10-12T07:57:19.340" v="1131" actId="20577"/>
+          <ac:spMkLst>
+            <pc:docMk/>
+            <pc:sldMk cId="1493032887" sldId="259"/>
+            <ac:spMk id="3" creationId="{9EC6207F-D462-2F3E-18AF-54E940AF757B}"/>
+          </ac:spMkLst>
+        </pc:spChg>
+      </pc:sldChg>
+      <pc:sldChg chg="addSp delSp modSp mod">
+        <pc:chgData name="Dave Sushames" userId="ce71797e-895c-47df-af8e-c160254d5cef" providerId="ADAL" clId="{067FCE3D-3D41-4548-936F-F0A348C85C95}" dt="2025-10-12T07:20:23.191" v="37" actId="14100"/>
+        <pc:sldMkLst>
+          <pc:docMk/>
+          <pc:sldMk cId="1452555610" sldId="260"/>
+        </pc:sldMkLst>
+        <pc:spChg chg="del">
+          <ac:chgData name="Dave Sushames" userId="ce71797e-895c-47df-af8e-c160254d5cef" providerId="ADAL" clId="{067FCE3D-3D41-4548-936F-F0A348C85C95}" dt="2025-10-12T07:20:17.567" v="35" actId="22"/>
+          <ac:spMkLst>
+            <pc:docMk/>
+            <pc:sldMk cId="1452555610" sldId="260"/>
+            <ac:spMk id="3" creationId="{ECFC2737-0BFC-AC98-FBD6-AD593D04D8BA}"/>
+          </ac:spMkLst>
+        </pc:spChg>
+        <pc:picChg chg="add mod ord">
+          <ac:chgData name="Dave Sushames" userId="ce71797e-895c-47df-af8e-c160254d5cef" providerId="ADAL" clId="{067FCE3D-3D41-4548-936F-F0A348C85C95}" dt="2025-10-12T07:20:23.191" v="37" actId="14100"/>
+          <ac:picMkLst>
+            <pc:docMk/>
+            <pc:sldMk cId="1452555610" sldId="260"/>
+            <ac:picMk id="5" creationId="{CA9AECE5-21A9-2904-B18D-26EEB20BB384}"/>
+          </ac:picMkLst>
+        </pc:picChg>
+      </pc:sldChg>
+      <pc:sldChg chg="addSp delSp modSp mod">
+        <pc:chgData name="Dave Sushames" userId="ce71797e-895c-47df-af8e-c160254d5cef" providerId="ADAL" clId="{067FCE3D-3D41-4548-936F-F0A348C85C95}" dt="2025-10-12T08:14:54.794" v="1161" actId="14100"/>
+        <pc:sldMkLst>
+          <pc:docMk/>
+          <pc:sldMk cId="121744597" sldId="261"/>
+        </pc:sldMkLst>
+        <pc:spChg chg="mod">
+          <ac:chgData name="Dave Sushames" userId="ce71797e-895c-47df-af8e-c160254d5cef" providerId="ADAL" clId="{067FCE3D-3D41-4548-936F-F0A348C85C95}" dt="2025-10-12T07:58:24.935" v="1133" actId="20577"/>
+          <ac:spMkLst>
+            <pc:docMk/>
+            <pc:sldMk cId="121744597" sldId="261"/>
+            <ac:spMk id="2" creationId="{39CE5BBE-6AB1-6499-AE58-4E94EA136540}"/>
+          </ac:spMkLst>
+        </pc:spChg>
+        <pc:spChg chg="add del">
+          <ac:chgData name="Dave Sushames" userId="ce71797e-895c-47df-af8e-c160254d5cef" providerId="ADAL" clId="{067FCE3D-3D41-4548-936F-F0A348C85C95}" dt="2025-10-12T08:11:00.742" v="1145" actId="22"/>
+          <ac:spMkLst>
+            <pc:docMk/>
+            <pc:sldMk cId="121744597" sldId="261"/>
+            <ac:spMk id="3" creationId="{BE2DAF8F-69A0-CC24-8BEA-64C92A487B4E}"/>
+          </ac:spMkLst>
+        </pc:spChg>
+        <pc:spChg chg="add mod">
+          <ac:chgData name="Dave Sushames" userId="ce71797e-895c-47df-af8e-c160254d5cef" providerId="ADAL" clId="{067FCE3D-3D41-4548-936F-F0A348C85C95}" dt="2025-10-12T08:13:45.574" v="1149" actId="478"/>
+          <ac:spMkLst>
+            <pc:docMk/>
+            <pc:sldMk cId="121744597" sldId="261"/>
+            <ac:spMk id="9" creationId="{8AFBFB2E-0301-77B4-125B-7835C2A2C0D0}"/>
+          </ac:spMkLst>
+        </pc:spChg>
+        <pc:picChg chg="add del mod ord">
+          <ac:chgData name="Dave Sushames" userId="ce71797e-895c-47df-af8e-c160254d5cef" providerId="ADAL" clId="{067FCE3D-3D41-4548-936F-F0A348C85C95}" dt="2025-10-12T08:10:45.983" v="1144" actId="22"/>
+          <ac:picMkLst>
+            <pc:docMk/>
+            <pc:sldMk cId="121744597" sldId="261"/>
+            <ac:picMk id="5" creationId="{FE4E942E-263B-CA1B-5401-C7245ACC42B8}"/>
+          </ac:picMkLst>
+        </pc:picChg>
+        <pc:picChg chg="add del mod ord">
+          <ac:chgData name="Dave Sushames" userId="ce71797e-895c-47df-af8e-c160254d5cef" providerId="ADAL" clId="{067FCE3D-3D41-4548-936F-F0A348C85C95}" dt="2025-10-12T08:13:45.574" v="1149" actId="478"/>
+          <ac:picMkLst>
+            <pc:docMk/>
+            <pc:sldMk cId="121744597" sldId="261"/>
+            <ac:picMk id="7" creationId="{D3D2A2B0-FFDA-C940-DA60-8217502A78C8}"/>
+          </ac:picMkLst>
+        </pc:picChg>
+        <pc:picChg chg="add del mod">
+          <ac:chgData name="Dave Sushames" userId="ce71797e-895c-47df-af8e-c160254d5cef" providerId="ADAL" clId="{067FCE3D-3D41-4548-936F-F0A348C85C95}" dt="2025-10-12T08:14:42.046" v="1155" actId="478"/>
+          <ac:picMkLst>
+            <pc:docMk/>
+            <pc:sldMk cId="121744597" sldId="261"/>
+            <ac:picMk id="11" creationId="{2F158B6F-08A8-9857-B933-871DAA508ADE}"/>
+          </ac:picMkLst>
+        </pc:picChg>
+        <pc:picChg chg="add mod">
+          <ac:chgData name="Dave Sushames" userId="ce71797e-895c-47df-af8e-c160254d5cef" providerId="ADAL" clId="{067FCE3D-3D41-4548-936F-F0A348C85C95}" dt="2025-10-12T08:14:54.794" v="1161" actId="14100"/>
+          <ac:picMkLst>
+            <pc:docMk/>
+            <pc:sldMk cId="121744597" sldId="261"/>
+            <ac:picMk id="13" creationId="{50C02D80-6BF6-226F-5DB4-DF1CE00488D9}"/>
+          </ac:picMkLst>
+        </pc:picChg>
+      </pc:sldChg>
+      <pc:sldChg chg="addSp modSp mod">
+        <pc:chgData name="Dave Sushames" userId="ce71797e-895c-47df-af8e-c160254d5cef" providerId="ADAL" clId="{067FCE3D-3D41-4548-936F-F0A348C85C95}" dt="2025-10-12T06:46:08.847" v="6" actId="14100"/>
+        <pc:sldMkLst>
+          <pc:docMk/>
+          <pc:sldMk cId="262380355" sldId="262"/>
+        </pc:sldMkLst>
+        <pc:spChg chg="mod">
+          <ac:chgData name="Dave Sushames" userId="ce71797e-895c-47df-af8e-c160254d5cef" providerId="ADAL" clId="{067FCE3D-3D41-4548-936F-F0A348C85C95}" dt="2025-10-12T06:45:29.085" v="1" actId="14100"/>
+          <ac:spMkLst>
+            <pc:docMk/>
+            <pc:sldMk cId="262380355" sldId="262"/>
+            <ac:spMk id="3" creationId="{F23FAE4F-801A-179E-B327-79653D7D3A90}"/>
+          </ac:spMkLst>
+        </pc:spChg>
+        <pc:picChg chg="add mod">
+          <ac:chgData name="Dave Sushames" userId="ce71797e-895c-47df-af8e-c160254d5cef" providerId="ADAL" clId="{067FCE3D-3D41-4548-936F-F0A348C85C95}" dt="2025-10-12T06:46:08.847" v="6" actId="14100"/>
+          <ac:picMkLst>
+            <pc:docMk/>
+            <pc:sldMk cId="262380355" sldId="262"/>
+            <ac:picMk id="7" creationId="{9B68A36A-6F78-E2E4-B901-C40D428AC381}"/>
+          </ac:picMkLst>
+        </pc:picChg>
+      </pc:sldChg>
+      <pc:sldChg chg="addSp delSp modSp mod">
+        <pc:chgData name="Dave Sushames" userId="ce71797e-895c-47df-af8e-c160254d5cef" providerId="ADAL" clId="{067FCE3D-3D41-4548-936F-F0A348C85C95}" dt="2025-10-12T07:25:45.289" v="54" actId="1076"/>
+        <pc:sldMkLst>
+          <pc:docMk/>
+          <pc:sldMk cId="4113579959" sldId="264"/>
+        </pc:sldMkLst>
+        <pc:spChg chg="add del">
+          <ac:chgData name="Dave Sushames" userId="ce71797e-895c-47df-af8e-c160254d5cef" providerId="ADAL" clId="{067FCE3D-3D41-4548-936F-F0A348C85C95}" dt="2025-10-12T07:24:32.487" v="40"/>
+          <ac:spMkLst>
+            <pc:docMk/>
+            <pc:sldMk cId="4113579959" sldId="264"/>
+            <ac:spMk id="3" creationId="{1D792F9E-8EC8-41E6-FA3F-0C0D45503683}"/>
+          </ac:spMkLst>
+        </pc:spChg>
+        <pc:picChg chg="add del mod ord">
+          <ac:chgData name="Dave Sushames" userId="ce71797e-895c-47df-af8e-c160254d5cef" providerId="ADAL" clId="{067FCE3D-3D41-4548-936F-F0A348C85C95}" dt="2025-10-12T07:24:06.802" v="39" actId="22"/>
+          <ac:picMkLst>
+            <pc:docMk/>
+            <pc:sldMk cId="4113579959" sldId="264"/>
+            <ac:picMk id="5" creationId="{C9FBAA2A-745A-51A4-A0D9-D97A8666207C}"/>
+          </ac:picMkLst>
+        </pc:picChg>
+        <pc:picChg chg="add mod">
+          <ac:chgData name="Dave Sushames" userId="ce71797e-895c-47df-af8e-c160254d5cef" providerId="ADAL" clId="{067FCE3D-3D41-4548-936F-F0A348C85C95}" dt="2025-10-12T07:25:36.040" v="50" actId="1076"/>
+          <ac:picMkLst>
+            <pc:docMk/>
+            <pc:sldMk cId="4113579959" sldId="264"/>
+            <ac:picMk id="6" creationId="{B71DEAC7-890C-0D53-7DD3-FDCA0104B75A}"/>
+          </ac:picMkLst>
+        </pc:picChg>
+        <pc:picChg chg="add mod">
+          <ac:chgData name="Dave Sushames" userId="ce71797e-895c-47df-af8e-c160254d5cef" providerId="ADAL" clId="{067FCE3D-3D41-4548-936F-F0A348C85C95}" dt="2025-10-12T07:25:45.017" v="53" actId="1076"/>
+          <ac:picMkLst>
+            <pc:docMk/>
+            <pc:sldMk cId="4113579959" sldId="264"/>
+            <ac:picMk id="8" creationId="{48ABCB00-3AD2-BFC4-B6A2-C38FCB6B977A}"/>
+          </ac:picMkLst>
+        </pc:picChg>
+        <pc:picChg chg="add mod">
+          <ac:chgData name="Dave Sushames" userId="ce71797e-895c-47df-af8e-c160254d5cef" providerId="ADAL" clId="{067FCE3D-3D41-4548-936F-F0A348C85C95}" dt="2025-10-12T07:25:45.289" v="54" actId="1076"/>
+          <ac:picMkLst>
+            <pc:docMk/>
+            <pc:sldMk cId="4113579959" sldId="264"/>
+            <ac:picMk id="10" creationId="{54C4A90F-496E-06EC-3860-89DC3CE1695C}"/>
+          </ac:picMkLst>
+        </pc:picChg>
+      </pc:sldChg>
+      <pc:sldChg chg="addSp modSp mod">
+        <pc:chgData name="Dave Sushames" userId="ce71797e-895c-47df-af8e-c160254d5cef" providerId="ADAL" clId="{067FCE3D-3D41-4548-936F-F0A348C85C95}" dt="2025-10-12T07:26:37.567" v="60" actId="14100"/>
+        <pc:sldMkLst>
+          <pc:docMk/>
+          <pc:sldMk cId="1155972948" sldId="265"/>
+        </pc:sldMkLst>
+        <pc:picChg chg="add mod">
+          <ac:chgData name="Dave Sushames" userId="ce71797e-895c-47df-af8e-c160254d5cef" providerId="ADAL" clId="{067FCE3D-3D41-4548-936F-F0A348C85C95}" dt="2025-10-12T07:26:37.567" v="60" actId="14100"/>
+          <ac:picMkLst>
+            <pc:docMk/>
+            <pc:sldMk cId="1155972948" sldId="265"/>
+            <ac:picMk id="4" creationId="{42789183-C088-58E6-2F05-0262B299D6B8}"/>
+          </ac:picMkLst>
+        </pc:picChg>
+      </pc:sldChg>
+      <pc:sldChg chg="addSp delSp modSp mod">
+        <pc:chgData name="Dave Sushames" userId="ce71797e-895c-47df-af8e-c160254d5cef" providerId="ADAL" clId="{067FCE3D-3D41-4548-936F-F0A348C85C95}" dt="2025-10-12T07:34:59.313" v="420" actId="14100"/>
+        <pc:sldMkLst>
+          <pc:docMk/>
+          <pc:sldMk cId="2630173749" sldId="266"/>
+        </pc:sldMkLst>
+        <pc:spChg chg="mod">
+          <ac:chgData name="Dave Sushames" userId="ce71797e-895c-47df-af8e-c160254d5cef" providerId="ADAL" clId="{067FCE3D-3D41-4548-936F-F0A348C85C95}" dt="2025-10-12T07:34:55.436" v="418" actId="1076"/>
+          <ac:spMkLst>
+            <pc:docMk/>
+            <pc:sldMk cId="2630173749" sldId="266"/>
+            <ac:spMk id="3" creationId="{E24248B4-502C-A4ED-AF3F-AD9EE62AFB43}"/>
+          </ac:spMkLst>
+        </pc:spChg>
+        <pc:picChg chg="add del mod">
+          <ac:chgData name="Dave Sushames" userId="ce71797e-895c-47df-af8e-c160254d5cef" providerId="ADAL" clId="{067FCE3D-3D41-4548-936F-F0A348C85C95}" dt="2025-10-12T07:32:23.825" v="203" actId="478"/>
+          <ac:picMkLst>
+            <pc:docMk/>
+            <pc:sldMk cId="2630173749" sldId="266"/>
+            <ac:picMk id="4" creationId="{F2D8C07A-C620-0A21-8FC7-4BD9F4E4B52B}"/>
+          </ac:picMkLst>
+        </pc:picChg>
+        <pc:picChg chg="add del mod">
+          <ac:chgData name="Dave Sushames" userId="ce71797e-895c-47df-af8e-c160254d5cef" providerId="ADAL" clId="{067FCE3D-3D41-4548-936F-F0A348C85C95}" dt="2025-10-12T07:32:24.698" v="204" actId="478"/>
+          <ac:picMkLst>
+            <pc:docMk/>
+            <pc:sldMk cId="2630173749" sldId="266"/>
+            <ac:picMk id="5" creationId="{3A90D953-D114-84AC-1E2C-91DB18EF99DD}"/>
+          </ac:picMkLst>
+        </pc:picChg>
+        <pc:picChg chg="add mod">
+          <ac:chgData name="Dave Sushames" userId="ce71797e-895c-47df-af8e-c160254d5cef" providerId="ADAL" clId="{067FCE3D-3D41-4548-936F-F0A348C85C95}" dt="2025-10-12T07:34:59.313" v="420" actId="14100"/>
+          <ac:picMkLst>
+            <pc:docMk/>
+            <pc:sldMk cId="2630173749" sldId="266"/>
+            <ac:picMk id="6" creationId="{257AABD9-38E5-6F91-2E7E-DD7FC00895E3}"/>
+          </ac:picMkLst>
+        </pc:picChg>
+      </pc:sldChg>
+      <pc:sldChg chg="addSp modSp mod">
+        <pc:chgData name="Dave Sushames" userId="ce71797e-895c-47df-af8e-c160254d5cef" providerId="ADAL" clId="{067FCE3D-3D41-4548-936F-F0A348C85C95}" dt="2025-10-12T07:46:56.245" v="669" actId="5793"/>
+        <pc:sldMkLst>
+          <pc:docMk/>
+          <pc:sldMk cId="1913538684" sldId="267"/>
+        </pc:sldMkLst>
+        <pc:spChg chg="mod">
+          <ac:chgData name="Dave Sushames" userId="ce71797e-895c-47df-af8e-c160254d5cef" providerId="ADAL" clId="{067FCE3D-3D41-4548-936F-F0A348C85C95}" dt="2025-10-12T07:46:56.245" v="669" actId="5793"/>
+          <ac:spMkLst>
+            <pc:docMk/>
+            <pc:sldMk cId="1913538684" sldId="267"/>
+            <ac:spMk id="3" creationId="{D95EFAFD-755F-5651-96A3-898AC8B90080}"/>
+          </ac:spMkLst>
+        </pc:spChg>
+        <pc:spChg chg="add">
+          <ac:chgData name="Dave Sushames" userId="ce71797e-895c-47df-af8e-c160254d5cef" providerId="ADAL" clId="{067FCE3D-3D41-4548-936F-F0A348C85C95}" dt="2025-10-12T07:39:02.494" v="663"/>
+          <ac:spMkLst>
+            <pc:docMk/>
+            <pc:sldMk cId="1913538684" sldId="267"/>
+            <ac:spMk id="4" creationId="{A0B49F76-5795-3F1E-855E-94291D56D47C}"/>
+          </ac:spMkLst>
+        </pc:spChg>
+        <pc:picChg chg="add mod">
+          <ac:chgData name="Dave Sushames" userId="ce71797e-895c-47df-af8e-c160254d5cef" providerId="ADAL" clId="{067FCE3D-3D41-4548-936F-F0A348C85C95}" dt="2025-10-12T07:40:17.983" v="668" actId="1076"/>
+          <ac:picMkLst>
+            <pc:docMk/>
+            <pc:sldMk cId="1913538684" sldId="267"/>
+            <ac:picMk id="6" creationId="{1E853417-F139-76B4-E97D-67D3C5A45756}"/>
+          </ac:picMkLst>
+        </pc:picChg>
+      </pc:sldChg>
+      <pc:sldChg chg="modSp mod">
+        <pc:chgData name="Dave Sushames" userId="ce71797e-895c-47df-af8e-c160254d5cef" providerId="ADAL" clId="{067FCE3D-3D41-4548-936F-F0A348C85C95}" dt="2025-10-12T08:21:33.692" v="1236" actId="20577"/>
+        <pc:sldMkLst>
+          <pc:docMk/>
+          <pc:sldMk cId="3344191263" sldId="268"/>
+        </pc:sldMkLst>
+        <pc:spChg chg="mod">
+          <ac:chgData name="Dave Sushames" userId="ce71797e-895c-47df-af8e-c160254d5cef" providerId="ADAL" clId="{067FCE3D-3D41-4548-936F-F0A348C85C95}" dt="2025-10-12T08:21:33.692" v="1236" actId="20577"/>
+          <ac:spMkLst>
+            <pc:docMk/>
+            <pc:sldMk cId="3344191263" sldId="268"/>
+            <ac:spMk id="3" creationId="{F95F3A64-A6CD-B226-7855-2C318FC88B5E}"/>
+          </ac:spMkLst>
+        </pc:spChg>
+      </pc:sldChg>
+      <pc:sldChg chg="addSp delSp modSp mod">
+        <pc:chgData name="Dave Sushames" userId="ce71797e-895c-47df-af8e-c160254d5cef" providerId="ADAL" clId="{067FCE3D-3D41-4548-936F-F0A348C85C95}" dt="2025-10-12T07:53:41.767" v="967" actId="22"/>
+        <pc:sldMkLst>
+          <pc:docMk/>
+          <pc:sldMk cId="4020551322" sldId="269"/>
+        </pc:sldMkLst>
+        <pc:spChg chg="del">
+          <ac:chgData name="Dave Sushames" userId="ce71797e-895c-47df-af8e-c160254d5cef" providerId="ADAL" clId="{067FCE3D-3D41-4548-936F-F0A348C85C95}" dt="2025-10-12T07:53:28.959" v="963" actId="22"/>
+          <ac:spMkLst>
+            <pc:docMk/>
+            <pc:sldMk cId="4020551322" sldId="269"/>
+            <ac:spMk id="3" creationId="{34ADAE1A-25A9-5D4C-9E2B-AF0EDDA66F6E}"/>
+          </ac:spMkLst>
+        </pc:spChg>
+        <pc:spChg chg="add del mod">
+          <ac:chgData name="Dave Sushames" userId="ce71797e-895c-47df-af8e-c160254d5cef" providerId="ADAL" clId="{067FCE3D-3D41-4548-936F-F0A348C85C95}" dt="2025-10-12T07:53:41.767" v="967" actId="22"/>
+          <ac:spMkLst>
+            <pc:docMk/>
+            <pc:sldMk cId="4020551322" sldId="269"/>
+            <ac:spMk id="9" creationId="{1017D5C7-BCBD-5DBB-CDDB-14F63705522E}"/>
+          </ac:spMkLst>
+        </pc:spChg>
+        <pc:picChg chg="add del mod ord">
+          <ac:chgData name="Dave Sushames" userId="ce71797e-895c-47df-af8e-c160254d5cef" providerId="ADAL" clId="{067FCE3D-3D41-4548-936F-F0A348C85C95}" dt="2025-10-12T07:53:40.282" v="966" actId="478"/>
+          <ac:picMkLst>
+            <pc:docMk/>
+            <pc:sldMk cId="4020551322" sldId="269"/>
+            <ac:picMk id="5" creationId="{B8A98460-6C28-FAFA-60D2-3ED4EC761A7A}"/>
+          </ac:picMkLst>
+        </pc:picChg>
+        <pc:picChg chg="add del">
+          <ac:chgData name="Dave Sushames" userId="ce71797e-895c-47df-af8e-c160254d5cef" providerId="ADAL" clId="{067FCE3D-3D41-4548-936F-F0A348C85C95}" dt="2025-10-12T07:53:38.833" v="965" actId="22"/>
+          <ac:picMkLst>
+            <pc:docMk/>
+            <pc:sldMk cId="4020551322" sldId="269"/>
+            <ac:picMk id="7" creationId="{91EBC3A3-BA9B-DF82-4C38-C2EB9DE4113D}"/>
+          </ac:picMkLst>
+        </pc:picChg>
+        <pc:picChg chg="add mod ord">
+          <ac:chgData name="Dave Sushames" userId="ce71797e-895c-47df-af8e-c160254d5cef" providerId="ADAL" clId="{067FCE3D-3D41-4548-936F-F0A348C85C95}" dt="2025-10-12T07:53:41.767" v="967" actId="22"/>
+          <ac:picMkLst>
+            <pc:docMk/>
+            <pc:sldMk cId="4020551322" sldId="269"/>
+            <ac:picMk id="11" creationId="{55C52A7E-23C7-DF55-5FA1-BB991E6ED9BB}"/>
+          </ac:picMkLst>
+        </pc:picChg>
+      </pc:sldChg>
+      <pc:sldChg chg="modSp mod">
+        <pc:chgData name="Dave Sushames" userId="ce71797e-895c-47df-af8e-c160254d5cef" providerId="ADAL" clId="{067FCE3D-3D41-4548-936F-F0A348C85C95}" dt="2025-10-12T07:57:28.404" v="1132" actId="20577"/>
+        <pc:sldMkLst>
+          <pc:docMk/>
+          <pc:sldMk cId="499917506" sldId="270"/>
+        </pc:sldMkLst>
+        <pc:spChg chg="mod">
+          <ac:chgData name="Dave Sushames" userId="ce71797e-895c-47df-af8e-c160254d5cef" providerId="ADAL" clId="{067FCE3D-3D41-4548-936F-F0A348C85C95}" dt="2025-10-12T07:57:28.404" v="1132" actId="20577"/>
+          <ac:spMkLst>
+            <pc:docMk/>
+            <pc:sldMk cId="499917506" sldId="270"/>
+            <ac:spMk id="2" creationId="{F698CF08-B7B3-E7F1-C3E7-30061EF0B2FE}"/>
+          </ac:spMkLst>
+        </pc:spChg>
+      </pc:sldChg>
+      <pc:sldChg chg="addSp delSp modSp mod">
+        <pc:chgData name="Dave Sushames" userId="ce71797e-895c-47df-af8e-c160254d5cef" providerId="ADAL" clId="{067FCE3D-3D41-4548-936F-F0A348C85C95}" dt="2025-10-12T06:48:41.355" v="34" actId="1076"/>
+        <pc:sldMkLst>
+          <pc:docMk/>
+          <pc:sldMk cId="2373449628" sldId="271"/>
+        </pc:sldMkLst>
+        <pc:spChg chg="del">
+          <ac:chgData name="Dave Sushames" userId="ce71797e-895c-47df-af8e-c160254d5cef" providerId="ADAL" clId="{067FCE3D-3D41-4548-936F-F0A348C85C95}" dt="2025-10-12T06:48:08.019" v="22" actId="22"/>
+          <ac:spMkLst>
+            <pc:docMk/>
+            <pc:sldMk cId="2373449628" sldId="271"/>
+            <ac:spMk id="3" creationId="{F5A3E1BD-C8B9-8816-4BFA-740580581E17}"/>
+          </ac:spMkLst>
+        </pc:spChg>
+        <pc:spChg chg="add mod">
+          <ac:chgData name="Dave Sushames" userId="ce71797e-895c-47df-af8e-c160254d5cef" providerId="ADAL" clId="{067FCE3D-3D41-4548-936F-F0A348C85C95}" dt="2025-10-12T06:48:24.450" v="26" actId="478"/>
+          <ac:spMkLst>
+            <pc:docMk/>
+            <pc:sldMk cId="2373449628" sldId="271"/>
+            <ac:spMk id="13" creationId="{90A2E484-A693-5C71-C395-468AC313B45D}"/>
+          </ac:spMkLst>
+        </pc:spChg>
+        <pc:picChg chg="add del mod">
+          <ac:chgData name="Dave Sushames" userId="ce71797e-895c-47df-af8e-c160254d5cef" providerId="ADAL" clId="{067FCE3D-3D41-4548-936F-F0A348C85C95}" dt="2025-10-12T06:46:58.926" v="16" actId="478"/>
+          <ac:picMkLst>
+            <pc:docMk/>
+            <pc:sldMk cId="2373449628" sldId="271"/>
+            <ac:picMk id="5" creationId="{DB96069D-76F5-27E7-6C29-AA9C25333789}"/>
+          </ac:picMkLst>
+        </pc:picChg>
+        <pc:picChg chg="add del mod">
+          <ac:chgData name="Dave Sushames" userId="ce71797e-895c-47df-af8e-c160254d5cef" providerId="ADAL" clId="{067FCE3D-3D41-4548-936F-F0A348C85C95}" dt="2025-10-12T06:48:03.033" v="21" actId="478"/>
+          <ac:picMkLst>
+            <pc:docMk/>
+            <pc:sldMk cId="2373449628" sldId="271"/>
+            <ac:picMk id="7" creationId="{4011E457-BEBB-8257-1F53-33C30E65C4D7}"/>
+          </ac:picMkLst>
+        </pc:picChg>
+        <pc:picChg chg="add del">
+          <ac:chgData name="Dave Sushames" userId="ce71797e-895c-47df-af8e-c160254d5cef" providerId="ADAL" clId="{067FCE3D-3D41-4548-936F-F0A348C85C95}" dt="2025-10-12T06:48:01.691" v="20" actId="22"/>
+          <ac:picMkLst>
+            <pc:docMk/>
+            <pc:sldMk cId="2373449628" sldId="271"/>
+            <ac:picMk id="9" creationId="{D4D4356D-0671-52B5-6C4D-DC20EA75FB82}"/>
+          </ac:picMkLst>
+        </pc:picChg>
+        <pc:picChg chg="add del mod ord">
+          <ac:chgData name="Dave Sushames" userId="ce71797e-895c-47df-af8e-c160254d5cef" providerId="ADAL" clId="{067FCE3D-3D41-4548-936F-F0A348C85C95}" dt="2025-10-12T06:48:24.450" v="26" actId="478"/>
+          <ac:picMkLst>
+            <pc:docMk/>
+            <pc:sldMk cId="2373449628" sldId="271"/>
+            <ac:picMk id="11" creationId="{C03AB8A8-CF5D-AE20-4B15-0156B4C73942}"/>
+          </ac:picMkLst>
+        </pc:picChg>
+        <pc:picChg chg="add mod">
+          <ac:chgData name="Dave Sushames" userId="ce71797e-895c-47df-af8e-c160254d5cef" providerId="ADAL" clId="{067FCE3D-3D41-4548-936F-F0A348C85C95}" dt="2025-10-12T06:48:41.355" v="34" actId="1076"/>
+          <ac:picMkLst>
+            <pc:docMk/>
+            <pc:sldMk cId="2373449628" sldId="271"/>
+            <ac:picMk id="15" creationId="{889D4B59-84C4-EFC7-67E5-B9DA94518DEA}"/>
+          </ac:picMkLst>
+        </pc:picChg>
+      </pc:sldChg>
+      <pc:sldChg chg="addSp delSp modSp new mod">
+        <pc:chgData name="Dave Sushames" userId="ce71797e-895c-47df-af8e-c160254d5cef" providerId="ADAL" clId="{067FCE3D-3D41-4548-936F-F0A348C85C95}" dt="2025-10-12T08:16:34.352" v="1179" actId="14100"/>
+        <pc:sldMkLst>
+          <pc:docMk/>
+          <pc:sldMk cId="303581048" sldId="272"/>
+        </pc:sldMkLst>
+        <pc:spChg chg="mod">
+          <ac:chgData name="Dave Sushames" userId="ce71797e-895c-47df-af8e-c160254d5cef" providerId="ADAL" clId="{067FCE3D-3D41-4548-936F-F0A348C85C95}" dt="2025-10-12T07:58:29.287" v="1142" actId="20577"/>
+          <ac:spMkLst>
+            <pc:docMk/>
+            <pc:sldMk cId="303581048" sldId="272"/>
+            <ac:spMk id="2" creationId="{84EE108B-F3A8-8C8A-867D-D7B1F7A6E6CA}"/>
+          </ac:spMkLst>
+        </pc:spChg>
+        <pc:picChg chg="add del mod">
+          <ac:chgData name="Dave Sushames" userId="ce71797e-895c-47df-af8e-c160254d5cef" providerId="ADAL" clId="{067FCE3D-3D41-4548-936F-F0A348C85C95}" dt="2025-10-12T08:16:27.482" v="1178" actId="478"/>
+          <ac:picMkLst>
+            <pc:docMk/>
+            <pc:sldMk cId="303581048" sldId="272"/>
+            <ac:picMk id="5" creationId="{1145CB3F-E1C4-C4FB-8C3E-4660847E0278}"/>
+          </ac:picMkLst>
+        </pc:picChg>
+        <pc:picChg chg="add mod">
+          <ac:chgData name="Dave Sushames" userId="ce71797e-895c-47df-af8e-c160254d5cef" providerId="ADAL" clId="{067FCE3D-3D41-4548-936F-F0A348C85C95}" dt="2025-10-12T08:16:34.352" v="1179" actId="14100"/>
+          <ac:picMkLst>
+            <pc:docMk/>
+            <pc:sldMk cId="303581048" sldId="272"/>
+            <ac:picMk id="7" creationId="{796EAD39-12CD-9403-0C2B-543750419788}"/>
+          </ac:picMkLst>
+        </pc:picChg>
+      </pc:sldChg>
+      <pc:sldChg chg="addSp delSp modSp new mod">
+        <pc:chgData name="Dave Sushames" userId="ce71797e-895c-47df-af8e-c160254d5cef" providerId="ADAL" clId="{067FCE3D-3D41-4548-936F-F0A348C85C95}" dt="2025-10-12T08:17:15.397" v="1182" actId="14100"/>
+        <pc:sldMkLst>
+          <pc:docMk/>
+          <pc:sldMk cId="235160188" sldId="273"/>
+        </pc:sldMkLst>
+        <pc:spChg chg="mod">
+          <ac:chgData name="Dave Sushames" userId="ce71797e-895c-47df-af8e-c160254d5cef" providerId="ADAL" clId="{067FCE3D-3D41-4548-936F-F0A348C85C95}" dt="2025-10-12T08:15:32.487" v="1173" actId="20577"/>
+          <ac:spMkLst>
+            <pc:docMk/>
+            <pc:sldMk cId="235160188" sldId="273"/>
+            <ac:spMk id="2" creationId="{4B7D04AF-7FE4-226E-A143-D89043A69AFC}"/>
+          </ac:spMkLst>
+        </pc:spChg>
+        <pc:spChg chg="del">
+          <ac:chgData name="Dave Sushames" userId="ce71797e-895c-47df-af8e-c160254d5cef" providerId="ADAL" clId="{067FCE3D-3D41-4548-936F-F0A348C85C95}" dt="2025-10-12T08:15:43.191" v="1174" actId="22"/>
+          <ac:spMkLst>
+            <pc:docMk/>
+            <pc:sldMk cId="235160188" sldId="273"/>
+            <ac:spMk id="3" creationId="{0CF0134F-73CA-7314-FA01-1373838B6837}"/>
+          </ac:spMkLst>
+        </pc:spChg>
+        <pc:spChg chg="add mod">
+          <ac:chgData name="Dave Sushames" userId="ce71797e-895c-47df-af8e-c160254d5cef" providerId="ADAL" clId="{067FCE3D-3D41-4548-936F-F0A348C85C95}" dt="2025-10-12T08:17:11.438" v="1180" actId="478"/>
+          <ac:spMkLst>
+            <pc:docMk/>
+            <pc:sldMk cId="235160188" sldId="273"/>
+            <ac:spMk id="7" creationId="{7C18CD41-88E4-E18B-3FA9-0EF8278CC019}"/>
+          </ac:spMkLst>
+        </pc:spChg>
+        <pc:picChg chg="add del mod ord">
+          <ac:chgData name="Dave Sushames" userId="ce71797e-895c-47df-af8e-c160254d5cef" providerId="ADAL" clId="{067FCE3D-3D41-4548-936F-F0A348C85C95}" dt="2025-10-12T08:17:11.438" v="1180" actId="478"/>
+          <ac:picMkLst>
+            <pc:docMk/>
+            <pc:sldMk cId="235160188" sldId="273"/>
+            <ac:picMk id="5" creationId="{4FC10799-3AB9-4C87-EC9B-8952EB85ADD5}"/>
+          </ac:picMkLst>
+        </pc:picChg>
+        <pc:picChg chg="add mod">
+          <ac:chgData name="Dave Sushames" userId="ce71797e-895c-47df-af8e-c160254d5cef" providerId="ADAL" clId="{067FCE3D-3D41-4548-936F-F0A348C85C95}" dt="2025-10-12T08:17:15.397" v="1182" actId="14100"/>
+          <ac:picMkLst>
+            <pc:docMk/>
+            <pc:sldMk cId="235160188" sldId="273"/>
+            <ac:picMk id="9" creationId="{157DAFFB-14FA-BB12-D561-E70551D6CFAE}"/>
+          </ac:picMkLst>
+        </pc:picChg>
+      </pc:sldChg>
+      <pc:sldChg chg="addSp delSp modSp new mod">
+        <pc:chgData name="Dave Sushames" userId="ce71797e-895c-47df-af8e-c160254d5cef" providerId="ADAL" clId="{067FCE3D-3D41-4548-936F-F0A348C85C95}" dt="2025-10-12T08:18:11.301" v="1197" actId="14100"/>
+        <pc:sldMkLst>
+          <pc:docMk/>
+          <pc:sldMk cId="1441284574" sldId="274"/>
+        </pc:sldMkLst>
+        <pc:spChg chg="mod">
+          <ac:chgData name="Dave Sushames" userId="ce71797e-895c-47df-af8e-c160254d5cef" providerId="ADAL" clId="{067FCE3D-3D41-4548-936F-F0A348C85C95}" dt="2025-10-12T08:17:22.043" v="1191" actId="20577"/>
+          <ac:spMkLst>
+            <pc:docMk/>
+            <pc:sldMk cId="1441284574" sldId="274"/>
+            <ac:spMk id="2" creationId="{3660742D-D3D2-0A90-B697-18F55B256576}"/>
+          </ac:spMkLst>
+        </pc:spChg>
+        <pc:spChg chg="del">
+          <ac:chgData name="Dave Sushames" userId="ce71797e-895c-47df-af8e-c160254d5cef" providerId="ADAL" clId="{067FCE3D-3D41-4548-936F-F0A348C85C95}" dt="2025-10-12T08:17:45.696" v="1192" actId="22"/>
+          <ac:spMkLst>
+            <pc:docMk/>
+            <pc:sldMk cId="1441284574" sldId="274"/>
+            <ac:spMk id="3" creationId="{943CF016-7C71-E1F9-9E04-09F8527E4A88}"/>
+          </ac:spMkLst>
+        </pc:spChg>
+        <pc:spChg chg="add mod">
+          <ac:chgData name="Dave Sushames" userId="ce71797e-895c-47df-af8e-c160254d5cef" providerId="ADAL" clId="{067FCE3D-3D41-4548-936F-F0A348C85C95}" dt="2025-10-12T08:18:06.727" v="1195" actId="478"/>
+          <ac:spMkLst>
+            <pc:docMk/>
+            <pc:sldMk cId="1441284574" sldId="274"/>
+            <ac:spMk id="7" creationId="{98BAE2A4-7952-7CA0-924E-83CE93CF822D}"/>
+          </ac:spMkLst>
+        </pc:spChg>
+        <pc:picChg chg="add del mod ord">
+          <ac:chgData name="Dave Sushames" userId="ce71797e-895c-47df-af8e-c160254d5cef" providerId="ADAL" clId="{067FCE3D-3D41-4548-936F-F0A348C85C95}" dt="2025-10-12T08:18:06.727" v="1195" actId="478"/>
+          <ac:picMkLst>
+            <pc:docMk/>
+            <pc:sldMk cId="1441284574" sldId="274"/>
+            <ac:picMk id="5" creationId="{477EFCD6-09E3-EDD7-E3E7-FF9CB4027210}"/>
+          </ac:picMkLst>
+        </pc:picChg>
+        <pc:picChg chg="add mod">
+          <ac:chgData name="Dave Sushames" userId="ce71797e-895c-47df-af8e-c160254d5cef" providerId="ADAL" clId="{067FCE3D-3D41-4548-936F-F0A348C85C95}" dt="2025-10-12T08:18:11.301" v="1197" actId="14100"/>
+          <ac:picMkLst>
+            <pc:docMk/>
+            <pc:sldMk cId="1441284574" sldId="274"/>
+            <ac:picMk id="9" creationId="{507ACD9B-482A-41A7-253C-99B530944838}"/>
+          </ac:picMkLst>
+        </pc:picChg>
+      </pc:sldChg>
+      <pc:sldChg chg="addSp delSp modSp new mod">
+        <pc:chgData name="Dave Sushames" userId="ce71797e-895c-47df-af8e-c160254d5cef" providerId="ADAL" clId="{067FCE3D-3D41-4548-936F-F0A348C85C95}" dt="2025-10-12T08:18:41.754" v="1209" actId="14100"/>
+        <pc:sldMkLst>
+          <pc:docMk/>
+          <pc:sldMk cId="3171515894" sldId="275"/>
+        </pc:sldMkLst>
+        <pc:spChg chg="mod">
+          <ac:chgData name="Dave Sushames" userId="ce71797e-895c-47df-af8e-c160254d5cef" providerId="ADAL" clId="{067FCE3D-3D41-4548-936F-F0A348C85C95}" dt="2025-10-12T08:18:18.358" v="1206" actId="20577"/>
+          <ac:spMkLst>
+            <pc:docMk/>
+            <pc:sldMk cId="3171515894" sldId="275"/>
+            <ac:spMk id="2" creationId="{A8455F7F-95AE-D54D-95BB-1A120503CEC5}"/>
+          </ac:spMkLst>
+        </pc:spChg>
+        <pc:spChg chg="del">
+          <ac:chgData name="Dave Sushames" userId="ce71797e-895c-47df-af8e-c160254d5cef" providerId="ADAL" clId="{067FCE3D-3D41-4548-936F-F0A348C85C95}" dt="2025-10-12T08:18:36.673" v="1207" actId="22"/>
+          <ac:spMkLst>
+            <pc:docMk/>
+            <pc:sldMk cId="3171515894" sldId="275"/>
+            <ac:spMk id="3" creationId="{86D83F03-0A2B-E5B7-520B-A23B0FDA2268}"/>
+          </ac:spMkLst>
+        </pc:spChg>
+        <pc:picChg chg="add mod ord">
+          <ac:chgData name="Dave Sushames" userId="ce71797e-895c-47df-af8e-c160254d5cef" providerId="ADAL" clId="{067FCE3D-3D41-4548-936F-F0A348C85C95}" dt="2025-10-12T08:18:41.754" v="1209" actId="14100"/>
+          <ac:picMkLst>
+            <pc:docMk/>
+            <pc:sldMk cId="3171515894" sldId="275"/>
+            <ac:picMk id="5" creationId="{E299E748-E08E-6DFC-CA83-678AF649F111}"/>
+          </ac:picMkLst>
+        </pc:picChg>
+      </pc:sldChg>
+      <pc:sldChg chg="addSp modSp new mod">
+        <pc:chgData name="Dave Sushames" userId="ce71797e-895c-47df-af8e-c160254d5cef" providerId="ADAL" clId="{067FCE3D-3D41-4548-936F-F0A348C85C95}" dt="2025-10-12T08:20:21.355" v="1221" actId="14100"/>
+        <pc:sldMkLst>
+          <pc:docMk/>
+          <pc:sldMk cId="86843363" sldId="276"/>
+        </pc:sldMkLst>
+        <pc:spChg chg="mod">
+          <ac:chgData name="Dave Sushames" userId="ce71797e-895c-47df-af8e-c160254d5cef" providerId="ADAL" clId="{067FCE3D-3D41-4548-936F-F0A348C85C95}" dt="2025-10-12T08:18:57.863" v="1218" actId="20577"/>
+          <ac:spMkLst>
+            <pc:docMk/>
+            <pc:sldMk cId="86843363" sldId="276"/>
+            <ac:spMk id="2" creationId="{554C44E3-F2D9-9C61-F32B-DB4A528B7983}"/>
+          </ac:spMkLst>
+        </pc:spChg>
+        <pc:picChg chg="add mod">
+          <ac:chgData name="Dave Sushames" userId="ce71797e-895c-47df-af8e-c160254d5cef" providerId="ADAL" clId="{067FCE3D-3D41-4548-936F-F0A348C85C95}" dt="2025-10-12T08:20:21.355" v="1221" actId="14100"/>
+          <ac:picMkLst>
+            <pc:docMk/>
+            <pc:sldMk cId="86843363" sldId="276"/>
+            <ac:picMk id="5" creationId="{7C866F3C-E247-A1FE-041D-922BD663EE7D}"/>
+          </ac:picMkLst>
+        </pc:picChg>
+      </pc:sldChg>
+    </pc:docChg>
+  </pc:docChgLst>
   <pc:docChgLst>
     <pc:chgData name="Dave Sushames" userId="ce71797e-895c-47df-af8e-c160254d5cef" providerId="ADAL" clId="{09E3D1C6-ADE1-4028-8AAE-A09EF0552160}"/>
     <pc:docChg chg="undo custSel modSld">
@@ -149,14 +784,6 @@
             <ac:spMk id="3" creationId="{E24248B4-502C-A4ED-AF3F-AD9EE62AFB43}"/>
           </ac:spMkLst>
         </pc:spChg>
-        <pc:picChg chg="add del mod ord">
-          <ac:chgData name="Dave Sushames" userId="ce71797e-895c-47df-af8e-c160254d5cef" providerId="ADAL" clId="{09E3D1C6-ADE1-4028-8AAE-A09EF0552160}" dt="2025-10-07T02:31:58.574" v="5" actId="22"/>
-          <ac:picMkLst>
-            <pc:docMk/>
-            <pc:sldMk cId="2630173749" sldId="266"/>
-            <ac:picMk id="5" creationId="{F8EBE60B-5FE6-D62D-F3AF-18826DDDFFCE}"/>
-          </ac:picMkLst>
-        </pc:picChg>
       </pc:sldChg>
     </pc:docChg>
   </pc:docChgLst>
@@ -3420,9 +4047,23 @@
           <a:lstStyle/>
           <a:p>
             <a:r>
-              <a:rPr lang="en-NZ" dirty="0"/>
+              <a:rPr lang="en-NZ" dirty="0">
+                <a:latin typeface="Stencil" panose="040409050D0802020404" pitchFamily="82" charset="0"/>
+              </a:rPr>
               <a:t>FULL METAL LIBRARY</a:t>
             </a:r>
+            <a:br>
+              <a:rPr lang="en-NZ" dirty="0">
+                <a:latin typeface="Stencil" panose="040409050D0802020404" pitchFamily="82" charset="0"/>
+              </a:rPr>
+            </a:br>
+            <a:r>
+              <a:rPr lang="en-NZ" sz="4400" dirty="0"/>
+              <a:t>SD6503 Final Presentation</a:t>
+            </a:r>
+            <a:endParaRPr lang="en-NZ" sz="4400" dirty="0">
+              <a:latin typeface="Stencil" panose="040409050D0802020404" pitchFamily="82" charset="0"/>
+            </a:endParaRPr>
           </a:p>
         </p:txBody>
       </p:sp>
@@ -3442,12 +4083,33 @@
             <p:ph type="subTitle" idx="1"/>
           </p:nvPr>
         </p:nvSpPr>
-        <p:spPr/>
-        <p:txBody>
-          <a:bodyPr/>
-          <a:lstStyle/>
-          <a:p>
-            <a:endParaRPr lang="en-NZ"/>
+        <p:spPr>
+          <a:xfrm>
+            <a:off x="1524000" y="4545314"/>
+            <a:ext cx="9144000" cy="1655762"/>
+          </a:xfrm>
+        </p:spPr>
+        <p:txBody>
+          <a:bodyPr/>
+          <a:lstStyle/>
+          <a:p>
+            <a:r>
+              <a:rPr lang="en-US" dirty="0"/>
+              <a:t>Dave Sushames</a:t>
+            </a:r>
+          </a:p>
+          <a:p>
+            <a:r>
+              <a:rPr lang="en-US" dirty="0"/>
+              <a:t>Sachith Samarasinghe</a:t>
+            </a:r>
+          </a:p>
+          <a:p>
+            <a:r>
+              <a:rPr lang="en-US" dirty="0"/>
+              <a:t>Shontelle Steeg</a:t>
+            </a:r>
+            <a:endParaRPr lang="en-NZ" dirty="0"/>
           </a:p>
         </p:txBody>
       </p:sp>
@@ -3469,13 +4131,7 @@
   <p:cSld>
     <p:spTree>
       <p:nvGrpSpPr>
-        <p:cNvPr id="1" name="">
-          <a:extLst>
-            <a:ext uri="{FF2B5EF4-FFF2-40B4-BE49-F238E27FC236}">
-              <a16:creationId xmlns:a16="http://schemas.microsoft.com/office/drawing/2014/main" id="{D42E9B6F-69F2-D404-C88B-3A1708D97E13}"/>
-            </a:ext>
-          </a:extLst>
-        </p:cNvPr>
+        <p:cNvPr id="1" name=""/>
         <p:cNvGrpSpPr/>
         <p:nvPr/>
       </p:nvGrpSpPr>
@@ -3492,7 +4148,7 @@
           <p:cNvPr id="2" name="Title 1">
             <a:extLst>
               <a:ext uri="{FF2B5EF4-FFF2-40B4-BE49-F238E27FC236}">
-                <a16:creationId xmlns:a16="http://schemas.microsoft.com/office/drawing/2014/main" id="{011A136F-5311-7E41-587D-793B5A825835}"/>
+                <a16:creationId xmlns:a16="http://schemas.microsoft.com/office/drawing/2014/main" id="{A8455F7F-95AE-D54D-95BB-1A120503CEC5}"/>
               </a:ext>
             </a:extLst>
           </p:cNvPr>
@@ -3509,41 +4165,49 @@
           <a:lstStyle/>
           <a:p>
             <a:r>
-              <a:rPr lang="en-NZ" dirty="0"/>
-              <a:t>Selenium</a:t>
-            </a:r>
-          </a:p>
-        </p:txBody>
-      </p:sp>
-      <p:sp>
-        <p:nvSpPr>
-          <p:cNvPr id="3" name="Content Placeholder 2">
-            <a:extLst>
-              <a:ext uri="{FF2B5EF4-FFF2-40B4-BE49-F238E27FC236}">
-                <a16:creationId xmlns:a16="http://schemas.microsoft.com/office/drawing/2014/main" id="{1D792F9E-8EC8-41E6-FA3F-0C0D45503683}"/>
-              </a:ext>
-            </a:extLst>
-          </p:cNvPr>
-          <p:cNvSpPr>
-            <a:spLocks noGrp="1"/>
-          </p:cNvSpPr>
+              <a:rPr lang="en-US" dirty="0"/>
+              <a:t>Sprint 4</a:t>
+            </a:r>
+            <a:endParaRPr lang="en-NZ" dirty="0"/>
+          </a:p>
+        </p:txBody>
+      </p:sp>
+      <p:pic>
+        <p:nvPicPr>
+          <p:cNvPr id="5" name="Content Placeholder 4">
+            <a:extLst>
+              <a:ext uri="{FF2B5EF4-FFF2-40B4-BE49-F238E27FC236}">
+                <a16:creationId xmlns:a16="http://schemas.microsoft.com/office/drawing/2014/main" id="{E299E748-E08E-6DFC-CA83-678AF649F111}"/>
+              </a:ext>
+            </a:extLst>
+          </p:cNvPr>
+          <p:cNvPicPr>
+            <a:picLocks noGrp="1" noChangeAspect="1"/>
+          </p:cNvPicPr>
           <p:nvPr>
             <p:ph idx="1"/>
           </p:nvPr>
-        </p:nvSpPr>
-        <p:spPr/>
-        <p:txBody>
-          <a:bodyPr/>
-          <a:lstStyle/>
-          <a:p>
-            <a:endParaRPr lang="en-NZ"/>
-          </a:p>
-        </p:txBody>
-      </p:sp>
+        </p:nvPicPr>
+        <p:blipFill>
+          <a:blip r:embed="rId2"/>
+          <a:stretch>
+            <a:fillRect/>
+          </a:stretch>
+        </p:blipFill>
+        <p:spPr>
+          <a:xfrm>
+            <a:off x="1459333" y="1309036"/>
+            <a:ext cx="9166957" cy="5322749"/>
+          </a:xfrm>
+          <a:prstGeom prst="rect">
+            <a:avLst/>
+          </a:prstGeom>
+        </p:spPr>
+      </p:pic>
     </p:spTree>
     <p:extLst>
       <p:ext uri="{BB962C8B-B14F-4D97-AF65-F5344CB8AC3E}">
-        <p14:creationId xmlns:p14="http://schemas.microsoft.com/office/powerpoint/2010/main" val="4113579959"/>
+        <p14:creationId xmlns:p14="http://schemas.microsoft.com/office/powerpoint/2010/main" val="3171515894"/>
       </p:ext>
     </p:extLst>
   </p:cSld>
@@ -3554,474 +4218,6 @@
 </file>
 
 <file path=ppt/slides/slide11.xml><?xml version="1.0" encoding="utf-8"?>
-<p:sld xmlns:a="http://schemas.openxmlformats.org/drawingml/2006/main" xmlns:r="http://schemas.openxmlformats.org/officeDocument/2006/relationships" xmlns:p="http://schemas.openxmlformats.org/presentationml/2006/main">
-  <p:cSld>
-    <p:spTree>
-      <p:nvGrpSpPr>
-        <p:cNvPr id="1" name="">
-          <a:extLst>
-            <a:ext uri="{FF2B5EF4-FFF2-40B4-BE49-F238E27FC236}">
-              <a16:creationId xmlns:a16="http://schemas.microsoft.com/office/drawing/2014/main" id="{4420F141-39C8-F5C0-0C26-7B051A8E6694}"/>
-            </a:ext>
-          </a:extLst>
-        </p:cNvPr>
-        <p:cNvGrpSpPr/>
-        <p:nvPr/>
-      </p:nvGrpSpPr>
-      <p:grpSpPr>
-        <a:xfrm>
-          <a:off x="0" y="0"/>
-          <a:ext cx="0" cy="0"/>
-          <a:chOff x="0" y="0"/>
-          <a:chExt cx="0" cy="0"/>
-        </a:xfrm>
-      </p:grpSpPr>
-      <p:sp>
-        <p:nvSpPr>
-          <p:cNvPr id="2" name="Title 1">
-            <a:extLst>
-              <a:ext uri="{FF2B5EF4-FFF2-40B4-BE49-F238E27FC236}">
-                <a16:creationId xmlns:a16="http://schemas.microsoft.com/office/drawing/2014/main" id="{24155ACB-0F50-1570-C225-6A1F5B1483CC}"/>
-              </a:ext>
-            </a:extLst>
-          </p:cNvPr>
-          <p:cNvSpPr>
-            <a:spLocks noGrp="1"/>
-          </p:cNvSpPr>
-          <p:nvPr>
-            <p:ph type="title"/>
-          </p:nvPr>
-        </p:nvSpPr>
-        <p:spPr/>
-        <p:txBody>
-          <a:bodyPr/>
-          <a:lstStyle/>
-          <a:p>
-            <a:r>
-              <a:rPr lang="en-NZ" dirty="0"/>
-              <a:t>JMeter</a:t>
-            </a:r>
-          </a:p>
-        </p:txBody>
-      </p:sp>
-      <p:sp>
-        <p:nvSpPr>
-          <p:cNvPr id="3" name="Content Placeholder 2">
-            <a:extLst>
-              <a:ext uri="{FF2B5EF4-FFF2-40B4-BE49-F238E27FC236}">
-                <a16:creationId xmlns:a16="http://schemas.microsoft.com/office/drawing/2014/main" id="{87E6B5A8-FD74-EEC8-7E6B-B5A9D35A52FF}"/>
-              </a:ext>
-            </a:extLst>
-          </p:cNvPr>
-          <p:cNvSpPr>
-            <a:spLocks noGrp="1"/>
-          </p:cNvSpPr>
-          <p:nvPr>
-            <p:ph idx="1"/>
-          </p:nvPr>
-        </p:nvSpPr>
-        <p:spPr/>
-        <p:txBody>
-          <a:bodyPr/>
-          <a:lstStyle/>
-          <a:p>
-            <a:endParaRPr lang="en-NZ"/>
-          </a:p>
-        </p:txBody>
-      </p:sp>
-    </p:spTree>
-    <p:extLst>
-      <p:ext uri="{BB962C8B-B14F-4D97-AF65-F5344CB8AC3E}">
-        <p14:creationId xmlns:p14="http://schemas.microsoft.com/office/powerpoint/2010/main" val="1155972948"/>
-      </p:ext>
-    </p:extLst>
-  </p:cSld>
-  <p:clrMapOvr>
-    <a:masterClrMapping/>
-  </p:clrMapOvr>
-</p:sld>
-</file>
-
-<file path=ppt/slides/slide12.xml><?xml version="1.0" encoding="utf-8"?>
-<p:sld xmlns:a="http://schemas.openxmlformats.org/drawingml/2006/main" xmlns:r="http://schemas.openxmlformats.org/officeDocument/2006/relationships" xmlns:p="http://schemas.openxmlformats.org/presentationml/2006/main">
-  <p:cSld>
-    <p:spTree>
-      <p:nvGrpSpPr>
-        <p:cNvPr id="1" name="">
-          <a:extLst>
-            <a:ext uri="{FF2B5EF4-FFF2-40B4-BE49-F238E27FC236}">
-              <a16:creationId xmlns:a16="http://schemas.microsoft.com/office/drawing/2014/main" id="{75DAB85E-1E6E-E131-1D07-4DBCB0D75D42}"/>
-            </a:ext>
-          </a:extLst>
-        </p:cNvPr>
-        <p:cNvGrpSpPr/>
-        <p:nvPr/>
-      </p:nvGrpSpPr>
-      <p:grpSpPr>
-        <a:xfrm>
-          <a:off x="0" y="0"/>
-          <a:ext cx="0" cy="0"/>
-          <a:chOff x="0" y="0"/>
-          <a:chExt cx="0" cy="0"/>
-        </a:xfrm>
-      </p:grpSpPr>
-      <p:sp>
-        <p:nvSpPr>
-          <p:cNvPr id="2" name="Title 1">
-            <a:extLst>
-              <a:ext uri="{FF2B5EF4-FFF2-40B4-BE49-F238E27FC236}">
-                <a16:creationId xmlns:a16="http://schemas.microsoft.com/office/drawing/2014/main" id="{D56CE0E8-3DC2-97F1-47B8-C12A4F201660}"/>
-              </a:ext>
-            </a:extLst>
-          </p:cNvPr>
-          <p:cNvSpPr>
-            <a:spLocks noGrp="1"/>
-          </p:cNvSpPr>
-          <p:nvPr>
-            <p:ph type="title"/>
-          </p:nvPr>
-        </p:nvSpPr>
-        <p:spPr/>
-        <p:txBody>
-          <a:bodyPr/>
-          <a:lstStyle/>
-          <a:p>
-            <a:r>
-              <a:rPr lang="en-NZ" dirty="0"/>
-              <a:t>Vulnerabilities + How we fixed</a:t>
-            </a:r>
-          </a:p>
-        </p:txBody>
-      </p:sp>
-      <p:sp>
-        <p:nvSpPr>
-          <p:cNvPr id="3" name="Content Placeholder 2">
-            <a:extLst>
-              <a:ext uri="{FF2B5EF4-FFF2-40B4-BE49-F238E27FC236}">
-                <a16:creationId xmlns:a16="http://schemas.microsoft.com/office/drawing/2014/main" id="{E24248B4-502C-A4ED-AF3F-AD9EE62AFB43}"/>
-              </a:ext>
-            </a:extLst>
-          </p:cNvPr>
-          <p:cNvSpPr>
-            <a:spLocks noGrp="1"/>
-          </p:cNvSpPr>
-          <p:nvPr>
-            <p:ph idx="1"/>
-          </p:nvPr>
-        </p:nvSpPr>
-        <p:spPr/>
-        <p:txBody>
-          <a:bodyPr/>
-          <a:lstStyle/>
-          <a:p>
-            <a:endParaRPr lang="en-NZ" dirty="0"/>
-          </a:p>
-        </p:txBody>
-      </p:sp>
-    </p:spTree>
-    <p:extLst>
-      <p:ext uri="{BB962C8B-B14F-4D97-AF65-F5344CB8AC3E}">
-        <p14:creationId xmlns:p14="http://schemas.microsoft.com/office/powerpoint/2010/main" val="2630173749"/>
-      </p:ext>
-    </p:extLst>
-  </p:cSld>
-  <p:clrMapOvr>
-    <a:masterClrMapping/>
-  </p:clrMapOvr>
-</p:sld>
-</file>
-
-<file path=ppt/slides/slide13.xml><?xml version="1.0" encoding="utf-8"?>
-<p:sld xmlns:a="http://schemas.openxmlformats.org/drawingml/2006/main" xmlns:r="http://schemas.openxmlformats.org/officeDocument/2006/relationships" xmlns:p="http://schemas.openxmlformats.org/presentationml/2006/main">
-  <p:cSld>
-    <p:spTree>
-      <p:nvGrpSpPr>
-        <p:cNvPr id="1" name="">
-          <a:extLst>
-            <a:ext uri="{FF2B5EF4-FFF2-40B4-BE49-F238E27FC236}">
-              <a16:creationId xmlns:a16="http://schemas.microsoft.com/office/drawing/2014/main" id="{213EBB82-56C2-52F5-5279-AE25F78AC577}"/>
-            </a:ext>
-          </a:extLst>
-        </p:cNvPr>
-        <p:cNvGrpSpPr/>
-        <p:nvPr/>
-      </p:nvGrpSpPr>
-      <p:grpSpPr>
-        <a:xfrm>
-          <a:off x="0" y="0"/>
-          <a:ext cx="0" cy="0"/>
-          <a:chOff x="0" y="0"/>
-          <a:chExt cx="0" cy="0"/>
-        </a:xfrm>
-      </p:grpSpPr>
-      <p:sp>
-        <p:nvSpPr>
-          <p:cNvPr id="2" name="Title 1">
-            <a:extLst>
-              <a:ext uri="{FF2B5EF4-FFF2-40B4-BE49-F238E27FC236}">
-                <a16:creationId xmlns:a16="http://schemas.microsoft.com/office/drawing/2014/main" id="{1C3DABB8-F401-78A1-F3DE-B217C8CCFB95}"/>
-              </a:ext>
-            </a:extLst>
-          </p:cNvPr>
-          <p:cNvSpPr>
-            <a:spLocks noGrp="1"/>
-          </p:cNvSpPr>
-          <p:nvPr>
-            <p:ph type="title"/>
-          </p:nvPr>
-        </p:nvSpPr>
-        <p:spPr/>
-        <p:txBody>
-          <a:bodyPr/>
-          <a:lstStyle/>
-          <a:p>
-            <a:r>
-              <a:rPr lang="en-NZ" dirty="0"/>
-              <a:t>Issues/Challenges faced</a:t>
-            </a:r>
-          </a:p>
-        </p:txBody>
-      </p:sp>
-      <p:sp>
-        <p:nvSpPr>
-          <p:cNvPr id="3" name="Content Placeholder 2">
-            <a:extLst>
-              <a:ext uri="{FF2B5EF4-FFF2-40B4-BE49-F238E27FC236}">
-                <a16:creationId xmlns:a16="http://schemas.microsoft.com/office/drawing/2014/main" id="{D95EFAFD-755F-5651-96A3-898AC8B90080}"/>
-              </a:ext>
-            </a:extLst>
-          </p:cNvPr>
-          <p:cNvSpPr>
-            <a:spLocks noGrp="1"/>
-          </p:cNvSpPr>
-          <p:nvPr>
-            <p:ph idx="1"/>
-          </p:nvPr>
-        </p:nvSpPr>
-        <p:spPr/>
-        <p:txBody>
-          <a:bodyPr/>
-          <a:lstStyle/>
-          <a:p>
-            <a:r>
-              <a:rPr lang="en-NZ" dirty="0"/>
-              <a:t>Faced challenges while completing Unit and Automation testing.</a:t>
-            </a:r>
-          </a:p>
-          <a:p>
-            <a:r>
-              <a:rPr lang="en-NZ" dirty="0"/>
-              <a:t>Challenges faced with  </a:t>
-            </a:r>
-            <a:r>
-              <a:rPr lang="en-NZ" dirty="0" err="1"/>
-              <a:t>GitBash</a:t>
-            </a:r>
-            <a:r>
-              <a:rPr lang="en-NZ" dirty="0"/>
-              <a:t> while uploading files and merging them with our repository. </a:t>
-            </a:r>
-          </a:p>
-          <a:p>
-            <a:endParaRPr lang="en-NZ" dirty="0"/>
-          </a:p>
-        </p:txBody>
-      </p:sp>
-    </p:spTree>
-    <p:extLst>
-      <p:ext uri="{BB962C8B-B14F-4D97-AF65-F5344CB8AC3E}">
-        <p14:creationId xmlns:p14="http://schemas.microsoft.com/office/powerpoint/2010/main" val="1913538684"/>
-      </p:ext>
-    </p:extLst>
-  </p:cSld>
-  <p:clrMapOvr>
-    <a:masterClrMapping/>
-  </p:clrMapOvr>
-</p:sld>
-</file>
-
-<file path=ppt/slides/slide14.xml><?xml version="1.0" encoding="utf-8"?>
-<p:sld xmlns:a="http://schemas.openxmlformats.org/drawingml/2006/main" xmlns:r="http://schemas.openxmlformats.org/officeDocument/2006/relationships" xmlns:p="http://schemas.openxmlformats.org/presentationml/2006/main">
-  <p:cSld>
-    <p:spTree>
-      <p:nvGrpSpPr>
-        <p:cNvPr id="1" name="">
-          <a:extLst>
-            <a:ext uri="{FF2B5EF4-FFF2-40B4-BE49-F238E27FC236}">
-              <a16:creationId xmlns:a16="http://schemas.microsoft.com/office/drawing/2014/main" id="{F15F462B-1F43-5E7F-38D9-9BBDB1F60DBA}"/>
-            </a:ext>
-          </a:extLst>
-        </p:cNvPr>
-        <p:cNvGrpSpPr/>
-        <p:nvPr/>
-      </p:nvGrpSpPr>
-      <p:grpSpPr>
-        <a:xfrm>
-          <a:off x="0" y="0"/>
-          <a:ext cx="0" cy="0"/>
-          <a:chOff x="0" y="0"/>
-          <a:chExt cx="0" cy="0"/>
-        </a:xfrm>
-      </p:grpSpPr>
-      <p:sp>
-        <p:nvSpPr>
-          <p:cNvPr id="2" name="Title 1">
-            <a:extLst>
-              <a:ext uri="{FF2B5EF4-FFF2-40B4-BE49-F238E27FC236}">
-                <a16:creationId xmlns:a16="http://schemas.microsoft.com/office/drawing/2014/main" id="{EDC84272-C502-5395-AC27-03BF1AB6854D}"/>
-              </a:ext>
-            </a:extLst>
-          </p:cNvPr>
-          <p:cNvSpPr>
-            <a:spLocks noGrp="1"/>
-          </p:cNvSpPr>
-          <p:nvPr>
-            <p:ph type="title"/>
-          </p:nvPr>
-        </p:nvSpPr>
-        <p:spPr/>
-        <p:txBody>
-          <a:bodyPr/>
-          <a:lstStyle/>
-          <a:p>
-            <a:r>
-              <a:rPr lang="en-NZ" dirty="0"/>
-              <a:t>The Good</a:t>
-            </a:r>
-          </a:p>
-        </p:txBody>
-      </p:sp>
-      <p:sp>
-        <p:nvSpPr>
-          <p:cNvPr id="3" name="Content Placeholder 2">
-            <a:extLst>
-              <a:ext uri="{FF2B5EF4-FFF2-40B4-BE49-F238E27FC236}">
-                <a16:creationId xmlns:a16="http://schemas.microsoft.com/office/drawing/2014/main" id="{F95F3A64-A6CD-B226-7855-2C318FC88B5E}"/>
-              </a:ext>
-            </a:extLst>
-          </p:cNvPr>
-          <p:cNvSpPr>
-            <a:spLocks noGrp="1"/>
-          </p:cNvSpPr>
-          <p:nvPr>
-            <p:ph idx="1"/>
-          </p:nvPr>
-        </p:nvSpPr>
-        <p:spPr/>
-        <p:txBody>
-          <a:bodyPr/>
-          <a:lstStyle/>
-          <a:p>
-            <a:r>
-              <a:rPr lang="en-NZ" dirty="0"/>
-              <a:t>App works 👍</a:t>
-            </a:r>
-          </a:p>
-        </p:txBody>
-      </p:sp>
-    </p:spTree>
-    <p:extLst>
-      <p:ext uri="{BB962C8B-B14F-4D97-AF65-F5344CB8AC3E}">
-        <p14:creationId xmlns:p14="http://schemas.microsoft.com/office/powerpoint/2010/main" val="3344191263"/>
-      </p:ext>
-    </p:extLst>
-  </p:cSld>
-  <p:clrMapOvr>
-    <a:masterClrMapping/>
-  </p:clrMapOvr>
-</p:sld>
-</file>
-
-<file path=ppt/slides/slide15.xml><?xml version="1.0" encoding="utf-8"?>
-<p:sld xmlns:a="http://schemas.openxmlformats.org/drawingml/2006/main" xmlns:r="http://schemas.openxmlformats.org/officeDocument/2006/relationships" xmlns:p="http://schemas.openxmlformats.org/presentationml/2006/main">
-  <p:cSld>
-    <p:spTree>
-      <p:nvGrpSpPr>
-        <p:cNvPr id="1" name="">
-          <a:extLst>
-            <a:ext uri="{FF2B5EF4-FFF2-40B4-BE49-F238E27FC236}">
-              <a16:creationId xmlns:a16="http://schemas.microsoft.com/office/drawing/2014/main" id="{CBACF806-3187-EE67-3A26-B40A4C06C24D}"/>
-            </a:ext>
-          </a:extLst>
-        </p:cNvPr>
-        <p:cNvGrpSpPr/>
-        <p:nvPr/>
-      </p:nvGrpSpPr>
-      <p:grpSpPr>
-        <a:xfrm>
-          <a:off x="0" y="0"/>
-          <a:ext cx="0" cy="0"/>
-          <a:chOff x="0" y="0"/>
-          <a:chExt cx="0" cy="0"/>
-        </a:xfrm>
-      </p:grpSpPr>
-      <p:sp>
-        <p:nvSpPr>
-          <p:cNvPr id="2" name="Title 1">
-            <a:extLst>
-              <a:ext uri="{FF2B5EF4-FFF2-40B4-BE49-F238E27FC236}">
-                <a16:creationId xmlns:a16="http://schemas.microsoft.com/office/drawing/2014/main" id="{67E0AA9E-64EE-815E-8593-326BCDA3D934}"/>
-              </a:ext>
-            </a:extLst>
-          </p:cNvPr>
-          <p:cNvSpPr>
-            <a:spLocks noGrp="1"/>
-          </p:cNvSpPr>
-          <p:nvPr>
-            <p:ph type="title"/>
-          </p:nvPr>
-        </p:nvSpPr>
-        <p:spPr/>
-        <p:txBody>
-          <a:bodyPr/>
-          <a:lstStyle/>
-          <a:p>
-            <a:r>
-              <a:rPr lang="en-NZ" dirty="0"/>
-              <a:t>The Running Application</a:t>
-            </a:r>
-          </a:p>
-        </p:txBody>
-      </p:sp>
-      <p:sp>
-        <p:nvSpPr>
-          <p:cNvPr id="3" name="Content Placeholder 2">
-            <a:extLst>
-              <a:ext uri="{FF2B5EF4-FFF2-40B4-BE49-F238E27FC236}">
-                <a16:creationId xmlns:a16="http://schemas.microsoft.com/office/drawing/2014/main" id="{34ADAE1A-25A9-5D4C-9E2B-AF0EDDA66F6E}"/>
-              </a:ext>
-            </a:extLst>
-          </p:cNvPr>
-          <p:cNvSpPr>
-            <a:spLocks noGrp="1"/>
-          </p:cNvSpPr>
-          <p:nvPr>
-            <p:ph idx="1"/>
-          </p:nvPr>
-        </p:nvSpPr>
-        <p:spPr/>
-        <p:txBody>
-          <a:bodyPr/>
-          <a:lstStyle/>
-          <a:p>
-            <a:endParaRPr lang="en-NZ"/>
-          </a:p>
-        </p:txBody>
-      </p:sp>
-    </p:spTree>
-    <p:extLst>
-      <p:ext uri="{BB962C8B-B14F-4D97-AF65-F5344CB8AC3E}">
-        <p14:creationId xmlns:p14="http://schemas.microsoft.com/office/powerpoint/2010/main" val="4020551322"/>
-      </p:ext>
-    </p:extLst>
-  </p:cSld>
-  <p:clrMapOvr>
-    <a:masterClrMapping/>
-  </p:clrMapOvr>
-</p:sld>
-</file>
-
-<file path=ppt/slides/slide2.xml><?xml version="1.0" encoding="utf-8"?>
 <p:sld xmlns:a="http://schemas.openxmlformats.org/drawingml/2006/main" xmlns:r="http://schemas.openxmlformats.org/officeDocument/2006/relationships" xmlns:p="http://schemas.openxmlformats.org/presentationml/2006/main">
   <p:cSld>
     <p:spTree>
@@ -4043,7 +4239,7 @@
           <p:cNvPr id="2" name="Title 1">
             <a:extLst>
               <a:ext uri="{FF2B5EF4-FFF2-40B4-BE49-F238E27FC236}">
-                <a16:creationId xmlns:a16="http://schemas.microsoft.com/office/drawing/2014/main" id="{1D63FDA9-C16B-2A93-5442-841FB6020638}"/>
+                <a16:creationId xmlns:a16="http://schemas.microsoft.com/office/drawing/2014/main" id="{554C44E3-F2D9-9C61-F32B-DB4A528B7983}"/>
               </a:ext>
             </a:extLst>
           </p:cNvPr>
@@ -4060,9 +4256,10 @@
           <a:lstStyle/>
           <a:p>
             <a:r>
-              <a:rPr lang="en-NZ" dirty="0"/>
-              <a:t>Overview</a:t>
-            </a:r>
+              <a:rPr lang="en-US" dirty="0"/>
+              <a:t>Sprint 5</a:t>
+            </a:r>
+            <a:endParaRPr lang="en-NZ" dirty="0"/>
           </a:p>
         </p:txBody>
       </p:sp>
@@ -4071,7 +4268,7 @@
           <p:cNvPr id="3" name="Content Placeholder 2">
             <a:extLst>
               <a:ext uri="{FF2B5EF4-FFF2-40B4-BE49-F238E27FC236}">
-                <a16:creationId xmlns:a16="http://schemas.microsoft.com/office/drawing/2014/main" id="{4E771DCA-505F-5CBB-FA90-2B8053CAEEDE}"/>
+                <a16:creationId xmlns:a16="http://schemas.microsoft.com/office/drawing/2014/main" id="{80D8C9FB-7760-BC10-A5DD-2719FAA9C654}"/>
               </a:ext>
             </a:extLst>
           </p:cNvPr>
@@ -4087,18 +4284,44 @@
           <a:bodyPr/>
           <a:lstStyle/>
           <a:p>
-            <a:pPr algn="just"/>
-            <a:r>
-              <a:rPr lang="en-NZ" dirty="0"/>
-              <a:t>A secure and strong like metal, web based library management system for managing books, authors, and administrator accounts with full CRUD features and authentications</a:t>
-            </a:r>
-          </a:p>
-        </p:txBody>
-      </p:sp>
+            <a:endParaRPr lang="en-NZ"/>
+          </a:p>
+        </p:txBody>
+      </p:sp>
+      <p:pic>
+        <p:nvPicPr>
+          <p:cNvPr id="5" name="Picture 4">
+            <a:extLst>
+              <a:ext uri="{FF2B5EF4-FFF2-40B4-BE49-F238E27FC236}">
+                <a16:creationId xmlns:a16="http://schemas.microsoft.com/office/drawing/2014/main" id="{7C866F3C-E247-A1FE-041D-922BD663EE7D}"/>
+              </a:ext>
+            </a:extLst>
+          </p:cNvPr>
+          <p:cNvPicPr>
+            <a:picLocks noChangeAspect="1"/>
+          </p:cNvPicPr>
+          <p:nvPr/>
+        </p:nvPicPr>
+        <p:blipFill>
+          <a:blip r:embed="rId2"/>
+          <a:stretch>
+            <a:fillRect/>
+          </a:stretch>
+        </p:blipFill>
+        <p:spPr>
+          <a:xfrm>
+            <a:off x="2813868" y="1232034"/>
+            <a:ext cx="7430537" cy="5441064"/>
+          </a:xfrm>
+          <a:prstGeom prst="rect">
+            <a:avLst/>
+          </a:prstGeom>
+        </p:spPr>
+      </p:pic>
     </p:spTree>
     <p:extLst>
       <p:ext uri="{BB962C8B-B14F-4D97-AF65-F5344CB8AC3E}">
-        <p14:creationId xmlns:p14="http://schemas.microsoft.com/office/powerpoint/2010/main" val="670477893"/>
+        <p14:creationId xmlns:p14="http://schemas.microsoft.com/office/powerpoint/2010/main" val="86843363"/>
       </p:ext>
     </p:extLst>
   </p:cSld>
@@ -4108,411 +4331,7 @@
 </p:sld>
 </file>
 
-<file path=ppt/slides/slide3.xml><?xml version="1.0" encoding="utf-8"?>
-<p:sld xmlns:a="http://schemas.openxmlformats.org/drawingml/2006/main" xmlns:r="http://schemas.openxmlformats.org/officeDocument/2006/relationships" xmlns:p="http://schemas.openxmlformats.org/presentationml/2006/main">
-  <p:cSld>
-    <p:spTree>
-      <p:nvGrpSpPr>
-        <p:cNvPr id="1" name="">
-          <a:extLst>
-            <a:ext uri="{FF2B5EF4-FFF2-40B4-BE49-F238E27FC236}">
-              <a16:creationId xmlns:a16="http://schemas.microsoft.com/office/drawing/2014/main" id="{96AF00D2-8529-17E7-349E-ADF20C425789}"/>
-            </a:ext>
-          </a:extLst>
-        </p:cNvPr>
-        <p:cNvGrpSpPr/>
-        <p:nvPr/>
-      </p:nvGrpSpPr>
-      <p:grpSpPr>
-        <a:xfrm>
-          <a:off x="0" y="0"/>
-          <a:ext cx="0" cy="0"/>
-          <a:chOff x="0" y="0"/>
-          <a:chExt cx="0" cy="0"/>
-        </a:xfrm>
-      </p:grpSpPr>
-      <p:sp>
-        <p:nvSpPr>
-          <p:cNvPr id="2" name="Title 1">
-            <a:extLst>
-              <a:ext uri="{FF2B5EF4-FFF2-40B4-BE49-F238E27FC236}">
-                <a16:creationId xmlns:a16="http://schemas.microsoft.com/office/drawing/2014/main" id="{CB964567-579B-2D49-D792-EC0ECDCB4D4A}"/>
-              </a:ext>
-            </a:extLst>
-          </p:cNvPr>
-          <p:cNvSpPr>
-            <a:spLocks noGrp="1"/>
-          </p:cNvSpPr>
-          <p:nvPr>
-            <p:ph type="title"/>
-          </p:nvPr>
-        </p:nvSpPr>
-        <p:spPr/>
-        <p:txBody>
-          <a:bodyPr/>
-          <a:lstStyle/>
-          <a:p>
-            <a:r>
-              <a:rPr lang="en-NZ" dirty="0"/>
-              <a:t>Features</a:t>
-            </a:r>
-          </a:p>
-        </p:txBody>
-      </p:sp>
-      <p:sp>
-        <p:nvSpPr>
-          <p:cNvPr id="3" name="Content Placeholder 2">
-            <a:extLst>
-              <a:ext uri="{FF2B5EF4-FFF2-40B4-BE49-F238E27FC236}">
-                <a16:creationId xmlns:a16="http://schemas.microsoft.com/office/drawing/2014/main" id="{9EC6207F-D462-2F3E-18AF-54E940AF757B}"/>
-              </a:ext>
-            </a:extLst>
-          </p:cNvPr>
-          <p:cNvSpPr>
-            <a:spLocks noGrp="1"/>
-          </p:cNvSpPr>
-          <p:nvPr>
-            <p:ph idx="1"/>
-          </p:nvPr>
-        </p:nvSpPr>
-        <p:spPr/>
-        <p:txBody>
-          <a:bodyPr/>
-          <a:lstStyle/>
-          <a:p>
-            <a:r>
-              <a:rPr lang="en-NZ" dirty="0"/>
-              <a:t>Full CRUD operations for all the pages </a:t>
-            </a:r>
-          </a:p>
-          <a:p>
-            <a:r>
-              <a:rPr lang="en-NZ" dirty="0"/>
-              <a:t>Search Books, Authors, Admins.</a:t>
-            </a:r>
-          </a:p>
-          <a:p>
-            <a:r>
-              <a:rPr lang="en-NZ" dirty="0"/>
-              <a:t>Sorting by Name or Title (AZ to ZA). </a:t>
-            </a:r>
-          </a:p>
-          <a:p>
-            <a:endParaRPr lang="en-NZ" dirty="0"/>
-          </a:p>
-          <a:p>
-            <a:endParaRPr lang="en-NZ" dirty="0"/>
-          </a:p>
-          <a:p>
-            <a:endParaRPr lang="en-NZ" dirty="0"/>
-          </a:p>
-        </p:txBody>
-      </p:sp>
-    </p:spTree>
-    <p:extLst>
-      <p:ext uri="{BB962C8B-B14F-4D97-AF65-F5344CB8AC3E}">
-        <p14:creationId xmlns:p14="http://schemas.microsoft.com/office/powerpoint/2010/main" val="1493032887"/>
-      </p:ext>
-    </p:extLst>
-  </p:cSld>
-  <p:clrMapOvr>
-    <a:masterClrMapping/>
-  </p:clrMapOvr>
-</p:sld>
-</file>
-
-<file path=ppt/slides/slide4.xml><?xml version="1.0" encoding="utf-8"?>
-<p:sld xmlns:a="http://schemas.openxmlformats.org/drawingml/2006/main" xmlns:r="http://schemas.openxmlformats.org/officeDocument/2006/relationships" xmlns:p="http://schemas.openxmlformats.org/presentationml/2006/main">
-  <p:cSld>
-    <p:spTree>
-      <p:nvGrpSpPr>
-        <p:cNvPr id="1" name=""/>
-        <p:cNvGrpSpPr/>
-        <p:nvPr/>
-      </p:nvGrpSpPr>
-      <p:grpSpPr>
-        <a:xfrm>
-          <a:off x="0" y="0"/>
-          <a:ext cx="0" cy="0"/>
-          <a:chOff x="0" y="0"/>
-          <a:chExt cx="0" cy="0"/>
-        </a:xfrm>
-      </p:grpSpPr>
-      <p:sp>
-        <p:nvSpPr>
-          <p:cNvPr id="2" name="Title 1">
-            <a:extLst>
-              <a:ext uri="{FF2B5EF4-FFF2-40B4-BE49-F238E27FC236}">
-                <a16:creationId xmlns:a16="http://schemas.microsoft.com/office/drawing/2014/main" id="{F698CF08-B7B3-E7F1-C3E7-30061EF0B2FE}"/>
-              </a:ext>
-            </a:extLst>
-          </p:cNvPr>
-          <p:cNvSpPr>
-            <a:spLocks noGrp="1"/>
-          </p:cNvSpPr>
-          <p:nvPr>
-            <p:ph type="title"/>
-          </p:nvPr>
-        </p:nvSpPr>
-        <p:spPr/>
-        <p:txBody>
-          <a:bodyPr/>
-          <a:lstStyle/>
-          <a:p>
-            <a:r>
-              <a:rPr lang="en-NZ" dirty="0"/>
-              <a:t>Advance Features </a:t>
-            </a:r>
-          </a:p>
-        </p:txBody>
-      </p:sp>
-      <p:sp>
-        <p:nvSpPr>
-          <p:cNvPr id="3" name="Content Placeholder 2">
-            <a:extLst>
-              <a:ext uri="{FF2B5EF4-FFF2-40B4-BE49-F238E27FC236}">
-                <a16:creationId xmlns:a16="http://schemas.microsoft.com/office/drawing/2014/main" id="{62E09994-70AB-E4D7-37D7-F773DA2CC6E8}"/>
-              </a:ext>
-            </a:extLst>
-          </p:cNvPr>
-          <p:cNvSpPr>
-            <a:spLocks noGrp="1"/>
-          </p:cNvSpPr>
-          <p:nvPr>
-            <p:ph idx="1"/>
-          </p:nvPr>
-        </p:nvSpPr>
-        <p:spPr/>
-        <p:txBody>
-          <a:bodyPr/>
-          <a:lstStyle/>
-          <a:p>
-            <a:r>
-              <a:rPr lang="en-NZ" dirty="0"/>
-              <a:t>Implemented Validations for all the pages.</a:t>
-            </a:r>
-          </a:p>
-          <a:p>
-            <a:r>
-              <a:rPr lang="en-NZ" dirty="0"/>
-              <a:t>Session based authentication for Login/Logout.</a:t>
-            </a:r>
-          </a:p>
-          <a:p>
-            <a:r>
-              <a:rPr lang="en-NZ" dirty="0"/>
-              <a:t>Password Hashing </a:t>
-            </a:r>
-          </a:p>
-          <a:p>
-            <a:r>
-              <a:rPr lang="en-NZ" dirty="0"/>
-              <a:t>Account Activation and Deactivation </a:t>
-            </a:r>
-          </a:p>
-          <a:p>
-            <a:r>
-              <a:rPr lang="en-NZ" dirty="0"/>
-              <a:t>Strong password requirements </a:t>
-            </a:r>
-          </a:p>
-          <a:p>
-            <a:endParaRPr lang="en-NZ" dirty="0"/>
-          </a:p>
-        </p:txBody>
-      </p:sp>
-    </p:spTree>
-    <p:extLst>
-      <p:ext uri="{BB962C8B-B14F-4D97-AF65-F5344CB8AC3E}">
-        <p14:creationId xmlns:p14="http://schemas.microsoft.com/office/powerpoint/2010/main" val="499917506"/>
-      </p:ext>
-    </p:extLst>
-  </p:cSld>
-  <p:clrMapOvr>
-    <a:masterClrMapping/>
-  </p:clrMapOvr>
-</p:sld>
-</file>
-
-<file path=ppt/slides/slide5.xml><?xml version="1.0" encoding="utf-8"?>
-<p:sld xmlns:a="http://schemas.openxmlformats.org/drawingml/2006/main" xmlns:r="http://schemas.openxmlformats.org/officeDocument/2006/relationships" xmlns:p="http://schemas.openxmlformats.org/presentationml/2006/main">
-  <p:cSld>
-    <p:spTree>
-      <p:nvGrpSpPr>
-        <p:cNvPr id="1" name="">
-          <a:extLst>
-            <a:ext uri="{FF2B5EF4-FFF2-40B4-BE49-F238E27FC236}">
-              <a16:creationId xmlns:a16="http://schemas.microsoft.com/office/drawing/2014/main" id="{C451F62D-6CCB-4CFA-1EBB-8138F7E88865}"/>
-            </a:ext>
-          </a:extLst>
-        </p:cNvPr>
-        <p:cNvGrpSpPr/>
-        <p:nvPr/>
-      </p:nvGrpSpPr>
-      <p:grpSpPr>
-        <a:xfrm>
-          <a:off x="0" y="0"/>
-          <a:ext cx="0" cy="0"/>
-          <a:chOff x="0" y="0"/>
-          <a:chExt cx="0" cy="0"/>
-        </a:xfrm>
-      </p:grpSpPr>
-      <p:sp>
-        <p:nvSpPr>
-          <p:cNvPr id="2" name="Title 1">
-            <a:extLst>
-              <a:ext uri="{FF2B5EF4-FFF2-40B4-BE49-F238E27FC236}">
-                <a16:creationId xmlns:a16="http://schemas.microsoft.com/office/drawing/2014/main" id="{4AF405C3-837C-DA69-F591-94AA041DC8A1}"/>
-              </a:ext>
-            </a:extLst>
-          </p:cNvPr>
-          <p:cNvSpPr>
-            <a:spLocks noGrp="1"/>
-          </p:cNvSpPr>
-          <p:nvPr>
-            <p:ph type="title"/>
-          </p:nvPr>
-        </p:nvSpPr>
-        <p:spPr/>
-        <p:txBody>
-          <a:bodyPr/>
-          <a:lstStyle/>
-          <a:p>
-            <a:r>
-              <a:rPr lang="en-NZ" dirty="0"/>
-              <a:t>ER Diagram</a:t>
-            </a:r>
-          </a:p>
-        </p:txBody>
-      </p:sp>
-      <p:sp>
-        <p:nvSpPr>
-          <p:cNvPr id="3" name="Content Placeholder 2">
-            <a:extLst>
-              <a:ext uri="{FF2B5EF4-FFF2-40B4-BE49-F238E27FC236}">
-                <a16:creationId xmlns:a16="http://schemas.microsoft.com/office/drawing/2014/main" id="{ECFC2737-0BFC-AC98-FBD6-AD593D04D8BA}"/>
-              </a:ext>
-            </a:extLst>
-          </p:cNvPr>
-          <p:cNvSpPr>
-            <a:spLocks noGrp="1"/>
-          </p:cNvSpPr>
-          <p:nvPr>
-            <p:ph idx="1"/>
-          </p:nvPr>
-        </p:nvSpPr>
-        <p:spPr/>
-        <p:txBody>
-          <a:bodyPr/>
-          <a:lstStyle/>
-          <a:p>
-            <a:endParaRPr lang="en-NZ"/>
-          </a:p>
-        </p:txBody>
-      </p:sp>
-    </p:spTree>
-    <p:extLst>
-      <p:ext uri="{BB962C8B-B14F-4D97-AF65-F5344CB8AC3E}">
-        <p14:creationId xmlns:p14="http://schemas.microsoft.com/office/powerpoint/2010/main" val="1452555610"/>
-      </p:ext>
-    </p:extLst>
-  </p:cSld>
-  <p:clrMapOvr>
-    <a:masterClrMapping/>
-  </p:clrMapOvr>
-</p:sld>
-</file>
-
-<file path=ppt/slides/slide6.xml><?xml version="1.0" encoding="utf-8"?>
-<p:sld xmlns:a="http://schemas.openxmlformats.org/drawingml/2006/main" xmlns:r="http://schemas.openxmlformats.org/officeDocument/2006/relationships" xmlns:p="http://schemas.openxmlformats.org/presentationml/2006/main">
-  <p:cSld>
-    <p:spTree>
-      <p:nvGrpSpPr>
-        <p:cNvPr id="1" name="">
-          <a:extLst>
-            <a:ext uri="{FF2B5EF4-FFF2-40B4-BE49-F238E27FC236}">
-              <a16:creationId xmlns:a16="http://schemas.microsoft.com/office/drawing/2014/main" id="{B63E35E0-BB61-2E2C-D836-06DF6E7BAC87}"/>
-            </a:ext>
-          </a:extLst>
-        </p:cNvPr>
-        <p:cNvGrpSpPr/>
-        <p:nvPr/>
-      </p:nvGrpSpPr>
-      <p:grpSpPr>
-        <a:xfrm>
-          <a:off x="0" y="0"/>
-          <a:ext cx="0" cy="0"/>
-          <a:chOff x="0" y="0"/>
-          <a:chExt cx="0" cy="0"/>
-        </a:xfrm>
-      </p:grpSpPr>
-      <p:sp>
-        <p:nvSpPr>
-          <p:cNvPr id="2" name="Title 1">
-            <a:extLst>
-              <a:ext uri="{FF2B5EF4-FFF2-40B4-BE49-F238E27FC236}">
-                <a16:creationId xmlns:a16="http://schemas.microsoft.com/office/drawing/2014/main" id="{39CE5BBE-6AB1-6499-AE58-4E94EA136540}"/>
-              </a:ext>
-            </a:extLst>
-          </p:cNvPr>
-          <p:cNvSpPr>
-            <a:spLocks noGrp="1"/>
-          </p:cNvSpPr>
-          <p:nvPr>
-            <p:ph type="title"/>
-          </p:nvPr>
-        </p:nvSpPr>
-        <p:spPr/>
-        <p:txBody>
-          <a:bodyPr/>
-          <a:lstStyle/>
-          <a:p>
-            <a:r>
-              <a:rPr lang="en-NZ" dirty="0"/>
-              <a:t>User Stories/Sprint Review</a:t>
-            </a:r>
-          </a:p>
-        </p:txBody>
-      </p:sp>
-      <p:sp>
-        <p:nvSpPr>
-          <p:cNvPr id="3" name="Content Placeholder 2">
-            <a:extLst>
-              <a:ext uri="{FF2B5EF4-FFF2-40B4-BE49-F238E27FC236}">
-                <a16:creationId xmlns:a16="http://schemas.microsoft.com/office/drawing/2014/main" id="{BE2DAF8F-69A0-CC24-8BEA-64C92A487B4E}"/>
-              </a:ext>
-            </a:extLst>
-          </p:cNvPr>
-          <p:cNvSpPr>
-            <a:spLocks noGrp="1"/>
-          </p:cNvSpPr>
-          <p:nvPr>
-            <p:ph idx="1"/>
-          </p:nvPr>
-        </p:nvSpPr>
-        <p:spPr/>
-        <p:txBody>
-          <a:bodyPr/>
-          <a:lstStyle/>
-          <a:p>
-            <a:endParaRPr lang="en-NZ" dirty="0"/>
-          </a:p>
-        </p:txBody>
-      </p:sp>
-    </p:spTree>
-    <p:extLst>
-      <p:ext uri="{BB962C8B-B14F-4D97-AF65-F5344CB8AC3E}">
-        <p14:creationId xmlns:p14="http://schemas.microsoft.com/office/powerpoint/2010/main" val="121744597"/>
-      </p:ext>
-    </p:extLst>
-  </p:cSld>
-  <p:clrMapOvr>
-    <a:masterClrMapping/>
-  </p:clrMapOvr>
-</p:sld>
-</file>
-
-<file path=ppt/slides/slide7.xml><?xml version="1.0" encoding="utf-8"?>
+<file path=ppt/slides/slide12.xml><?xml version="1.0" encoding="utf-8"?>
 <p:sld xmlns:a="http://schemas.openxmlformats.org/drawingml/2006/main" xmlns:r="http://schemas.openxmlformats.org/officeDocument/2006/relationships" xmlns:p="http://schemas.openxmlformats.org/presentationml/2006/main">
   <p:cSld>
     <p:spTree>
@@ -4579,7 +4398,12 @@
             <p:ph idx="1"/>
           </p:nvPr>
         </p:nvSpPr>
-        <p:spPr/>
+        <p:spPr>
+          <a:xfrm>
+            <a:off x="838200" y="1436325"/>
+            <a:ext cx="10515600" cy="5056549"/>
+          </a:xfrm>
+        </p:spPr>
         <p:txBody>
           <a:bodyPr/>
           <a:lstStyle/>
@@ -4588,6 +4412,36 @@
           </a:p>
         </p:txBody>
       </p:sp>
+      <p:pic>
+        <p:nvPicPr>
+          <p:cNvPr id="7" name="Picture 6">
+            <a:extLst>
+              <a:ext uri="{FF2B5EF4-FFF2-40B4-BE49-F238E27FC236}">
+                <a16:creationId xmlns:a16="http://schemas.microsoft.com/office/drawing/2014/main" id="{9B68A36A-6F78-E2E4-B901-C40D428AC381}"/>
+              </a:ext>
+            </a:extLst>
+          </p:cNvPr>
+          <p:cNvPicPr>
+            <a:picLocks noChangeAspect="1"/>
+          </p:cNvPicPr>
+          <p:nvPr/>
+        </p:nvPicPr>
+        <p:blipFill>
+          <a:blip r:embed="rId2"/>
+          <a:stretch>
+            <a:fillRect/>
+          </a:stretch>
+        </p:blipFill>
+        <p:spPr>
+          <a:xfrm>
+            <a:off x="838200" y="1436325"/>
+            <a:ext cx="10519765" cy="4629497"/>
+          </a:xfrm>
+          <a:prstGeom prst="rect">
+            <a:avLst/>
+          </a:prstGeom>
+        </p:spPr>
+      </p:pic>
     </p:spTree>
     <p:extLst>
       <p:ext uri="{BB962C8B-B14F-4D97-AF65-F5344CB8AC3E}">
@@ -4601,7 +4455,7 @@
 </p:sld>
 </file>
 
-<file path=ppt/slides/slide8.xml><?xml version="1.0" encoding="utf-8"?>
+<file path=ppt/slides/slide13.xml><?xml version="1.0" encoding="utf-8"?>
 <p:sld xmlns:a="http://schemas.openxmlformats.org/drawingml/2006/main" xmlns:r="http://schemas.openxmlformats.org/officeDocument/2006/relationships" xmlns:p="http://schemas.openxmlformats.org/presentationml/2006/main">
   <p:cSld>
     <p:spTree>
@@ -4648,10 +4502,10 @@
       </p:sp>
       <p:sp>
         <p:nvSpPr>
-          <p:cNvPr id="3" name="Content Placeholder 2">
-            <a:extLst>
-              <a:ext uri="{FF2B5EF4-FFF2-40B4-BE49-F238E27FC236}">
-                <a16:creationId xmlns:a16="http://schemas.microsoft.com/office/drawing/2014/main" id="{F5A3E1BD-C8B9-8816-4BFA-740580581E17}"/>
+          <p:cNvPr id="13" name="Content Placeholder 12">
+            <a:extLst>
+              <a:ext uri="{FF2B5EF4-FFF2-40B4-BE49-F238E27FC236}">
+                <a16:creationId xmlns:a16="http://schemas.microsoft.com/office/drawing/2014/main" id="{90A2E484-A693-5C71-C395-468AC313B45D}"/>
               </a:ext>
             </a:extLst>
           </p:cNvPr>
@@ -4667,10 +4521,40 @@
           <a:bodyPr/>
           <a:lstStyle/>
           <a:p>
-            <a:endParaRPr lang="en-NZ" dirty="0"/>
-          </a:p>
-        </p:txBody>
-      </p:sp>
+            <a:endParaRPr lang="en-NZ"/>
+          </a:p>
+        </p:txBody>
+      </p:sp>
+      <p:pic>
+        <p:nvPicPr>
+          <p:cNvPr id="15" name="Picture 14">
+            <a:extLst>
+              <a:ext uri="{FF2B5EF4-FFF2-40B4-BE49-F238E27FC236}">
+                <a16:creationId xmlns:a16="http://schemas.microsoft.com/office/drawing/2014/main" id="{889D4B59-84C4-EFC7-67E5-B9DA94518DEA}"/>
+              </a:ext>
+            </a:extLst>
+          </p:cNvPr>
+          <p:cNvPicPr>
+            <a:picLocks noChangeAspect="1"/>
+          </p:cNvPicPr>
+          <p:nvPr/>
+        </p:nvPicPr>
+        <p:blipFill>
+          <a:blip r:embed="rId2"/>
+          <a:stretch>
+            <a:fillRect/>
+          </a:stretch>
+        </p:blipFill>
+        <p:spPr>
+          <a:xfrm>
+            <a:off x="298383" y="1471744"/>
+            <a:ext cx="11377061" cy="4574814"/>
+          </a:xfrm>
+          <a:prstGeom prst="rect">
+            <a:avLst/>
+          </a:prstGeom>
+        </p:spPr>
+      </p:pic>
     </p:spTree>
     <p:extLst>
       <p:ext uri="{BB962C8B-B14F-4D97-AF65-F5344CB8AC3E}">
@@ -4684,7 +4568,7 @@
 </p:sld>
 </file>
 
-<file path=ppt/slides/slide9.xml><?xml version="1.0" encoding="utf-8"?>
+<file path=ppt/slides/slide14.xml><?xml version="1.0" encoding="utf-8"?>
 <p:sld xmlns:a="http://schemas.openxmlformats.org/drawingml/2006/main" xmlns:r="http://schemas.openxmlformats.org/officeDocument/2006/relationships" xmlns:p="http://schemas.openxmlformats.org/presentationml/2006/main">
   <p:cSld>
     <p:spTree>
@@ -5098,6 +4982,1798 @@
 </p:sld>
 </file>
 
+<file path=ppt/slides/slide15.xml><?xml version="1.0" encoding="utf-8"?>
+<p:sld xmlns:a="http://schemas.openxmlformats.org/drawingml/2006/main" xmlns:r="http://schemas.openxmlformats.org/officeDocument/2006/relationships" xmlns:p="http://schemas.openxmlformats.org/presentationml/2006/main">
+  <p:cSld>
+    <p:spTree>
+      <p:nvGrpSpPr>
+        <p:cNvPr id="1" name="">
+          <a:extLst>
+            <a:ext uri="{FF2B5EF4-FFF2-40B4-BE49-F238E27FC236}">
+              <a16:creationId xmlns:a16="http://schemas.microsoft.com/office/drawing/2014/main" id="{D42E9B6F-69F2-D404-C88B-3A1708D97E13}"/>
+            </a:ext>
+          </a:extLst>
+        </p:cNvPr>
+        <p:cNvGrpSpPr/>
+        <p:nvPr/>
+      </p:nvGrpSpPr>
+      <p:grpSpPr>
+        <a:xfrm>
+          <a:off x="0" y="0"/>
+          <a:ext cx="0" cy="0"/>
+          <a:chOff x="0" y="0"/>
+          <a:chExt cx="0" cy="0"/>
+        </a:xfrm>
+      </p:grpSpPr>
+      <p:sp>
+        <p:nvSpPr>
+          <p:cNvPr id="2" name="Title 1">
+            <a:extLst>
+              <a:ext uri="{FF2B5EF4-FFF2-40B4-BE49-F238E27FC236}">
+                <a16:creationId xmlns:a16="http://schemas.microsoft.com/office/drawing/2014/main" id="{011A136F-5311-7E41-587D-793B5A825835}"/>
+              </a:ext>
+            </a:extLst>
+          </p:cNvPr>
+          <p:cNvSpPr>
+            <a:spLocks noGrp="1"/>
+          </p:cNvSpPr>
+          <p:nvPr>
+            <p:ph type="title"/>
+          </p:nvPr>
+        </p:nvSpPr>
+        <p:spPr/>
+        <p:txBody>
+          <a:bodyPr/>
+          <a:lstStyle/>
+          <a:p>
+            <a:r>
+              <a:rPr lang="en-NZ" dirty="0"/>
+              <a:t>Selenium</a:t>
+            </a:r>
+          </a:p>
+        </p:txBody>
+      </p:sp>
+      <p:pic>
+        <p:nvPicPr>
+          <p:cNvPr id="6" name="Content Placeholder 5">
+            <a:extLst>
+              <a:ext uri="{FF2B5EF4-FFF2-40B4-BE49-F238E27FC236}">
+                <a16:creationId xmlns:a16="http://schemas.microsoft.com/office/drawing/2014/main" id="{B71DEAC7-890C-0D53-7DD3-FDCA0104B75A}"/>
+              </a:ext>
+            </a:extLst>
+          </p:cNvPr>
+          <p:cNvPicPr>
+            <a:picLocks noGrp="1" noChangeAspect="1"/>
+          </p:cNvPicPr>
+          <p:nvPr>
+            <p:ph idx="1"/>
+          </p:nvPr>
+        </p:nvPicPr>
+        <p:blipFill>
+          <a:blip r:embed="rId2"/>
+          <a:stretch>
+            <a:fillRect/>
+          </a:stretch>
+        </p:blipFill>
+        <p:spPr>
+          <a:xfrm>
+            <a:off x="5736656" y="4338025"/>
+            <a:ext cx="6208551" cy="2222632"/>
+          </a:xfrm>
+          <a:prstGeom prst="rect">
+            <a:avLst/>
+          </a:prstGeom>
+        </p:spPr>
+      </p:pic>
+      <p:pic>
+        <p:nvPicPr>
+          <p:cNvPr id="8" name="Picture 7">
+            <a:extLst>
+              <a:ext uri="{FF2B5EF4-FFF2-40B4-BE49-F238E27FC236}">
+                <a16:creationId xmlns:a16="http://schemas.microsoft.com/office/drawing/2014/main" id="{48ABCB00-3AD2-BFC4-B6A2-C38FCB6B977A}"/>
+              </a:ext>
+            </a:extLst>
+          </p:cNvPr>
+          <p:cNvPicPr>
+            <a:picLocks noChangeAspect="1"/>
+          </p:cNvPicPr>
+          <p:nvPr/>
+        </p:nvPicPr>
+        <p:blipFill>
+          <a:blip r:embed="rId3"/>
+          <a:stretch>
+            <a:fillRect/>
+          </a:stretch>
+        </p:blipFill>
+        <p:spPr>
+          <a:xfrm>
+            <a:off x="562193" y="1471028"/>
+            <a:ext cx="4772691" cy="4782217"/>
+          </a:xfrm>
+          <a:prstGeom prst="rect">
+            <a:avLst/>
+          </a:prstGeom>
+        </p:spPr>
+      </p:pic>
+      <p:pic>
+        <p:nvPicPr>
+          <p:cNvPr id="10" name="Picture 9">
+            <a:extLst>
+              <a:ext uri="{FF2B5EF4-FFF2-40B4-BE49-F238E27FC236}">
+                <a16:creationId xmlns:a16="http://schemas.microsoft.com/office/drawing/2014/main" id="{54C4A90F-496E-06EC-3860-89DC3CE1695C}"/>
+              </a:ext>
+            </a:extLst>
+          </p:cNvPr>
+          <p:cNvPicPr>
+            <a:picLocks noChangeAspect="1"/>
+          </p:cNvPicPr>
+          <p:nvPr/>
+        </p:nvPicPr>
+        <p:blipFill>
+          <a:blip r:embed="rId4"/>
+          <a:stretch>
+            <a:fillRect/>
+          </a:stretch>
+        </p:blipFill>
+        <p:spPr>
+          <a:xfrm>
+            <a:off x="5736656" y="154869"/>
+            <a:ext cx="5757026" cy="3972900"/>
+          </a:xfrm>
+          <a:prstGeom prst="rect">
+            <a:avLst/>
+          </a:prstGeom>
+        </p:spPr>
+      </p:pic>
+    </p:spTree>
+    <p:extLst>
+      <p:ext uri="{BB962C8B-B14F-4D97-AF65-F5344CB8AC3E}">
+        <p14:creationId xmlns:p14="http://schemas.microsoft.com/office/powerpoint/2010/main" val="4113579959"/>
+      </p:ext>
+    </p:extLst>
+  </p:cSld>
+  <p:clrMapOvr>
+    <a:masterClrMapping/>
+  </p:clrMapOvr>
+</p:sld>
+</file>
+
+<file path=ppt/slides/slide16.xml><?xml version="1.0" encoding="utf-8"?>
+<p:sld xmlns:a="http://schemas.openxmlformats.org/drawingml/2006/main" xmlns:r="http://schemas.openxmlformats.org/officeDocument/2006/relationships" xmlns:p="http://schemas.openxmlformats.org/presentationml/2006/main">
+  <p:cSld>
+    <p:spTree>
+      <p:nvGrpSpPr>
+        <p:cNvPr id="1" name="">
+          <a:extLst>
+            <a:ext uri="{FF2B5EF4-FFF2-40B4-BE49-F238E27FC236}">
+              <a16:creationId xmlns:a16="http://schemas.microsoft.com/office/drawing/2014/main" id="{4420F141-39C8-F5C0-0C26-7B051A8E6694}"/>
+            </a:ext>
+          </a:extLst>
+        </p:cNvPr>
+        <p:cNvGrpSpPr/>
+        <p:nvPr/>
+      </p:nvGrpSpPr>
+      <p:grpSpPr>
+        <a:xfrm>
+          <a:off x="0" y="0"/>
+          <a:ext cx="0" cy="0"/>
+          <a:chOff x="0" y="0"/>
+          <a:chExt cx="0" cy="0"/>
+        </a:xfrm>
+      </p:grpSpPr>
+      <p:sp>
+        <p:nvSpPr>
+          <p:cNvPr id="2" name="Title 1">
+            <a:extLst>
+              <a:ext uri="{FF2B5EF4-FFF2-40B4-BE49-F238E27FC236}">
+                <a16:creationId xmlns:a16="http://schemas.microsoft.com/office/drawing/2014/main" id="{24155ACB-0F50-1570-C225-6A1F5B1483CC}"/>
+              </a:ext>
+            </a:extLst>
+          </p:cNvPr>
+          <p:cNvSpPr>
+            <a:spLocks noGrp="1"/>
+          </p:cNvSpPr>
+          <p:nvPr>
+            <p:ph type="title"/>
+          </p:nvPr>
+        </p:nvSpPr>
+        <p:spPr/>
+        <p:txBody>
+          <a:bodyPr/>
+          <a:lstStyle/>
+          <a:p>
+            <a:r>
+              <a:rPr lang="en-NZ" dirty="0"/>
+              <a:t>JMeter</a:t>
+            </a:r>
+          </a:p>
+        </p:txBody>
+      </p:sp>
+      <p:sp>
+        <p:nvSpPr>
+          <p:cNvPr id="3" name="Content Placeholder 2">
+            <a:extLst>
+              <a:ext uri="{FF2B5EF4-FFF2-40B4-BE49-F238E27FC236}">
+                <a16:creationId xmlns:a16="http://schemas.microsoft.com/office/drawing/2014/main" id="{87E6B5A8-FD74-EEC8-7E6B-B5A9D35A52FF}"/>
+              </a:ext>
+            </a:extLst>
+          </p:cNvPr>
+          <p:cNvSpPr>
+            <a:spLocks noGrp="1"/>
+          </p:cNvSpPr>
+          <p:nvPr>
+            <p:ph idx="1"/>
+          </p:nvPr>
+        </p:nvSpPr>
+        <p:spPr/>
+        <p:txBody>
+          <a:bodyPr/>
+          <a:lstStyle/>
+          <a:p>
+            <a:endParaRPr lang="en-NZ"/>
+          </a:p>
+        </p:txBody>
+      </p:sp>
+      <p:pic>
+        <p:nvPicPr>
+          <p:cNvPr id="4" name="Picture 3">
+            <a:extLst>
+              <a:ext uri="{FF2B5EF4-FFF2-40B4-BE49-F238E27FC236}">
+                <a16:creationId xmlns:a16="http://schemas.microsoft.com/office/drawing/2014/main" id="{42789183-C088-58E6-2F05-0262B299D6B8}"/>
+              </a:ext>
+            </a:extLst>
+          </p:cNvPr>
+          <p:cNvPicPr>
+            <a:picLocks noChangeAspect="1"/>
+          </p:cNvPicPr>
+          <p:nvPr/>
+        </p:nvPicPr>
+        <p:blipFill>
+          <a:blip r:embed="rId2"/>
+          <a:stretch>
+            <a:fillRect/>
+          </a:stretch>
+        </p:blipFill>
+        <p:spPr>
+          <a:xfrm>
+            <a:off x="838200" y="1814895"/>
+            <a:ext cx="10488020" cy="4362068"/>
+          </a:xfrm>
+          <a:prstGeom prst="rect">
+            <a:avLst/>
+          </a:prstGeom>
+        </p:spPr>
+      </p:pic>
+    </p:spTree>
+    <p:extLst>
+      <p:ext uri="{BB962C8B-B14F-4D97-AF65-F5344CB8AC3E}">
+        <p14:creationId xmlns:p14="http://schemas.microsoft.com/office/powerpoint/2010/main" val="1155972948"/>
+      </p:ext>
+    </p:extLst>
+  </p:cSld>
+  <p:clrMapOvr>
+    <a:masterClrMapping/>
+  </p:clrMapOvr>
+</p:sld>
+</file>
+
+<file path=ppt/slides/slide17.xml><?xml version="1.0" encoding="utf-8"?>
+<p:sld xmlns:a="http://schemas.openxmlformats.org/drawingml/2006/main" xmlns:r="http://schemas.openxmlformats.org/officeDocument/2006/relationships" xmlns:p="http://schemas.openxmlformats.org/presentationml/2006/main">
+  <p:cSld>
+    <p:spTree>
+      <p:nvGrpSpPr>
+        <p:cNvPr id="1" name="">
+          <a:extLst>
+            <a:ext uri="{FF2B5EF4-FFF2-40B4-BE49-F238E27FC236}">
+              <a16:creationId xmlns:a16="http://schemas.microsoft.com/office/drawing/2014/main" id="{75DAB85E-1E6E-E131-1D07-4DBCB0D75D42}"/>
+            </a:ext>
+          </a:extLst>
+        </p:cNvPr>
+        <p:cNvGrpSpPr/>
+        <p:nvPr/>
+      </p:nvGrpSpPr>
+      <p:grpSpPr>
+        <a:xfrm>
+          <a:off x="0" y="0"/>
+          <a:ext cx="0" cy="0"/>
+          <a:chOff x="0" y="0"/>
+          <a:chExt cx="0" cy="0"/>
+        </a:xfrm>
+      </p:grpSpPr>
+      <p:sp>
+        <p:nvSpPr>
+          <p:cNvPr id="2" name="Title 1">
+            <a:extLst>
+              <a:ext uri="{FF2B5EF4-FFF2-40B4-BE49-F238E27FC236}">
+                <a16:creationId xmlns:a16="http://schemas.microsoft.com/office/drawing/2014/main" id="{D56CE0E8-3DC2-97F1-47B8-C12A4F201660}"/>
+              </a:ext>
+            </a:extLst>
+          </p:cNvPr>
+          <p:cNvSpPr>
+            <a:spLocks noGrp="1"/>
+          </p:cNvSpPr>
+          <p:nvPr>
+            <p:ph type="title"/>
+          </p:nvPr>
+        </p:nvSpPr>
+        <p:spPr/>
+        <p:txBody>
+          <a:bodyPr/>
+          <a:lstStyle/>
+          <a:p>
+            <a:r>
+              <a:rPr lang="en-NZ" dirty="0"/>
+              <a:t>Vulnerabilities + How we fixed</a:t>
+            </a:r>
+          </a:p>
+        </p:txBody>
+      </p:sp>
+      <p:sp>
+        <p:nvSpPr>
+          <p:cNvPr id="3" name="Content Placeholder 2">
+            <a:extLst>
+              <a:ext uri="{FF2B5EF4-FFF2-40B4-BE49-F238E27FC236}">
+                <a16:creationId xmlns:a16="http://schemas.microsoft.com/office/drawing/2014/main" id="{E24248B4-502C-A4ED-AF3F-AD9EE62AFB43}"/>
+              </a:ext>
+            </a:extLst>
+          </p:cNvPr>
+          <p:cNvSpPr>
+            <a:spLocks noGrp="1"/>
+          </p:cNvSpPr>
+          <p:nvPr>
+            <p:ph idx="1"/>
+          </p:nvPr>
+        </p:nvSpPr>
+        <p:spPr>
+          <a:xfrm>
+            <a:off x="344033" y="1834679"/>
+            <a:ext cx="10882264" cy="4351338"/>
+          </a:xfrm>
+        </p:spPr>
+        <p:txBody>
+          <a:bodyPr/>
+          <a:lstStyle/>
+          <a:p>
+            <a:pPr marL="0" indent="0">
+              <a:buNone/>
+            </a:pPr>
+            <a:r>
+              <a:rPr lang="en-NZ" dirty="0"/>
+              <a:t>A07:2021 Identification and Authentication Failures.</a:t>
+            </a:r>
+          </a:p>
+          <a:p>
+            <a:pPr marL="0" indent="0">
+              <a:buNone/>
+            </a:pPr>
+            <a:r>
+              <a:rPr lang="en-NZ" sz="2000" dirty="0"/>
+              <a:t>Fixed by hashing the passwords and having sessions be limited to 30 minutes before logging out.</a:t>
+            </a:r>
+          </a:p>
+          <a:p>
+            <a:pPr marL="0" indent="0">
+              <a:buNone/>
+            </a:pPr>
+            <a:endParaRPr lang="en-NZ" dirty="0"/>
+          </a:p>
+          <a:p>
+            <a:pPr marL="0" indent="0">
+              <a:buNone/>
+            </a:pPr>
+            <a:r>
+              <a:rPr lang="en-NZ" dirty="0"/>
+              <a:t>AO3:2021: Injection</a:t>
+            </a:r>
+          </a:p>
+          <a:p>
+            <a:pPr marL="0" indent="0">
+              <a:buNone/>
+            </a:pPr>
+            <a:r>
+              <a:rPr lang="en-NZ" sz="2000" dirty="0"/>
+              <a:t>Fixed by including input validation and automatic HTML encoding.</a:t>
+            </a:r>
+          </a:p>
+          <a:p>
+            <a:pPr marL="0" indent="0">
+              <a:buNone/>
+            </a:pPr>
+            <a:endParaRPr lang="en-NZ" sz="2000" dirty="0"/>
+          </a:p>
+          <a:p>
+            <a:pPr marL="0" indent="0">
+              <a:buNone/>
+            </a:pPr>
+            <a:r>
+              <a:rPr lang="en-NZ" dirty="0"/>
+              <a:t>A01:2021: Broken Access Control</a:t>
+            </a:r>
+          </a:p>
+          <a:p>
+            <a:pPr marL="0" indent="0">
+              <a:buNone/>
+            </a:pPr>
+            <a:r>
+              <a:rPr lang="en-NZ" sz="2000" dirty="0"/>
+              <a:t>Fixed by forcibly redirecting unauthenticated in users to the login page.</a:t>
+            </a:r>
+          </a:p>
+          <a:p>
+            <a:pPr marL="0" indent="0">
+              <a:buNone/>
+            </a:pPr>
+            <a:endParaRPr lang="en-NZ" sz="2000" dirty="0"/>
+          </a:p>
+          <a:p>
+            <a:pPr marL="0" indent="0">
+              <a:buNone/>
+            </a:pPr>
+            <a:endParaRPr lang="en-NZ" dirty="0"/>
+          </a:p>
+        </p:txBody>
+      </p:sp>
+      <p:pic>
+        <p:nvPicPr>
+          <p:cNvPr id="6" name="Picture 5">
+            <a:extLst>
+              <a:ext uri="{FF2B5EF4-FFF2-40B4-BE49-F238E27FC236}">
+                <a16:creationId xmlns:a16="http://schemas.microsoft.com/office/drawing/2014/main" id="{257AABD9-38E5-6F91-2E7E-DD7FC00895E3}"/>
+              </a:ext>
+            </a:extLst>
+          </p:cNvPr>
+          <p:cNvPicPr>
+            <a:picLocks noChangeAspect="1"/>
+          </p:cNvPicPr>
+          <p:nvPr/>
+        </p:nvPicPr>
+        <p:blipFill>
+          <a:blip r:embed="rId2"/>
+          <a:stretch>
+            <a:fillRect/>
+          </a:stretch>
+        </p:blipFill>
+        <p:spPr>
+          <a:xfrm>
+            <a:off x="8274187" y="2705476"/>
+            <a:ext cx="3722766" cy="3016314"/>
+          </a:xfrm>
+          <a:prstGeom prst="rect">
+            <a:avLst/>
+          </a:prstGeom>
+        </p:spPr>
+      </p:pic>
+    </p:spTree>
+    <p:extLst>
+      <p:ext uri="{BB962C8B-B14F-4D97-AF65-F5344CB8AC3E}">
+        <p14:creationId xmlns:p14="http://schemas.microsoft.com/office/powerpoint/2010/main" val="2630173749"/>
+      </p:ext>
+    </p:extLst>
+  </p:cSld>
+  <p:clrMapOvr>
+    <a:masterClrMapping/>
+  </p:clrMapOvr>
+</p:sld>
+</file>
+
+<file path=ppt/slides/slide18.xml><?xml version="1.0" encoding="utf-8"?>
+<p:sld xmlns:a="http://schemas.openxmlformats.org/drawingml/2006/main" xmlns:r="http://schemas.openxmlformats.org/officeDocument/2006/relationships" xmlns:p="http://schemas.openxmlformats.org/presentationml/2006/main">
+  <p:cSld>
+    <p:spTree>
+      <p:nvGrpSpPr>
+        <p:cNvPr id="1" name="">
+          <a:extLst>
+            <a:ext uri="{FF2B5EF4-FFF2-40B4-BE49-F238E27FC236}">
+              <a16:creationId xmlns:a16="http://schemas.microsoft.com/office/drawing/2014/main" id="{213EBB82-56C2-52F5-5279-AE25F78AC577}"/>
+            </a:ext>
+          </a:extLst>
+        </p:cNvPr>
+        <p:cNvGrpSpPr/>
+        <p:nvPr/>
+      </p:nvGrpSpPr>
+      <p:grpSpPr>
+        <a:xfrm>
+          <a:off x="0" y="0"/>
+          <a:ext cx="0" cy="0"/>
+          <a:chOff x="0" y="0"/>
+          <a:chExt cx="0" cy="0"/>
+        </a:xfrm>
+      </p:grpSpPr>
+      <p:sp>
+        <p:nvSpPr>
+          <p:cNvPr id="2" name="Title 1">
+            <a:extLst>
+              <a:ext uri="{FF2B5EF4-FFF2-40B4-BE49-F238E27FC236}">
+                <a16:creationId xmlns:a16="http://schemas.microsoft.com/office/drawing/2014/main" id="{1C3DABB8-F401-78A1-F3DE-B217C8CCFB95}"/>
+              </a:ext>
+            </a:extLst>
+          </p:cNvPr>
+          <p:cNvSpPr>
+            <a:spLocks noGrp="1"/>
+          </p:cNvSpPr>
+          <p:nvPr>
+            <p:ph type="title"/>
+          </p:nvPr>
+        </p:nvSpPr>
+        <p:spPr/>
+        <p:txBody>
+          <a:bodyPr/>
+          <a:lstStyle/>
+          <a:p>
+            <a:r>
+              <a:rPr lang="en-NZ" dirty="0"/>
+              <a:t>Issues/Challenges faced</a:t>
+            </a:r>
+          </a:p>
+        </p:txBody>
+      </p:sp>
+      <p:sp>
+        <p:nvSpPr>
+          <p:cNvPr id="3" name="Content Placeholder 2">
+            <a:extLst>
+              <a:ext uri="{FF2B5EF4-FFF2-40B4-BE49-F238E27FC236}">
+                <a16:creationId xmlns:a16="http://schemas.microsoft.com/office/drawing/2014/main" id="{D95EFAFD-755F-5651-96A3-898AC8B90080}"/>
+              </a:ext>
+            </a:extLst>
+          </p:cNvPr>
+          <p:cNvSpPr>
+            <a:spLocks noGrp="1"/>
+          </p:cNvSpPr>
+          <p:nvPr>
+            <p:ph idx="1"/>
+          </p:nvPr>
+        </p:nvSpPr>
+        <p:spPr/>
+        <p:txBody>
+          <a:bodyPr/>
+          <a:lstStyle/>
+          <a:p>
+            <a:r>
+              <a:rPr lang="en-NZ" dirty="0"/>
+              <a:t>Faced challenges while completing Unit and Automation testing.</a:t>
+            </a:r>
+          </a:p>
+          <a:p>
+            <a:r>
+              <a:rPr lang="en-NZ" dirty="0"/>
+              <a:t>Challenges faced with Git while uploading files and merging them with our repository. Happened numerous times.</a:t>
+            </a:r>
+          </a:p>
+          <a:p>
+            <a:r>
+              <a:rPr lang="en-NZ" dirty="0"/>
+              <a:t>Had an issue where the app was trying to use the </a:t>
+            </a:r>
+            <a:r>
+              <a:rPr lang="en-NZ" dirty="0" err="1"/>
+              <a:t>filepath</a:t>
+            </a:r>
+            <a:r>
+              <a:rPr lang="en-NZ" dirty="0"/>
+              <a:t> of the last person who edited, instead of the current user.</a:t>
+            </a:r>
+          </a:p>
+          <a:p>
+            <a:pPr marL="0" indent="0">
+              <a:buNone/>
+            </a:pPr>
+            <a:endParaRPr lang="en-NZ" dirty="0"/>
+          </a:p>
+        </p:txBody>
+      </p:sp>
+      <p:sp>
+        <p:nvSpPr>
+          <p:cNvPr id="4" name="AutoShape 2">
+            <a:extLst>
+              <a:ext uri="{FF2B5EF4-FFF2-40B4-BE49-F238E27FC236}">
+                <a16:creationId xmlns:a16="http://schemas.microsoft.com/office/drawing/2014/main" id="{A0B49F76-5795-3F1E-855E-94291D56D47C}"/>
+              </a:ext>
+            </a:extLst>
+          </p:cNvPr>
+          <p:cNvSpPr>
+            <a:spLocks noChangeAspect="1" noChangeArrowheads="1"/>
+          </p:cNvSpPr>
+          <p:nvPr/>
+        </p:nvSpPr>
+        <p:spPr bwMode="auto">
+          <a:xfrm>
+            <a:off x="5943600" y="3276600"/>
+            <a:ext cx="304800" cy="304800"/>
+          </a:xfrm>
+          <a:prstGeom prst="rect">
+            <a:avLst/>
+          </a:prstGeom>
+          <a:noFill/>
+          <a:extLst>
+            <a:ext uri="{909E8E84-426E-40DD-AFC4-6F175D3DCCD1}">
+              <a14:hiddenFill xmlns:a14="http://schemas.microsoft.com/office/drawing/2010/main">
+                <a:solidFill>
+                  <a:srgbClr val="FFFFFF"/>
+                </a:solidFill>
+              </a14:hiddenFill>
+            </a:ext>
+          </a:extLst>
+        </p:spPr>
+        <p:txBody>
+          <a:bodyPr vert="horz" wrap="square" lIns="91440" tIns="45720" rIns="91440" bIns="45720" numCol="1" anchor="t" anchorCtr="0" compatLnSpc="1">
+            <a:prstTxWarp prst="textNoShape">
+              <a:avLst/>
+            </a:prstTxWarp>
+          </a:bodyPr>
+          <a:lstStyle/>
+          <a:p>
+            <a:endParaRPr lang="en-NZ"/>
+          </a:p>
+        </p:txBody>
+      </p:sp>
+      <p:pic>
+        <p:nvPicPr>
+          <p:cNvPr id="6" name="Picture 5">
+            <a:extLst>
+              <a:ext uri="{FF2B5EF4-FFF2-40B4-BE49-F238E27FC236}">
+                <a16:creationId xmlns:a16="http://schemas.microsoft.com/office/drawing/2014/main" id="{1E853417-F139-76B4-E97D-67D3C5A45756}"/>
+              </a:ext>
+            </a:extLst>
+          </p:cNvPr>
+          <p:cNvPicPr>
+            <a:picLocks noChangeAspect="1"/>
+          </p:cNvPicPr>
+          <p:nvPr/>
+        </p:nvPicPr>
+        <p:blipFill>
+          <a:blip r:embed="rId2"/>
+          <a:stretch>
+            <a:fillRect/>
+          </a:stretch>
+        </p:blipFill>
+        <p:spPr>
+          <a:xfrm>
+            <a:off x="328942" y="5587534"/>
+            <a:ext cx="11534115" cy="1046726"/>
+          </a:xfrm>
+          <a:prstGeom prst="rect">
+            <a:avLst/>
+          </a:prstGeom>
+        </p:spPr>
+      </p:pic>
+    </p:spTree>
+    <p:extLst>
+      <p:ext uri="{BB962C8B-B14F-4D97-AF65-F5344CB8AC3E}">
+        <p14:creationId xmlns:p14="http://schemas.microsoft.com/office/powerpoint/2010/main" val="1913538684"/>
+      </p:ext>
+    </p:extLst>
+  </p:cSld>
+  <p:clrMapOvr>
+    <a:masterClrMapping/>
+  </p:clrMapOvr>
+</p:sld>
+</file>
+
+<file path=ppt/slides/slide19.xml><?xml version="1.0" encoding="utf-8"?>
+<p:sld xmlns:a="http://schemas.openxmlformats.org/drawingml/2006/main" xmlns:r="http://schemas.openxmlformats.org/officeDocument/2006/relationships" xmlns:p="http://schemas.openxmlformats.org/presentationml/2006/main">
+  <p:cSld>
+    <p:spTree>
+      <p:nvGrpSpPr>
+        <p:cNvPr id="1" name="">
+          <a:extLst>
+            <a:ext uri="{FF2B5EF4-FFF2-40B4-BE49-F238E27FC236}">
+              <a16:creationId xmlns:a16="http://schemas.microsoft.com/office/drawing/2014/main" id="{F15F462B-1F43-5E7F-38D9-9BBDB1F60DBA}"/>
+            </a:ext>
+          </a:extLst>
+        </p:cNvPr>
+        <p:cNvGrpSpPr/>
+        <p:nvPr/>
+      </p:nvGrpSpPr>
+      <p:grpSpPr>
+        <a:xfrm>
+          <a:off x="0" y="0"/>
+          <a:ext cx="0" cy="0"/>
+          <a:chOff x="0" y="0"/>
+          <a:chExt cx="0" cy="0"/>
+        </a:xfrm>
+      </p:grpSpPr>
+      <p:sp>
+        <p:nvSpPr>
+          <p:cNvPr id="2" name="Title 1">
+            <a:extLst>
+              <a:ext uri="{FF2B5EF4-FFF2-40B4-BE49-F238E27FC236}">
+                <a16:creationId xmlns:a16="http://schemas.microsoft.com/office/drawing/2014/main" id="{EDC84272-C502-5395-AC27-03BF1AB6854D}"/>
+              </a:ext>
+            </a:extLst>
+          </p:cNvPr>
+          <p:cNvSpPr>
+            <a:spLocks noGrp="1"/>
+          </p:cNvSpPr>
+          <p:nvPr>
+            <p:ph type="title"/>
+          </p:nvPr>
+        </p:nvSpPr>
+        <p:spPr/>
+        <p:txBody>
+          <a:bodyPr/>
+          <a:lstStyle/>
+          <a:p>
+            <a:r>
+              <a:rPr lang="en-NZ" dirty="0"/>
+              <a:t>The Good</a:t>
+            </a:r>
+          </a:p>
+        </p:txBody>
+      </p:sp>
+      <p:sp>
+        <p:nvSpPr>
+          <p:cNvPr id="3" name="Content Placeholder 2">
+            <a:extLst>
+              <a:ext uri="{FF2B5EF4-FFF2-40B4-BE49-F238E27FC236}">
+                <a16:creationId xmlns:a16="http://schemas.microsoft.com/office/drawing/2014/main" id="{F95F3A64-A6CD-B226-7855-2C318FC88B5E}"/>
+              </a:ext>
+            </a:extLst>
+          </p:cNvPr>
+          <p:cNvSpPr>
+            <a:spLocks noGrp="1"/>
+          </p:cNvSpPr>
+          <p:nvPr>
+            <p:ph idx="1"/>
+          </p:nvPr>
+        </p:nvSpPr>
+        <p:spPr/>
+        <p:txBody>
+          <a:bodyPr>
+            <a:normAutofit lnSpcReduction="10000"/>
+          </a:bodyPr>
+          <a:lstStyle/>
+          <a:p>
+            <a:pPr marL="0" indent="0">
+              <a:buNone/>
+            </a:pPr>
+            <a:r>
+              <a:rPr lang="en-US" dirty="0"/>
+              <a:t>Everyone worked together well.</a:t>
+            </a:r>
+          </a:p>
+          <a:p>
+            <a:pPr marL="0" indent="0">
+              <a:buNone/>
+            </a:pPr>
+            <a:endParaRPr lang="en-US" dirty="0"/>
+          </a:p>
+          <a:p>
+            <a:pPr marL="0" indent="0">
+              <a:buNone/>
+            </a:pPr>
+            <a:r>
+              <a:rPr lang="en-US" dirty="0"/>
+              <a:t>We made good progress, the app was finished at the end of sprint 2.</a:t>
+            </a:r>
+          </a:p>
+          <a:p>
+            <a:pPr marL="0" indent="0">
+              <a:buNone/>
+            </a:pPr>
+            <a:endParaRPr lang="en-US" dirty="0"/>
+          </a:p>
+          <a:p>
+            <a:pPr marL="0" indent="0">
+              <a:buNone/>
+            </a:pPr>
+            <a:r>
+              <a:rPr lang="en-US" dirty="0"/>
+              <a:t>We each had our own strengths and used them accordingly.</a:t>
+            </a:r>
+          </a:p>
+          <a:p>
+            <a:pPr marL="0" indent="0">
+              <a:buNone/>
+            </a:pPr>
+            <a:endParaRPr lang="en-US" dirty="0"/>
+          </a:p>
+          <a:p>
+            <a:pPr marL="0" indent="0">
+              <a:buNone/>
+            </a:pPr>
+            <a:r>
+              <a:rPr lang="en-US" dirty="0"/>
+              <a:t>We didn’t hate each other by the end of the project (massive win)</a:t>
+            </a:r>
+          </a:p>
+          <a:p>
+            <a:pPr marL="0" indent="0">
+              <a:buNone/>
+            </a:pPr>
+            <a:endParaRPr lang="en-US" dirty="0"/>
+          </a:p>
+          <a:p>
+            <a:pPr marL="0" indent="0">
+              <a:buNone/>
+            </a:pPr>
+            <a:r>
+              <a:rPr lang="en-NZ" dirty="0"/>
+              <a:t>Everyone did their assigned work :)</a:t>
+            </a:r>
+          </a:p>
+        </p:txBody>
+      </p:sp>
+    </p:spTree>
+    <p:extLst>
+      <p:ext uri="{BB962C8B-B14F-4D97-AF65-F5344CB8AC3E}">
+        <p14:creationId xmlns:p14="http://schemas.microsoft.com/office/powerpoint/2010/main" val="3344191263"/>
+      </p:ext>
+    </p:extLst>
+  </p:cSld>
+  <p:clrMapOvr>
+    <a:masterClrMapping/>
+  </p:clrMapOvr>
+</p:sld>
+</file>
+
+<file path=ppt/slides/slide2.xml><?xml version="1.0" encoding="utf-8"?>
+<p:sld xmlns:a="http://schemas.openxmlformats.org/drawingml/2006/main" xmlns:r="http://schemas.openxmlformats.org/officeDocument/2006/relationships" xmlns:p="http://schemas.openxmlformats.org/presentationml/2006/main">
+  <p:cSld>
+    <p:spTree>
+      <p:nvGrpSpPr>
+        <p:cNvPr id="1" name=""/>
+        <p:cNvGrpSpPr/>
+        <p:nvPr/>
+      </p:nvGrpSpPr>
+      <p:grpSpPr>
+        <a:xfrm>
+          <a:off x="0" y="0"/>
+          <a:ext cx="0" cy="0"/>
+          <a:chOff x="0" y="0"/>
+          <a:chExt cx="0" cy="0"/>
+        </a:xfrm>
+      </p:grpSpPr>
+      <p:sp>
+        <p:nvSpPr>
+          <p:cNvPr id="2" name="Title 1">
+            <a:extLst>
+              <a:ext uri="{FF2B5EF4-FFF2-40B4-BE49-F238E27FC236}">
+                <a16:creationId xmlns:a16="http://schemas.microsoft.com/office/drawing/2014/main" id="{1D63FDA9-C16B-2A93-5442-841FB6020638}"/>
+              </a:ext>
+            </a:extLst>
+          </p:cNvPr>
+          <p:cNvSpPr>
+            <a:spLocks noGrp="1"/>
+          </p:cNvSpPr>
+          <p:nvPr>
+            <p:ph type="title"/>
+          </p:nvPr>
+        </p:nvSpPr>
+        <p:spPr/>
+        <p:txBody>
+          <a:bodyPr/>
+          <a:lstStyle/>
+          <a:p>
+            <a:r>
+              <a:rPr lang="en-NZ" dirty="0"/>
+              <a:t>Overview</a:t>
+            </a:r>
+          </a:p>
+        </p:txBody>
+      </p:sp>
+      <p:sp>
+        <p:nvSpPr>
+          <p:cNvPr id="3" name="Content Placeholder 2">
+            <a:extLst>
+              <a:ext uri="{FF2B5EF4-FFF2-40B4-BE49-F238E27FC236}">
+                <a16:creationId xmlns:a16="http://schemas.microsoft.com/office/drawing/2014/main" id="{4E771DCA-505F-5CBB-FA90-2B8053CAEEDE}"/>
+              </a:ext>
+            </a:extLst>
+          </p:cNvPr>
+          <p:cNvSpPr>
+            <a:spLocks noGrp="1"/>
+          </p:cNvSpPr>
+          <p:nvPr>
+            <p:ph idx="1"/>
+          </p:nvPr>
+        </p:nvSpPr>
+        <p:spPr/>
+        <p:txBody>
+          <a:bodyPr/>
+          <a:lstStyle/>
+          <a:p>
+            <a:pPr marL="0" indent="0" algn="just">
+              <a:buNone/>
+            </a:pPr>
+            <a:r>
+              <a:rPr lang="en-NZ" dirty="0"/>
+              <a:t>Our app is a secure web-based library management system for managing books, authors, and administrator accounts with full CRUD features and authentications.</a:t>
+            </a:r>
+          </a:p>
+        </p:txBody>
+      </p:sp>
+    </p:spTree>
+    <p:extLst>
+      <p:ext uri="{BB962C8B-B14F-4D97-AF65-F5344CB8AC3E}">
+        <p14:creationId xmlns:p14="http://schemas.microsoft.com/office/powerpoint/2010/main" val="670477893"/>
+      </p:ext>
+    </p:extLst>
+  </p:cSld>
+  <p:clrMapOvr>
+    <a:masterClrMapping/>
+  </p:clrMapOvr>
+</p:sld>
+</file>
+
+<file path=ppt/slides/slide20.xml><?xml version="1.0" encoding="utf-8"?>
+<p:sld xmlns:a="http://schemas.openxmlformats.org/drawingml/2006/main" xmlns:r="http://schemas.openxmlformats.org/officeDocument/2006/relationships" xmlns:p="http://schemas.openxmlformats.org/presentationml/2006/main">
+  <p:cSld>
+    <p:spTree>
+      <p:nvGrpSpPr>
+        <p:cNvPr id="1" name="">
+          <a:extLst>
+            <a:ext uri="{FF2B5EF4-FFF2-40B4-BE49-F238E27FC236}">
+              <a16:creationId xmlns:a16="http://schemas.microsoft.com/office/drawing/2014/main" id="{CBACF806-3187-EE67-3A26-B40A4C06C24D}"/>
+            </a:ext>
+          </a:extLst>
+        </p:cNvPr>
+        <p:cNvGrpSpPr/>
+        <p:nvPr/>
+      </p:nvGrpSpPr>
+      <p:grpSpPr>
+        <a:xfrm>
+          <a:off x="0" y="0"/>
+          <a:ext cx="0" cy="0"/>
+          <a:chOff x="0" y="0"/>
+          <a:chExt cx="0" cy="0"/>
+        </a:xfrm>
+      </p:grpSpPr>
+      <p:sp>
+        <p:nvSpPr>
+          <p:cNvPr id="2" name="Title 1">
+            <a:extLst>
+              <a:ext uri="{FF2B5EF4-FFF2-40B4-BE49-F238E27FC236}">
+                <a16:creationId xmlns:a16="http://schemas.microsoft.com/office/drawing/2014/main" id="{67E0AA9E-64EE-815E-8593-326BCDA3D934}"/>
+              </a:ext>
+            </a:extLst>
+          </p:cNvPr>
+          <p:cNvSpPr>
+            <a:spLocks noGrp="1"/>
+          </p:cNvSpPr>
+          <p:nvPr>
+            <p:ph type="title"/>
+          </p:nvPr>
+        </p:nvSpPr>
+        <p:spPr/>
+        <p:txBody>
+          <a:bodyPr/>
+          <a:lstStyle/>
+          <a:p>
+            <a:r>
+              <a:rPr lang="en-NZ" dirty="0"/>
+              <a:t>The Running Application</a:t>
+            </a:r>
+          </a:p>
+        </p:txBody>
+      </p:sp>
+      <p:pic>
+        <p:nvPicPr>
+          <p:cNvPr id="11" name="Content Placeholder 10">
+            <a:extLst>
+              <a:ext uri="{FF2B5EF4-FFF2-40B4-BE49-F238E27FC236}">
+                <a16:creationId xmlns:a16="http://schemas.microsoft.com/office/drawing/2014/main" id="{55C52A7E-23C7-DF55-5FA1-BB991E6ED9BB}"/>
+              </a:ext>
+            </a:extLst>
+          </p:cNvPr>
+          <p:cNvPicPr>
+            <a:picLocks noGrp="1" noChangeAspect="1"/>
+          </p:cNvPicPr>
+          <p:nvPr>
+            <p:ph idx="1"/>
+          </p:nvPr>
+        </p:nvPicPr>
+        <p:blipFill>
+          <a:blip r:embed="rId2"/>
+          <a:stretch>
+            <a:fillRect/>
+          </a:stretch>
+        </p:blipFill>
+        <p:spPr>
+          <a:xfrm>
+            <a:off x="1490113" y="1825625"/>
+            <a:ext cx="9211773" cy="4351338"/>
+          </a:xfrm>
+          <a:prstGeom prst="rect">
+            <a:avLst/>
+          </a:prstGeom>
+        </p:spPr>
+      </p:pic>
+    </p:spTree>
+    <p:extLst>
+      <p:ext uri="{BB962C8B-B14F-4D97-AF65-F5344CB8AC3E}">
+        <p14:creationId xmlns:p14="http://schemas.microsoft.com/office/powerpoint/2010/main" val="4020551322"/>
+      </p:ext>
+    </p:extLst>
+  </p:cSld>
+  <p:clrMapOvr>
+    <a:masterClrMapping/>
+  </p:clrMapOvr>
+</p:sld>
+</file>
+
+<file path=ppt/slides/slide3.xml><?xml version="1.0" encoding="utf-8"?>
+<p:sld xmlns:a="http://schemas.openxmlformats.org/drawingml/2006/main" xmlns:r="http://schemas.openxmlformats.org/officeDocument/2006/relationships" xmlns:p="http://schemas.openxmlformats.org/presentationml/2006/main">
+  <p:cSld>
+    <p:spTree>
+      <p:nvGrpSpPr>
+        <p:cNvPr id="1" name="">
+          <a:extLst>
+            <a:ext uri="{FF2B5EF4-FFF2-40B4-BE49-F238E27FC236}">
+              <a16:creationId xmlns:a16="http://schemas.microsoft.com/office/drawing/2014/main" id="{96AF00D2-8529-17E7-349E-ADF20C425789}"/>
+            </a:ext>
+          </a:extLst>
+        </p:cNvPr>
+        <p:cNvGrpSpPr/>
+        <p:nvPr/>
+      </p:nvGrpSpPr>
+      <p:grpSpPr>
+        <a:xfrm>
+          <a:off x="0" y="0"/>
+          <a:ext cx="0" cy="0"/>
+          <a:chOff x="0" y="0"/>
+          <a:chExt cx="0" cy="0"/>
+        </a:xfrm>
+      </p:grpSpPr>
+      <p:sp>
+        <p:nvSpPr>
+          <p:cNvPr id="2" name="Title 1">
+            <a:extLst>
+              <a:ext uri="{FF2B5EF4-FFF2-40B4-BE49-F238E27FC236}">
+                <a16:creationId xmlns:a16="http://schemas.microsoft.com/office/drawing/2014/main" id="{CB964567-579B-2D49-D792-EC0ECDCB4D4A}"/>
+              </a:ext>
+            </a:extLst>
+          </p:cNvPr>
+          <p:cNvSpPr>
+            <a:spLocks noGrp="1"/>
+          </p:cNvSpPr>
+          <p:nvPr>
+            <p:ph type="title"/>
+          </p:nvPr>
+        </p:nvSpPr>
+        <p:spPr/>
+        <p:txBody>
+          <a:bodyPr/>
+          <a:lstStyle/>
+          <a:p>
+            <a:r>
+              <a:rPr lang="en-NZ" dirty="0"/>
+              <a:t>Features</a:t>
+            </a:r>
+          </a:p>
+        </p:txBody>
+      </p:sp>
+      <p:sp>
+        <p:nvSpPr>
+          <p:cNvPr id="3" name="Content Placeholder 2">
+            <a:extLst>
+              <a:ext uri="{FF2B5EF4-FFF2-40B4-BE49-F238E27FC236}">
+                <a16:creationId xmlns:a16="http://schemas.microsoft.com/office/drawing/2014/main" id="{9EC6207F-D462-2F3E-18AF-54E940AF757B}"/>
+              </a:ext>
+            </a:extLst>
+          </p:cNvPr>
+          <p:cNvSpPr>
+            <a:spLocks noGrp="1"/>
+          </p:cNvSpPr>
+          <p:nvPr>
+            <p:ph idx="1"/>
+          </p:nvPr>
+        </p:nvSpPr>
+        <p:spPr/>
+        <p:txBody>
+          <a:bodyPr/>
+          <a:lstStyle/>
+          <a:p>
+            <a:r>
+              <a:rPr lang="en-NZ" dirty="0"/>
+              <a:t>Full CRUD operations for all the pages </a:t>
+            </a:r>
+          </a:p>
+          <a:p>
+            <a:r>
+              <a:rPr lang="en-NZ" dirty="0"/>
+              <a:t>Search Books, Authors, Admins.</a:t>
+            </a:r>
+          </a:p>
+          <a:p>
+            <a:r>
+              <a:rPr lang="en-NZ" dirty="0"/>
+              <a:t>Sorting by Name or Title (A-Z and Z-A). </a:t>
+            </a:r>
+          </a:p>
+          <a:p>
+            <a:endParaRPr lang="en-NZ" dirty="0"/>
+          </a:p>
+          <a:p>
+            <a:endParaRPr lang="en-NZ" dirty="0"/>
+          </a:p>
+          <a:p>
+            <a:endParaRPr lang="en-NZ" dirty="0"/>
+          </a:p>
+        </p:txBody>
+      </p:sp>
+    </p:spTree>
+    <p:extLst>
+      <p:ext uri="{BB962C8B-B14F-4D97-AF65-F5344CB8AC3E}">
+        <p14:creationId xmlns:p14="http://schemas.microsoft.com/office/powerpoint/2010/main" val="1493032887"/>
+      </p:ext>
+    </p:extLst>
+  </p:cSld>
+  <p:clrMapOvr>
+    <a:masterClrMapping/>
+  </p:clrMapOvr>
+</p:sld>
+</file>
+
+<file path=ppt/slides/slide4.xml><?xml version="1.0" encoding="utf-8"?>
+<p:sld xmlns:a="http://schemas.openxmlformats.org/drawingml/2006/main" xmlns:r="http://schemas.openxmlformats.org/officeDocument/2006/relationships" xmlns:p="http://schemas.openxmlformats.org/presentationml/2006/main">
+  <p:cSld>
+    <p:spTree>
+      <p:nvGrpSpPr>
+        <p:cNvPr id="1" name=""/>
+        <p:cNvGrpSpPr/>
+        <p:nvPr/>
+      </p:nvGrpSpPr>
+      <p:grpSpPr>
+        <a:xfrm>
+          <a:off x="0" y="0"/>
+          <a:ext cx="0" cy="0"/>
+          <a:chOff x="0" y="0"/>
+          <a:chExt cx="0" cy="0"/>
+        </a:xfrm>
+      </p:grpSpPr>
+      <p:sp>
+        <p:nvSpPr>
+          <p:cNvPr id="2" name="Title 1">
+            <a:extLst>
+              <a:ext uri="{FF2B5EF4-FFF2-40B4-BE49-F238E27FC236}">
+                <a16:creationId xmlns:a16="http://schemas.microsoft.com/office/drawing/2014/main" id="{F698CF08-B7B3-E7F1-C3E7-30061EF0B2FE}"/>
+              </a:ext>
+            </a:extLst>
+          </p:cNvPr>
+          <p:cNvSpPr>
+            <a:spLocks noGrp="1"/>
+          </p:cNvSpPr>
+          <p:nvPr>
+            <p:ph type="title"/>
+          </p:nvPr>
+        </p:nvSpPr>
+        <p:spPr/>
+        <p:txBody>
+          <a:bodyPr/>
+          <a:lstStyle/>
+          <a:p>
+            <a:r>
+              <a:rPr lang="en-NZ" dirty="0"/>
+              <a:t>Advanced Features </a:t>
+            </a:r>
+          </a:p>
+        </p:txBody>
+      </p:sp>
+      <p:sp>
+        <p:nvSpPr>
+          <p:cNvPr id="3" name="Content Placeholder 2">
+            <a:extLst>
+              <a:ext uri="{FF2B5EF4-FFF2-40B4-BE49-F238E27FC236}">
+                <a16:creationId xmlns:a16="http://schemas.microsoft.com/office/drawing/2014/main" id="{62E09994-70AB-E4D7-37D7-F773DA2CC6E8}"/>
+              </a:ext>
+            </a:extLst>
+          </p:cNvPr>
+          <p:cNvSpPr>
+            <a:spLocks noGrp="1"/>
+          </p:cNvSpPr>
+          <p:nvPr>
+            <p:ph idx="1"/>
+          </p:nvPr>
+        </p:nvSpPr>
+        <p:spPr/>
+        <p:txBody>
+          <a:bodyPr/>
+          <a:lstStyle/>
+          <a:p>
+            <a:r>
+              <a:rPr lang="en-NZ" dirty="0"/>
+              <a:t>Implemented Validations for all the pages.</a:t>
+            </a:r>
+          </a:p>
+          <a:p>
+            <a:r>
+              <a:rPr lang="en-NZ" dirty="0"/>
+              <a:t>Session based authentication for Login/Logout.</a:t>
+            </a:r>
+          </a:p>
+          <a:p>
+            <a:r>
+              <a:rPr lang="en-NZ" dirty="0"/>
+              <a:t>Password Hashing </a:t>
+            </a:r>
+          </a:p>
+          <a:p>
+            <a:r>
+              <a:rPr lang="en-NZ" dirty="0"/>
+              <a:t>Account Activation and Deactivation </a:t>
+            </a:r>
+          </a:p>
+          <a:p>
+            <a:r>
+              <a:rPr lang="en-NZ" dirty="0"/>
+              <a:t>Strong password requirements </a:t>
+            </a:r>
+          </a:p>
+          <a:p>
+            <a:endParaRPr lang="en-NZ" dirty="0"/>
+          </a:p>
+        </p:txBody>
+      </p:sp>
+    </p:spTree>
+    <p:extLst>
+      <p:ext uri="{BB962C8B-B14F-4D97-AF65-F5344CB8AC3E}">
+        <p14:creationId xmlns:p14="http://schemas.microsoft.com/office/powerpoint/2010/main" val="499917506"/>
+      </p:ext>
+    </p:extLst>
+  </p:cSld>
+  <p:clrMapOvr>
+    <a:masterClrMapping/>
+  </p:clrMapOvr>
+</p:sld>
+</file>
+
+<file path=ppt/slides/slide5.xml><?xml version="1.0" encoding="utf-8"?>
+<p:sld xmlns:a="http://schemas.openxmlformats.org/drawingml/2006/main" xmlns:r="http://schemas.openxmlformats.org/officeDocument/2006/relationships" xmlns:p="http://schemas.openxmlformats.org/presentationml/2006/main">
+  <p:cSld>
+    <p:spTree>
+      <p:nvGrpSpPr>
+        <p:cNvPr id="1" name="">
+          <a:extLst>
+            <a:ext uri="{FF2B5EF4-FFF2-40B4-BE49-F238E27FC236}">
+              <a16:creationId xmlns:a16="http://schemas.microsoft.com/office/drawing/2014/main" id="{C451F62D-6CCB-4CFA-1EBB-8138F7E88865}"/>
+            </a:ext>
+          </a:extLst>
+        </p:cNvPr>
+        <p:cNvGrpSpPr/>
+        <p:nvPr/>
+      </p:nvGrpSpPr>
+      <p:grpSpPr>
+        <a:xfrm>
+          <a:off x="0" y="0"/>
+          <a:ext cx="0" cy="0"/>
+          <a:chOff x="0" y="0"/>
+          <a:chExt cx="0" cy="0"/>
+        </a:xfrm>
+      </p:grpSpPr>
+      <p:sp>
+        <p:nvSpPr>
+          <p:cNvPr id="2" name="Title 1">
+            <a:extLst>
+              <a:ext uri="{FF2B5EF4-FFF2-40B4-BE49-F238E27FC236}">
+                <a16:creationId xmlns:a16="http://schemas.microsoft.com/office/drawing/2014/main" id="{4AF405C3-837C-DA69-F591-94AA041DC8A1}"/>
+              </a:ext>
+            </a:extLst>
+          </p:cNvPr>
+          <p:cNvSpPr>
+            <a:spLocks noGrp="1"/>
+          </p:cNvSpPr>
+          <p:nvPr>
+            <p:ph type="title"/>
+          </p:nvPr>
+        </p:nvSpPr>
+        <p:spPr/>
+        <p:txBody>
+          <a:bodyPr/>
+          <a:lstStyle/>
+          <a:p>
+            <a:r>
+              <a:rPr lang="en-NZ" dirty="0"/>
+              <a:t>ER Diagram</a:t>
+            </a:r>
+          </a:p>
+        </p:txBody>
+      </p:sp>
+      <p:pic>
+        <p:nvPicPr>
+          <p:cNvPr id="5" name="Content Placeholder 4">
+            <a:extLst>
+              <a:ext uri="{FF2B5EF4-FFF2-40B4-BE49-F238E27FC236}">
+                <a16:creationId xmlns:a16="http://schemas.microsoft.com/office/drawing/2014/main" id="{CA9AECE5-21A9-2904-B18D-26EEB20BB384}"/>
+              </a:ext>
+            </a:extLst>
+          </p:cNvPr>
+          <p:cNvPicPr>
+            <a:picLocks noGrp="1" noChangeAspect="1"/>
+          </p:cNvPicPr>
+          <p:nvPr>
+            <p:ph idx="1"/>
+          </p:nvPr>
+        </p:nvPicPr>
+        <p:blipFill>
+          <a:blip r:embed="rId2"/>
+          <a:stretch>
+            <a:fillRect/>
+          </a:stretch>
+        </p:blipFill>
+        <p:spPr>
+          <a:xfrm>
+            <a:off x="1978785" y="1395663"/>
+            <a:ext cx="8054215" cy="5097212"/>
+          </a:xfrm>
+          <a:prstGeom prst="rect">
+            <a:avLst/>
+          </a:prstGeom>
+        </p:spPr>
+      </p:pic>
+    </p:spTree>
+    <p:extLst>
+      <p:ext uri="{BB962C8B-B14F-4D97-AF65-F5344CB8AC3E}">
+        <p14:creationId xmlns:p14="http://schemas.microsoft.com/office/powerpoint/2010/main" val="1452555610"/>
+      </p:ext>
+    </p:extLst>
+  </p:cSld>
+  <p:clrMapOvr>
+    <a:masterClrMapping/>
+  </p:clrMapOvr>
+</p:sld>
+</file>
+
+<file path=ppt/slides/slide6.xml><?xml version="1.0" encoding="utf-8"?>
+<p:sld xmlns:a="http://schemas.openxmlformats.org/drawingml/2006/main" xmlns:r="http://schemas.openxmlformats.org/officeDocument/2006/relationships" xmlns:p="http://schemas.openxmlformats.org/presentationml/2006/main">
+  <p:cSld>
+    <p:spTree>
+      <p:nvGrpSpPr>
+        <p:cNvPr id="1" name="">
+          <a:extLst>
+            <a:ext uri="{FF2B5EF4-FFF2-40B4-BE49-F238E27FC236}">
+              <a16:creationId xmlns:a16="http://schemas.microsoft.com/office/drawing/2014/main" id="{B63E35E0-BB61-2E2C-D836-06DF6E7BAC87}"/>
+            </a:ext>
+          </a:extLst>
+        </p:cNvPr>
+        <p:cNvGrpSpPr/>
+        <p:nvPr/>
+      </p:nvGrpSpPr>
+      <p:grpSpPr>
+        <a:xfrm>
+          <a:off x="0" y="0"/>
+          <a:ext cx="0" cy="0"/>
+          <a:chOff x="0" y="0"/>
+          <a:chExt cx="0" cy="0"/>
+        </a:xfrm>
+      </p:grpSpPr>
+      <p:sp>
+        <p:nvSpPr>
+          <p:cNvPr id="2" name="Title 1">
+            <a:extLst>
+              <a:ext uri="{FF2B5EF4-FFF2-40B4-BE49-F238E27FC236}">
+                <a16:creationId xmlns:a16="http://schemas.microsoft.com/office/drawing/2014/main" id="{39CE5BBE-6AB1-6499-AE58-4E94EA136540}"/>
+              </a:ext>
+            </a:extLst>
+          </p:cNvPr>
+          <p:cNvSpPr>
+            <a:spLocks noGrp="1"/>
+          </p:cNvSpPr>
+          <p:nvPr>
+            <p:ph type="title"/>
+          </p:nvPr>
+        </p:nvSpPr>
+        <p:spPr/>
+        <p:txBody>
+          <a:bodyPr/>
+          <a:lstStyle/>
+          <a:p>
+            <a:r>
+              <a:rPr lang="en-NZ" dirty="0"/>
+              <a:t>User Stories</a:t>
+            </a:r>
+          </a:p>
+        </p:txBody>
+      </p:sp>
+      <p:sp>
+        <p:nvSpPr>
+          <p:cNvPr id="9" name="Content Placeholder 8">
+            <a:extLst>
+              <a:ext uri="{FF2B5EF4-FFF2-40B4-BE49-F238E27FC236}">
+                <a16:creationId xmlns:a16="http://schemas.microsoft.com/office/drawing/2014/main" id="{8AFBFB2E-0301-77B4-125B-7835C2A2C0D0}"/>
+              </a:ext>
+            </a:extLst>
+          </p:cNvPr>
+          <p:cNvSpPr>
+            <a:spLocks noGrp="1"/>
+          </p:cNvSpPr>
+          <p:nvPr>
+            <p:ph idx="1"/>
+          </p:nvPr>
+        </p:nvSpPr>
+        <p:spPr/>
+        <p:txBody>
+          <a:bodyPr/>
+          <a:lstStyle/>
+          <a:p>
+            <a:endParaRPr lang="en-NZ"/>
+          </a:p>
+        </p:txBody>
+      </p:sp>
+      <p:pic>
+        <p:nvPicPr>
+          <p:cNvPr id="13" name="Picture 12">
+            <a:extLst>
+              <a:ext uri="{FF2B5EF4-FFF2-40B4-BE49-F238E27FC236}">
+                <a16:creationId xmlns:a16="http://schemas.microsoft.com/office/drawing/2014/main" id="{50C02D80-6BF6-226F-5DB4-DF1CE00488D9}"/>
+              </a:ext>
+            </a:extLst>
+          </p:cNvPr>
+          <p:cNvPicPr>
+            <a:picLocks noChangeAspect="1"/>
+          </p:cNvPicPr>
+          <p:nvPr/>
+        </p:nvPicPr>
+        <p:blipFill>
+          <a:blip r:embed="rId2"/>
+          <a:stretch>
+            <a:fillRect/>
+          </a:stretch>
+        </p:blipFill>
+        <p:spPr>
+          <a:xfrm>
+            <a:off x="838200" y="1556117"/>
+            <a:ext cx="10515600" cy="4753821"/>
+          </a:xfrm>
+          <a:prstGeom prst="rect">
+            <a:avLst/>
+          </a:prstGeom>
+        </p:spPr>
+      </p:pic>
+    </p:spTree>
+    <p:extLst>
+      <p:ext uri="{BB962C8B-B14F-4D97-AF65-F5344CB8AC3E}">
+        <p14:creationId xmlns:p14="http://schemas.microsoft.com/office/powerpoint/2010/main" val="121744597"/>
+      </p:ext>
+    </p:extLst>
+  </p:cSld>
+  <p:clrMapOvr>
+    <a:masterClrMapping/>
+  </p:clrMapOvr>
+</p:sld>
+</file>
+
+<file path=ppt/slides/slide7.xml><?xml version="1.0" encoding="utf-8"?>
+<p:sld xmlns:a="http://schemas.openxmlformats.org/drawingml/2006/main" xmlns:r="http://schemas.openxmlformats.org/officeDocument/2006/relationships" xmlns:p="http://schemas.openxmlformats.org/presentationml/2006/main">
+  <p:cSld>
+    <p:spTree>
+      <p:nvGrpSpPr>
+        <p:cNvPr id="1" name=""/>
+        <p:cNvGrpSpPr/>
+        <p:nvPr/>
+      </p:nvGrpSpPr>
+      <p:grpSpPr>
+        <a:xfrm>
+          <a:off x="0" y="0"/>
+          <a:ext cx="0" cy="0"/>
+          <a:chOff x="0" y="0"/>
+          <a:chExt cx="0" cy="0"/>
+        </a:xfrm>
+      </p:grpSpPr>
+      <p:sp>
+        <p:nvSpPr>
+          <p:cNvPr id="2" name="Title 1">
+            <a:extLst>
+              <a:ext uri="{FF2B5EF4-FFF2-40B4-BE49-F238E27FC236}">
+                <a16:creationId xmlns:a16="http://schemas.microsoft.com/office/drawing/2014/main" id="{84EE108B-F3A8-8C8A-867D-D7B1F7A6E6CA}"/>
+              </a:ext>
+            </a:extLst>
+          </p:cNvPr>
+          <p:cNvSpPr>
+            <a:spLocks noGrp="1"/>
+          </p:cNvSpPr>
+          <p:nvPr>
+            <p:ph type="title"/>
+          </p:nvPr>
+        </p:nvSpPr>
+        <p:spPr/>
+        <p:txBody>
+          <a:bodyPr/>
+          <a:lstStyle/>
+          <a:p>
+            <a:r>
+              <a:rPr lang="en-US" dirty="0"/>
+              <a:t>Sprint 1</a:t>
+            </a:r>
+            <a:endParaRPr lang="en-NZ" dirty="0"/>
+          </a:p>
+        </p:txBody>
+      </p:sp>
+      <p:sp>
+        <p:nvSpPr>
+          <p:cNvPr id="3" name="Content Placeholder 2">
+            <a:extLst>
+              <a:ext uri="{FF2B5EF4-FFF2-40B4-BE49-F238E27FC236}">
+                <a16:creationId xmlns:a16="http://schemas.microsoft.com/office/drawing/2014/main" id="{4F45B217-F284-581B-675F-4130AEE00171}"/>
+              </a:ext>
+            </a:extLst>
+          </p:cNvPr>
+          <p:cNvSpPr>
+            <a:spLocks noGrp="1"/>
+          </p:cNvSpPr>
+          <p:nvPr>
+            <p:ph idx="1"/>
+          </p:nvPr>
+        </p:nvSpPr>
+        <p:spPr/>
+        <p:txBody>
+          <a:bodyPr/>
+          <a:lstStyle/>
+          <a:p>
+            <a:endParaRPr lang="en-NZ"/>
+          </a:p>
+        </p:txBody>
+      </p:sp>
+      <p:pic>
+        <p:nvPicPr>
+          <p:cNvPr id="7" name="Picture 6">
+            <a:extLst>
+              <a:ext uri="{FF2B5EF4-FFF2-40B4-BE49-F238E27FC236}">
+                <a16:creationId xmlns:a16="http://schemas.microsoft.com/office/drawing/2014/main" id="{796EAD39-12CD-9403-0C2B-543750419788}"/>
+              </a:ext>
+            </a:extLst>
+          </p:cNvPr>
+          <p:cNvPicPr>
+            <a:picLocks noChangeAspect="1"/>
+          </p:cNvPicPr>
+          <p:nvPr/>
+        </p:nvPicPr>
+        <p:blipFill>
+          <a:blip r:embed="rId2"/>
+          <a:stretch>
+            <a:fillRect/>
+          </a:stretch>
+        </p:blipFill>
+        <p:spPr>
+          <a:xfrm>
+            <a:off x="2499810" y="1825625"/>
+            <a:ext cx="7192379" cy="4732774"/>
+          </a:xfrm>
+          <a:prstGeom prst="rect">
+            <a:avLst/>
+          </a:prstGeom>
+        </p:spPr>
+      </p:pic>
+    </p:spTree>
+    <p:extLst>
+      <p:ext uri="{BB962C8B-B14F-4D97-AF65-F5344CB8AC3E}">
+        <p14:creationId xmlns:p14="http://schemas.microsoft.com/office/powerpoint/2010/main" val="303581048"/>
+      </p:ext>
+    </p:extLst>
+  </p:cSld>
+  <p:clrMapOvr>
+    <a:masterClrMapping/>
+  </p:clrMapOvr>
+</p:sld>
+</file>
+
+<file path=ppt/slides/slide8.xml><?xml version="1.0" encoding="utf-8"?>
+<p:sld xmlns:a="http://schemas.openxmlformats.org/drawingml/2006/main" xmlns:r="http://schemas.openxmlformats.org/officeDocument/2006/relationships" xmlns:p="http://schemas.openxmlformats.org/presentationml/2006/main">
+  <p:cSld>
+    <p:spTree>
+      <p:nvGrpSpPr>
+        <p:cNvPr id="1" name=""/>
+        <p:cNvGrpSpPr/>
+        <p:nvPr/>
+      </p:nvGrpSpPr>
+      <p:grpSpPr>
+        <a:xfrm>
+          <a:off x="0" y="0"/>
+          <a:ext cx="0" cy="0"/>
+          <a:chOff x="0" y="0"/>
+          <a:chExt cx="0" cy="0"/>
+        </a:xfrm>
+      </p:grpSpPr>
+      <p:sp>
+        <p:nvSpPr>
+          <p:cNvPr id="2" name="Title 1">
+            <a:extLst>
+              <a:ext uri="{FF2B5EF4-FFF2-40B4-BE49-F238E27FC236}">
+                <a16:creationId xmlns:a16="http://schemas.microsoft.com/office/drawing/2014/main" id="{4B7D04AF-7FE4-226E-A143-D89043A69AFC}"/>
+              </a:ext>
+            </a:extLst>
+          </p:cNvPr>
+          <p:cNvSpPr>
+            <a:spLocks noGrp="1"/>
+          </p:cNvSpPr>
+          <p:nvPr>
+            <p:ph type="title"/>
+          </p:nvPr>
+        </p:nvSpPr>
+        <p:spPr/>
+        <p:txBody>
+          <a:bodyPr/>
+          <a:lstStyle/>
+          <a:p>
+            <a:r>
+              <a:rPr lang="en-US" dirty="0"/>
+              <a:t>Sprint 2</a:t>
+            </a:r>
+            <a:endParaRPr lang="en-NZ" dirty="0"/>
+          </a:p>
+        </p:txBody>
+      </p:sp>
+      <p:sp>
+        <p:nvSpPr>
+          <p:cNvPr id="7" name="Content Placeholder 6">
+            <a:extLst>
+              <a:ext uri="{FF2B5EF4-FFF2-40B4-BE49-F238E27FC236}">
+                <a16:creationId xmlns:a16="http://schemas.microsoft.com/office/drawing/2014/main" id="{7C18CD41-88E4-E18B-3FA9-0EF8278CC019}"/>
+              </a:ext>
+            </a:extLst>
+          </p:cNvPr>
+          <p:cNvSpPr>
+            <a:spLocks noGrp="1"/>
+          </p:cNvSpPr>
+          <p:nvPr>
+            <p:ph idx="1"/>
+          </p:nvPr>
+        </p:nvSpPr>
+        <p:spPr/>
+        <p:txBody>
+          <a:bodyPr/>
+          <a:lstStyle/>
+          <a:p>
+            <a:endParaRPr lang="en-NZ"/>
+          </a:p>
+        </p:txBody>
+      </p:sp>
+      <p:pic>
+        <p:nvPicPr>
+          <p:cNvPr id="9" name="Picture 8">
+            <a:extLst>
+              <a:ext uri="{FF2B5EF4-FFF2-40B4-BE49-F238E27FC236}">
+                <a16:creationId xmlns:a16="http://schemas.microsoft.com/office/drawing/2014/main" id="{157DAFFB-14FA-BB12-D561-E70551D6CFAE}"/>
+              </a:ext>
+            </a:extLst>
+          </p:cNvPr>
+          <p:cNvPicPr>
+            <a:picLocks noChangeAspect="1"/>
+          </p:cNvPicPr>
+          <p:nvPr/>
+        </p:nvPicPr>
+        <p:blipFill>
+          <a:blip r:embed="rId2"/>
+          <a:stretch>
+            <a:fillRect/>
+          </a:stretch>
+        </p:blipFill>
+        <p:spPr>
+          <a:xfrm>
+            <a:off x="1904415" y="1347537"/>
+            <a:ext cx="8383170" cy="5063204"/>
+          </a:xfrm>
+          <a:prstGeom prst="rect">
+            <a:avLst/>
+          </a:prstGeom>
+        </p:spPr>
+      </p:pic>
+    </p:spTree>
+    <p:extLst>
+      <p:ext uri="{BB962C8B-B14F-4D97-AF65-F5344CB8AC3E}">
+        <p14:creationId xmlns:p14="http://schemas.microsoft.com/office/powerpoint/2010/main" val="235160188"/>
+      </p:ext>
+    </p:extLst>
+  </p:cSld>
+  <p:clrMapOvr>
+    <a:masterClrMapping/>
+  </p:clrMapOvr>
+</p:sld>
+</file>
+
+<file path=ppt/slides/slide9.xml><?xml version="1.0" encoding="utf-8"?>
+<p:sld xmlns:a="http://schemas.openxmlformats.org/drawingml/2006/main" xmlns:r="http://schemas.openxmlformats.org/officeDocument/2006/relationships" xmlns:p="http://schemas.openxmlformats.org/presentationml/2006/main">
+  <p:cSld>
+    <p:spTree>
+      <p:nvGrpSpPr>
+        <p:cNvPr id="1" name=""/>
+        <p:cNvGrpSpPr/>
+        <p:nvPr/>
+      </p:nvGrpSpPr>
+      <p:grpSpPr>
+        <a:xfrm>
+          <a:off x="0" y="0"/>
+          <a:ext cx="0" cy="0"/>
+          <a:chOff x="0" y="0"/>
+          <a:chExt cx="0" cy="0"/>
+        </a:xfrm>
+      </p:grpSpPr>
+      <p:sp>
+        <p:nvSpPr>
+          <p:cNvPr id="2" name="Title 1">
+            <a:extLst>
+              <a:ext uri="{FF2B5EF4-FFF2-40B4-BE49-F238E27FC236}">
+                <a16:creationId xmlns:a16="http://schemas.microsoft.com/office/drawing/2014/main" id="{3660742D-D3D2-0A90-B697-18F55B256576}"/>
+              </a:ext>
+            </a:extLst>
+          </p:cNvPr>
+          <p:cNvSpPr>
+            <a:spLocks noGrp="1"/>
+          </p:cNvSpPr>
+          <p:nvPr>
+            <p:ph type="title"/>
+          </p:nvPr>
+        </p:nvSpPr>
+        <p:spPr/>
+        <p:txBody>
+          <a:bodyPr/>
+          <a:lstStyle/>
+          <a:p>
+            <a:r>
+              <a:rPr lang="en-US" dirty="0"/>
+              <a:t>Sprint 3</a:t>
+            </a:r>
+            <a:endParaRPr lang="en-NZ" dirty="0"/>
+          </a:p>
+        </p:txBody>
+      </p:sp>
+      <p:sp>
+        <p:nvSpPr>
+          <p:cNvPr id="7" name="Content Placeholder 6">
+            <a:extLst>
+              <a:ext uri="{FF2B5EF4-FFF2-40B4-BE49-F238E27FC236}">
+                <a16:creationId xmlns:a16="http://schemas.microsoft.com/office/drawing/2014/main" id="{98BAE2A4-7952-7CA0-924E-83CE93CF822D}"/>
+              </a:ext>
+            </a:extLst>
+          </p:cNvPr>
+          <p:cNvSpPr>
+            <a:spLocks noGrp="1"/>
+          </p:cNvSpPr>
+          <p:nvPr>
+            <p:ph idx="1"/>
+          </p:nvPr>
+        </p:nvSpPr>
+        <p:spPr/>
+        <p:txBody>
+          <a:bodyPr/>
+          <a:lstStyle/>
+          <a:p>
+            <a:endParaRPr lang="en-NZ"/>
+          </a:p>
+        </p:txBody>
+      </p:sp>
+      <p:pic>
+        <p:nvPicPr>
+          <p:cNvPr id="9" name="Picture 8">
+            <a:extLst>
+              <a:ext uri="{FF2B5EF4-FFF2-40B4-BE49-F238E27FC236}">
+                <a16:creationId xmlns:a16="http://schemas.microsoft.com/office/drawing/2014/main" id="{507ACD9B-482A-41A7-253C-99B530944838}"/>
+              </a:ext>
+            </a:extLst>
+          </p:cNvPr>
+          <p:cNvPicPr>
+            <a:picLocks noChangeAspect="1"/>
+          </p:cNvPicPr>
+          <p:nvPr/>
+        </p:nvPicPr>
+        <p:blipFill>
+          <a:blip r:embed="rId2"/>
+          <a:stretch>
+            <a:fillRect/>
+          </a:stretch>
+        </p:blipFill>
+        <p:spPr>
+          <a:xfrm>
+            <a:off x="1766283" y="1280159"/>
+            <a:ext cx="8659433" cy="5497345"/>
+          </a:xfrm>
+          <a:prstGeom prst="rect">
+            <a:avLst/>
+          </a:prstGeom>
+        </p:spPr>
+      </p:pic>
+    </p:spTree>
+    <p:extLst>
+      <p:ext uri="{BB962C8B-B14F-4D97-AF65-F5344CB8AC3E}">
+        <p14:creationId xmlns:p14="http://schemas.microsoft.com/office/powerpoint/2010/main" val="1441284574"/>
+      </p:ext>
+    </p:extLst>
+  </p:cSld>
+  <p:clrMapOvr>
+    <a:masterClrMapping/>
+  </p:clrMapOvr>
+</p:sld>
+</file>
+
 <file path=ppt/theme/theme1.xml><?xml version="1.0" encoding="utf-8"?>
 <a:theme xmlns:a="http://schemas.openxmlformats.org/drawingml/2006/main" name="Office Theme">
   <a:themeElements>

--- a/Presentation Slides.pptx
+++ b/Presentation Slides.pptx
@@ -134,7 +134,7 @@
 <file path=ppt/revisionInfo.xml><?xml version="1.0" encoding="utf-8"?>
 <p1510:revInfo xmlns:a="http://schemas.openxmlformats.org/drawingml/2006/main" xmlns:r="http://schemas.openxmlformats.org/officeDocument/2006/relationships" xmlns:p1510="http://schemas.microsoft.com/office/powerpoint/2015/10/main">
   <p1510:revLst>
-    <p1510:client id="{AA265004-1880-460D-B614-F8B6FF7D3354}" v="12" dt="2025-10-12T07:39:02.494"/>
+    <p1510:client id="{AA265004-1880-460D-B614-F8B6FF7D3354}" v="18" dt="2025-10-12T08:37:15.312"/>
   </p1510:revLst>
 </p1510:revInfo>
 </file>
@@ -144,7 +144,7 @@
   <pc:docChgLst>
     <pc:chgData name="Dave Sushames" userId="ce71797e-895c-47df-af8e-c160254d5cef" providerId="ADAL" clId="{067FCE3D-3D41-4548-936F-F0A348C85C95}"/>
     <pc:docChg chg="undo custSel addSld modSld">
-      <pc:chgData name="Dave Sushames" userId="ce71797e-895c-47df-af8e-c160254d5cef" providerId="ADAL" clId="{067FCE3D-3D41-4548-936F-F0A348C85C95}" dt="2025-10-12T08:21:33.692" v="1236" actId="20577"/>
+      <pc:chgData name="Dave Sushames" userId="ce71797e-895c-47df-af8e-c160254d5cef" providerId="ADAL" clId="{067FCE3D-3D41-4548-936F-F0A348C85C95}" dt="2025-10-12T08:39:33.545" v="1443" actId="20577"/>
       <pc:docMkLst>
         <pc:docMk/>
       </pc:docMkLst>
@@ -288,11 +288,19 @@
         </pc:picChg>
       </pc:sldChg>
       <pc:sldChg chg="addSp modSp mod">
-        <pc:chgData name="Dave Sushames" userId="ce71797e-895c-47df-af8e-c160254d5cef" providerId="ADAL" clId="{067FCE3D-3D41-4548-936F-F0A348C85C95}" dt="2025-10-12T06:46:08.847" v="6" actId="14100"/>
+        <pc:chgData name="Dave Sushames" userId="ce71797e-895c-47df-af8e-c160254d5cef" providerId="ADAL" clId="{067FCE3D-3D41-4548-936F-F0A348C85C95}" dt="2025-10-12T08:36:46.525" v="1282" actId="20577"/>
         <pc:sldMkLst>
           <pc:docMk/>
           <pc:sldMk cId="262380355" sldId="262"/>
         </pc:sldMkLst>
+        <pc:spChg chg="mod">
+          <ac:chgData name="Dave Sushames" userId="ce71797e-895c-47df-af8e-c160254d5cef" providerId="ADAL" clId="{067FCE3D-3D41-4548-936F-F0A348C85C95}" dt="2025-10-12T08:36:46.525" v="1282" actId="20577"/>
+          <ac:spMkLst>
+            <pc:docMk/>
+            <pc:sldMk cId="262380355" sldId="262"/>
+            <ac:spMk id="2" creationId="{AD5387C5-7E4D-2D94-A725-682AE52EEE75}"/>
+          </ac:spMkLst>
+        </pc:spChg>
         <pc:spChg chg="mod">
           <ac:chgData name="Dave Sushames" userId="ce71797e-895c-47df-af8e-c160254d5cef" providerId="ADAL" clId="{067FCE3D-3D41-4548-936F-F0A348C85C95}" dt="2025-10-12T06:45:29.085" v="1" actId="14100"/>
           <ac:spMkLst>
@@ -309,6 +317,21 @@
             <ac:picMk id="7" creationId="{9B68A36A-6F78-E2E4-B901-C40D428AC381}"/>
           </ac:picMkLst>
         </pc:picChg>
+      </pc:sldChg>
+      <pc:sldChg chg="modSp mod">
+        <pc:chgData name="Dave Sushames" userId="ce71797e-895c-47df-af8e-c160254d5cef" providerId="ADAL" clId="{067FCE3D-3D41-4548-936F-F0A348C85C95}" dt="2025-10-12T08:37:25.711" v="1308" actId="313"/>
+        <pc:sldMkLst>
+          <pc:docMk/>
+          <pc:sldMk cId="2352553251" sldId="263"/>
+        </pc:sldMkLst>
+        <pc:graphicFrameChg chg="mod modGraphic">
+          <ac:chgData name="Dave Sushames" userId="ce71797e-895c-47df-af8e-c160254d5cef" providerId="ADAL" clId="{067FCE3D-3D41-4548-936F-F0A348C85C95}" dt="2025-10-12T08:37:25.711" v="1308" actId="313"/>
+          <ac:graphicFrameMkLst>
+            <pc:docMk/>
+            <pc:sldMk cId="2352553251" sldId="263"/>
+            <ac:graphicFrameMk id="5" creationId="{614738AC-5827-DAA3-7669-907C85472248}"/>
+          </ac:graphicFrameMkLst>
+        </pc:graphicFrameChg>
       </pc:sldChg>
       <pc:sldChg chg="addSp delSp modSp mod">
         <pc:chgData name="Dave Sushames" userId="ce71797e-895c-47df-af8e-c160254d5cef" providerId="ADAL" clId="{067FCE3D-3D41-4548-936F-F0A348C85C95}" dt="2025-10-12T07:25:45.289" v="54" actId="1076"/>
@@ -412,13 +435,13 @@
         </pc:picChg>
       </pc:sldChg>
       <pc:sldChg chg="addSp modSp mod">
-        <pc:chgData name="Dave Sushames" userId="ce71797e-895c-47df-af8e-c160254d5cef" providerId="ADAL" clId="{067FCE3D-3D41-4548-936F-F0A348C85C95}" dt="2025-10-12T07:46:56.245" v="669" actId="5793"/>
+        <pc:chgData name="Dave Sushames" userId="ce71797e-895c-47df-af8e-c160254d5cef" providerId="ADAL" clId="{067FCE3D-3D41-4548-936F-F0A348C85C95}" dt="2025-10-12T08:39:21.353" v="1442" actId="20577"/>
         <pc:sldMkLst>
           <pc:docMk/>
           <pc:sldMk cId="1913538684" sldId="267"/>
         </pc:sldMkLst>
         <pc:spChg chg="mod">
-          <ac:chgData name="Dave Sushames" userId="ce71797e-895c-47df-af8e-c160254d5cef" providerId="ADAL" clId="{067FCE3D-3D41-4548-936F-F0A348C85C95}" dt="2025-10-12T07:46:56.245" v="669" actId="5793"/>
+          <ac:chgData name="Dave Sushames" userId="ce71797e-895c-47df-af8e-c160254d5cef" providerId="ADAL" clId="{067FCE3D-3D41-4548-936F-F0A348C85C95}" dt="2025-10-12T08:39:21.353" v="1442" actId="20577"/>
           <ac:spMkLst>
             <pc:docMk/>
             <pc:sldMk cId="1913538684" sldId="267"/>
@@ -443,13 +466,13 @@
         </pc:picChg>
       </pc:sldChg>
       <pc:sldChg chg="modSp mod">
-        <pc:chgData name="Dave Sushames" userId="ce71797e-895c-47df-af8e-c160254d5cef" providerId="ADAL" clId="{067FCE3D-3D41-4548-936F-F0A348C85C95}" dt="2025-10-12T08:21:33.692" v="1236" actId="20577"/>
+        <pc:chgData name="Dave Sushames" userId="ce71797e-895c-47df-af8e-c160254d5cef" providerId="ADAL" clId="{067FCE3D-3D41-4548-936F-F0A348C85C95}" dt="2025-10-12T08:39:33.545" v="1443" actId="20577"/>
         <pc:sldMkLst>
           <pc:docMk/>
           <pc:sldMk cId="3344191263" sldId="268"/>
         </pc:sldMkLst>
         <pc:spChg chg="mod">
-          <ac:chgData name="Dave Sushames" userId="ce71797e-895c-47df-af8e-c160254d5cef" providerId="ADAL" clId="{067FCE3D-3D41-4548-936F-F0A348C85C95}" dt="2025-10-12T08:21:33.692" v="1236" actId="20577"/>
+          <ac:chgData name="Dave Sushames" userId="ce71797e-895c-47df-af8e-c160254d5cef" providerId="ADAL" clId="{067FCE3D-3D41-4548-936F-F0A348C85C95}" dt="2025-10-12T08:39:33.545" v="1443" actId="20577"/>
           <ac:spMkLst>
             <pc:docMk/>
             <pc:sldMk cId="3344191263" sldId="268"/>
@@ -520,11 +543,19 @@
         </pc:spChg>
       </pc:sldChg>
       <pc:sldChg chg="addSp delSp modSp mod">
-        <pc:chgData name="Dave Sushames" userId="ce71797e-895c-47df-af8e-c160254d5cef" providerId="ADAL" clId="{067FCE3D-3D41-4548-936F-F0A348C85C95}" dt="2025-10-12T06:48:41.355" v="34" actId="1076"/>
+        <pc:chgData name="Dave Sushames" userId="ce71797e-895c-47df-af8e-c160254d5cef" providerId="ADAL" clId="{067FCE3D-3D41-4548-936F-F0A348C85C95}" dt="2025-10-12T08:36:52.509" v="1297" actId="20577"/>
         <pc:sldMkLst>
           <pc:docMk/>
           <pc:sldMk cId="2373449628" sldId="271"/>
         </pc:sldMkLst>
+        <pc:spChg chg="mod">
+          <ac:chgData name="Dave Sushames" userId="ce71797e-895c-47df-af8e-c160254d5cef" providerId="ADAL" clId="{067FCE3D-3D41-4548-936F-F0A348C85C95}" dt="2025-10-12T08:36:52.509" v="1297" actId="20577"/>
+          <ac:spMkLst>
+            <pc:docMk/>
+            <pc:sldMk cId="2373449628" sldId="271"/>
+            <ac:spMk id="2" creationId="{B881FA52-B779-FD9D-307E-308C558060AC}"/>
+          </ac:spMkLst>
+        </pc:spChg>
         <pc:spChg chg="del">
           <ac:chgData name="Dave Sushames" userId="ce71797e-895c-47df-af8e-c160254d5cef" providerId="ADAL" clId="{067FCE3D-3D41-4548-936F-F0A348C85C95}" dt="2025-10-12T06:48:08.019" v="22" actId="22"/>
           <ac:spMkLst>
@@ -738,8 +769,8 @@
           </ac:picMkLst>
         </pc:picChg>
       </pc:sldChg>
-      <pc:sldChg chg="addSp modSp new mod">
-        <pc:chgData name="Dave Sushames" userId="ce71797e-895c-47df-af8e-c160254d5cef" providerId="ADAL" clId="{067FCE3D-3D41-4548-936F-F0A348C85C95}" dt="2025-10-12T08:20:21.355" v="1221" actId="14100"/>
+      <pc:sldChg chg="addSp delSp modSp new mod">
+        <pc:chgData name="Dave Sushames" userId="ce71797e-895c-47df-af8e-c160254d5cef" providerId="ADAL" clId="{067FCE3D-3D41-4548-936F-F0A348C85C95}" dt="2025-10-12T08:36:30.175" v="1251" actId="14100"/>
         <pc:sldMkLst>
           <pc:docMk/>
           <pc:sldMk cId="86843363" sldId="276"/>
@@ -752,12 +783,36 @@
             <ac:spMk id="2" creationId="{554C44E3-F2D9-9C61-F32B-DB4A528B7983}"/>
           </ac:spMkLst>
         </pc:spChg>
-        <pc:picChg chg="add mod">
-          <ac:chgData name="Dave Sushames" userId="ce71797e-895c-47df-af8e-c160254d5cef" providerId="ADAL" clId="{067FCE3D-3D41-4548-936F-F0A348C85C95}" dt="2025-10-12T08:20:21.355" v="1221" actId="14100"/>
+        <pc:picChg chg="add del mod">
+          <ac:chgData name="Dave Sushames" userId="ce71797e-895c-47df-af8e-c160254d5cef" providerId="ADAL" clId="{067FCE3D-3D41-4548-936F-F0A348C85C95}" dt="2025-10-12T08:34:59.618" v="1237" actId="478"/>
           <ac:picMkLst>
             <pc:docMk/>
             <pc:sldMk cId="86843363" sldId="276"/>
             <ac:picMk id="5" creationId="{7C866F3C-E247-A1FE-041D-922BD663EE7D}"/>
+          </ac:picMkLst>
+        </pc:picChg>
+        <pc:picChg chg="add del mod">
+          <ac:chgData name="Dave Sushames" userId="ce71797e-895c-47df-af8e-c160254d5cef" providerId="ADAL" clId="{067FCE3D-3D41-4548-936F-F0A348C85C95}" dt="2025-10-12T08:35:56.372" v="1242" actId="478"/>
+          <ac:picMkLst>
+            <pc:docMk/>
+            <pc:sldMk cId="86843363" sldId="276"/>
+            <ac:picMk id="7" creationId="{B1E81B7B-41F8-615A-5EAB-AD183D97FEF0}"/>
+          </ac:picMkLst>
+        </pc:picChg>
+        <pc:picChg chg="add del mod">
+          <ac:chgData name="Dave Sushames" userId="ce71797e-895c-47df-af8e-c160254d5cef" providerId="ADAL" clId="{067FCE3D-3D41-4548-936F-F0A348C85C95}" dt="2025-10-12T08:36:22.252" v="1247" actId="478"/>
+          <ac:picMkLst>
+            <pc:docMk/>
+            <pc:sldMk cId="86843363" sldId="276"/>
+            <ac:picMk id="9" creationId="{6CCCBCAB-9632-911D-4FB5-EA15CEC9B67B}"/>
+          </ac:picMkLst>
+        </pc:picChg>
+        <pc:picChg chg="add mod">
+          <ac:chgData name="Dave Sushames" userId="ce71797e-895c-47df-af8e-c160254d5cef" providerId="ADAL" clId="{067FCE3D-3D41-4548-936F-F0A348C85C95}" dt="2025-10-12T08:36:30.175" v="1251" actId="14100"/>
+          <ac:picMkLst>
+            <pc:docMk/>
+            <pc:sldMk cId="86843363" sldId="276"/>
+            <ac:picMk id="11" creationId="{48EE5AC1-4E0B-4783-7016-9460002DE95E}"/>
           </ac:picMkLst>
         </pc:picChg>
       </pc:sldChg>
@@ -4290,10 +4345,10 @@
       </p:sp>
       <p:pic>
         <p:nvPicPr>
-          <p:cNvPr id="5" name="Picture 4">
-            <a:extLst>
-              <a:ext uri="{FF2B5EF4-FFF2-40B4-BE49-F238E27FC236}">
-                <a16:creationId xmlns:a16="http://schemas.microsoft.com/office/drawing/2014/main" id="{7C866F3C-E247-A1FE-041D-922BD663EE7D}"/>
+          <p:cNvPr id="11" name="Picture 10">
+            <a:extLst>
+              <a:ext uri="{FF2B5EF4-FFF2-40B4-BE49-F238E27FC236}">
+                <a16:creationId xmlns:a16="http://schemas.microsoft.com/office/drawing/2014/main" id="{48EE5AC1-4E0B-4783-7016-9460002DE95E}"/>
               </a:ext>
             </a:extLst>
           </p:cNvPr>
@@ -4310,8 +4365,8 @@
         </p:blipFill>
         <p:spPr>
           <a:xfrm>
-            <a:off x="2813868" y="1232034"/>
-            <a:ext cx="7430537" cy="5441064"/>
+            <a:off x="1989940" y="1237609"/>
+            <a:ext cx="8358373" cy="5255265"/>
           </a:xfrm>
           <a:prstGeom prst="rect">
             <a:avLst/>
@@ -4376,8 +4431,12 @@
           <a:lstStyle/>
           <a:p>
             <a:r>
+              <a:rPr lang="en-US" dirty="0"/>
+              <a:t>B</a:t>
+            </a:r>
+            <a:r>
               <a:rPr lang="en-NZ" dirty="0"/>
-              <a:t>Testing BBT</a:t>
+              <a:t>lack box tests</a:t>
             </a:r>
           </a:p>
         </p:txBody>
@@ -4495,7 +4554,7 @@
           <a:p>
             <a:r>
               <a:rPr lang="en-NZ" dirty="0"/>
-              <a:t>Testing WBT</a:t>
+              <a:t>White box tests</a:t>
             </a:r>
           </a:p>
         </p:txBody>
@@ -4635,7 +4694,7 @@
             <p:ph idx="1"/>
             <p:extLst>
               <p:ext uri="{D42A27DB-BD31-4B8C-83A1-F6EECF244321}">
-                <p14:modId xmlns:p14="http://schemas.microsoft.com/office/powerpoint/2010/main" val="720130833"/>
+                <p14:modId xmlns:p14="http://schemas.microsoft.com/office/powerpoint/2010/main" val="4237058184"/>
               </p:ext>
             </p:extLst>
           </p:nvPr>
@@ -4873,6 +4932,11 @@
                     <a:bodyPr/>
                     <a:lstStyle/>
                     <a:p>
+                      <a:pPr algn="ctr"/>
+                      <a:r>
+                        <a:rPr lang="en-US" dirty="0"/>
+                        <a:t>“</a:t>
+                      </a:r>
                       <a:endParaRPr lang="en-NZ" dirty="0"/>
                     </a:p>
                   </a:txBody>
@@ -4911,6 +4975,11 @@
                     <a:bodyPr/>
                     <a:lstStyle/>
                     <a:p>
+                      <a:pPr algn="ctr"/>
+                      <a:r>
+                        <a:rPr lang="en-US" dirty="0"/>
+                        <a:t>“</a:t>
+                      </a:r>
                       <a:endParaRPr lang="en-NZ" dirty="0"/>
                     </a:p>
                   </a:txBody>
@@ -4941,6 +5010,11 @@
                     <a:bodyPr/>
                     <a:lstStyle/>
                     <a:p>
+                      <a:pPr algn="ctr"/>
+                      <a:r>
+                        <a:rPr lang="en-US" dirty="0"/>
+                        <a:t>“</a:t>
+                      </a:r>
                       <a:endParaRPr lang="en-NZ" dirty="0"/>
                     </a:p>
                   </a:txBody>
@@ -5550,7 +5624,15 @@
             </a:r>
             <a:r>
               <a:rPr lang="en-NZ" dirty="0"/>
-              <a:t> of the last person who edited, instead of the current user.</a:t>
+              <a:t> of the last person who edited, instead of the current user. Had to delete the ‘bin’ and ‘</a:t>
+            </a:r>
+            <a:r>
+              <a:rPr lang="en-NZ" dirty="0" err="1"/>
+              <a:t>obj</a:t>
+            </a:r>
+            <a:r>
+              <a:rPr lang="en-NZ" dirty="0"/>
+              <a:t>’ folders to fix.</a:t>
             </a:r>
           </a:p>
           <a:p>
@@ -5773,7 +5855,7 @@
             </a:pPr>
             <a:r>
               <a:rPr lang="en-US" dirty="0"/>
-              <a:t>We didn’t hate each other by the end of the project (massive win)</a:t>
+              <a:t>We didn’t hate each other by the end of the project (massive win).</a:t>
             </a:r>
           </a:p>
           <a:p>
